--- a/docs/ipoe-lab/slides/toranomaki.pptx
+++ b/docs/ipoe-lab/slides/toranomaki.pptx
@@ -3360,7 +3360,7 @@
                 </a:solidFill>
                 <a:latin typeface="Meiryo UI"/>
               </a:rPr>
-              <a:t>1-4. 演習 1-A: CPE の WAN に何が付いているか  ⚠未検証</a:t>
+              <a:t>1-4. 演習 1-A: CPE の WAN に何が付いているか  (実測済み)</a:t>
             </a:r>
           </a:p>
         </p:txBody>
@@ -5424,7 +5424,7 @@
                 </a:solidFill>
                 <a:latin typeface="Meiryo UI"/>
               </a:rPr>
-              <a:t>2-5. NGN と VNE はセットで切り替える  ⚠未検証</a:t>
+              <a:t>2-5. NGN と VNE はセットで切り替える  (実測済み)</a:t>
             </a:r>
           </a:p>
         </p:txBody>
@@ -5823,7 +5823,7 @@
                 </a:solidFill>
                 <a:latin typeface="Meiryo UI"/>
               </a:rPr>
-              <a:t>2-6. 演習 2-A: 4 兄弟をキャプチャする  ⚠未検証</a:t>
+              <a:t>2-6. 演習 2-A: 4 兄弟をキャプチャする  (実測済み)</a:t>
             </a:r>
           </a:p>
         </p:txBody>
@@ -6232,7 +6232,7 @@
                 </a:solidFill>
                 <a:latin typeface="Meiryo UI"/>
               </a:rPr>
-              <a:t>ラボ既定ではこの癖は再現しない。既定では DUID-LLT でも PD が降りる</a:t>
+              <a:t>OpenWrt は DUID-LL を送るので DROP を素通りする (サイクル 5 実測)</a:t>
             </a:r>
           </a:p>
           <a:p>
@@ -8939,7 +8939,7 @@
                 </a:solidFill>
                 <a:latin typeface="Meiryo UI"/>
               </a:rPr>
-              <a:t>3-6. 演習 3-A: ポートを数えて、失敗させる  ⚠未検証</a:t>
+              <a:t>3-6. 演習 3-A: ポートを数えて、失敗させる  (実測済み)</a:t>
             </a:r>
           </a:p>
         </p:txBody>
@@ -9053,7 +9053,7 @@
                 </a:solidFill>
                 <a:latin typeface="Meiryo UI"/>
               </a:rPr>
-              <a:t>③ R3 (ポート制限) を再現する。ただし前提作業が必要</a:t>
+              <a:t>③ R3 (ポート制限) を再現する。OpenWrt が CE なら enforce は不要</a:t>
             </a:r>
           </a:p>
           <a:p>
@@ -9063,13 +9063,29 @@
               </a:spcAft>
             </a:pPr>
             <a:r>
+              <a:rPr sz="1700" b="0">
+                <a:solidFill>
+                  <a:srgbClr val="0B6040"/>
+                </a:solidFill>
+                <a:latin typeface="Consolas"/>
+              </a:rPr>
+              <a:t>for i in $(seq 20); do curl -s --limit-rate 1k -m 30 ... &amp; done</a:t>
+            </a:r>
+          </a:p>
+          <a:p>
+            <a:pPr lvl="1" algn="l">
+              <a:spcAft>
+                <a:spcPts val="400"/>
+              </a:spcAft>
+            </a:pPr>
+            <a:r>
               <a:rPr sz="1700" b="1">
                 <a:solidFill>
                   <a:srgbClr val="C0392B"/>
                 </a:solidFill>
                 <a:latin typeface="Meiryo UI"/>
               </a:rPr>
-              <a:t>ラボの BR はポート制限を強制しない (制限は CE の NAT 実装依存)</a:t>
+              <a:t>紙に書いた 240 と違い、17 本目以降が失敗する (成功は 16 本)</a:t>
             </a:r>
           </a:p>
           <a:p>
@@ -9085,7 +9101,23 @@
                 </a:solidFill>
                 <a:latin typeface="Meiryo UI"/>
               </a:rPr>
-              <a:t>BR に enforce 用 nft を投入してから実施する (test-matrix.md R3 に投入と戻し方)</a:t>
+              <a:t>nft の snat が終端判定で先頭ブロックのみ使用。実機では必ず数え直す</a:t>
+            </a:r>
+          </a:p>
+          <a:p>
+            <a:pPr algn="l">
+              <a:spcAft>
+                <a:spcPts val="700"/>
+              </a:spcAft>
+            </a:pPr>
+            <a:r>
+              <a:rPr sz="2000" b="1">
+                <a:solidFill>
+                  <a:srgbClr val="1F3355"/>
+                </a:solidFill>
+                <a:latin typeface="Meiryo UI"/>
+              </a:rPr>
+              <a:t>④ R4: DS-Lite でポート開放を設定し、INET-SIM から叩いて届かないことを確認</a:t>
             </a:r>
           </a:p>
           <a:p>
@@ -9101,39 +9133,7 @@
                 </a:solidFill>
                 <a:latin typeface="Meiryo UI"/>
               </a:rPr>
-              <a:t>これを飛ばすと演習が成功して終わる = 「MAP-E でも開放できる」と誤学習する</a:t>
-            </a:r>
-          </a:p>
-          <a:p>
-            <a:pPr algn="l">
-              <a:spcAft>
-                <a:spcPts val="700"/>
-              </a:spcAft>
-            </a:pPr>
-            <a:r>
-              <a:rPr sz="2000" b="1">
-                <a:solidFill>
-                  <a:srgbClr val="1F3355"/>
-                </a:solidFill>
-                <a:latin typeface="Meiryo UI"/>
-              </a:rPr>
-              <a:t>④ R4: DS-Lite でポート開放を設定し、INET-SIM から nc / ping で叩いて届かないことを確認</a:t>
-            </a:r>
-          </a:p>
-          <a:p>
-            <a:pPr lvl="1" algn="l">
-              <a:spcAft>
-                <a:spcPts val="400"/>
-              </a:spcAft>
-            </a:pPr>
-            <a:r>
-              <a:rPr sz="1700" b="0">
-                <a:solidFill>
-                  <a:srgbClr val="555555"/>
-                </a:solidFill>
-                <a:latin typeface="Meiryo UI"/>
-              </a:rPr>
-              <a:t>外から叩く手順は test-matrix.md R13 が流用できる</a:t>
+              <a:t>前提: VNE と INET-SIM が別 VM (SPLIT_INET=1)。同居だと逆の結果になる</a:t>
             </a:r>
           </a:p>
           <a:p>
@@ -9751,7 +9751,7 @@
                 </a:solidFill>
                 <a:latin typeface="Meiryo UI"/>
               </a:rPr>
-              <a:t>ラボは一度も実行されていない。「⚠未検証」の演習は期待結果が未確認</a:t>
+              <a:t>サイクル 1〜3・5・6 実走済み。R1〜R6/D1 の 7 件も実測完了</a:t>
             </a:r>
           </a:p>
           <a:p>
@@ -9815,7 +9815,7 @@
                 </a:solidFill>
                 <a:latin typeface="Meiryo UI"/>
               </a:rPr>
-              <a:t>「⚠未検証」の演習を 1 本ずつ実走し、期待結果と所要時間を書き込む</a:t>
+              <a:t>実施前に test-matrix §4 の「⚠ 実測」注記を必ず読む (5 件が想定と違った)</a:t>
             </a:r>
           </a:p>
           <a:p>

--- a/docs/ipoe-lab/slides/toranomaki.pptx
+++ b/docs/ipoe-lab/slides/toranomaki.pptx
@@ -4740,13 +4740,29 @@
               </a:spcAft>
             </a:pPr>
             <a:r>
+              <a:rPr sz="1700" b="0">
+                <a:solidFill>
+                  <a:srgbClr val="555555"/>
+                </a:solidFill>
+                <a:latin typeface="Meiryo UI"/>
+              </a:rPr>
+              <a:t>この違いが効くのは「LAN をいくつのセグメントに切れるか」と「HGW とどちらで終端するか」</a:t>
+            </a:r>
+          </a:p>
+          <a:p>
+            <a:pPr lvl="1" algn="l">
+              <a:spcAft>
+                <a:spcPts val="400"/>
+              </a:spcAft>
+            </a:pPr>
+            <a:r>
               <a:rPr sz="1700" b="1">
                 <a:solidFill>
                   <a:srgbClr val="C0392B"/>
                 </a:solidFill>
                 <a:latin typeface="Meiryo UI"/>
               </a:rPr>
-              <a:t>この違いが「MAP-E が組めるか」に直結します(第4部の実測を参照)</a:t>
+              <a:t>※ MAP-E は /64 (RA 方式) でも組めます。ラボでも RA 方式で 198.51.100.20 / PSID 3 を導出しました</a:t>
             </a:r>
           </a:p>
         </p:txBody>
@@ -5321,7 +5337,7 @@
                           </a:solidFill>
                           <a:latin typeface="Meiryo UI"/>
                         </a:rPr>
-                        <a:t>OpenWrt が既定で作る。事故の元(第3部で扱う)</a:t>
+                        <a:t>規格上は fc00::/7。OpenWrt が既定で作る (事故の元)</a:t>
                       </a:r>
                     </a:p>
                   </a:txBody>
@@ -5812,7 +5828,7 @@
         </p:nvSpPr>
         <p:spPr>
           <a:xfrm>
-            <a:off x="502920" y="4398264"/>
+            <a:off x="502920" y="4672583"/>
             <a:ext cx="11155680" cy="548640"/>
           </a:xfrm>
           <a:prstGeom prst="rect">
@@ -6164,7 +6180,7 @@
                 </a:solidFill>
                 <a:latin typeface="Meiryo UI"/>
               </a:rPr>
-              <a:t>教科書: 第5章「近隣探索プロトコル(NDP)」/ 第6章</a:t>
+              <a:t>教科書: 第5章「ICMPv6」/ 第6章「近隣探索プロトコル(NDP)」</a:t>
             </a:r>
           </a:p>
         </p:txBody>
@@ -6612,7 +6628,55 @@
                 </a:solidFill>
                 <a:latin typeface="Meiryo UI"/>
               </a:rPr>
-              <a:t>M=0 → SLAAC だけ。M=1 → DHCPv6 でアドレスをもらう。O=1 → DNS 等だけ DHCPv6 から。</a:t>
+              <a:t>M=0 → DHCPv6 でアドレスはもらわない。M=1 → DHCPv6 でも アドレスをもらう。O=1 → DNS 等だけ DHCPv6 から。</a:t>
+            </a:r>
+          </a:p>
+          <a:p>
+            <a:pPr algn="l">
+              <a:spcAft>
+                <a:spcPts val="600"/>
+              </a:spcAft>
+            </a:pPr>
+            <a:r>
+              <a:rPr sz="1400" b="1">
+                <a:solidFill>
+                  <a:srgbClr val="C0392B"/>
+                </a:solidFill>
+                <a:latin typeface="Meiryo UI"/>
+              </a:rPr>
+              <a:t>※ SLAAC するかどうかを決めるのは M ではなく、RA の中のプレフィックス情報にある A フラグです。</a:t>
+            </a:r>
+          </a:p>
+          <a:p>
+            <a:pPr algn="l">
+              <a:spcAft>
+                <a:spcPts val="600"/>
+              </a:spcAft>
+            </a:pPr>
+            <a:r>
+              <a:rPr sz="1400" b="0">
+                <a:solidFill>
+                  <a:srgbClr val="555555"/>
+                </a:solidFill>
+                <a:latin typeface="Meiryo UI"/>
+              </a:rPr>
+              <a:t>  M=1 でも A=1 なら SLAAC も併走し、端末にアドレスが 2 本以上付きます。</a:t>
+            </a:r>
+          </a:p>
+          <a:p>
+            <a:pPr algn="l">
+              <a:spcAft>
+                <a:spcPts val="600"/>
+              </a:spcAft>
+            </a:pPr>
+            <a:r>
+              <a:rPr sz="1400" b="1">
+                <a:solidFill>
+                  <a:srgbClr val="C0392B"/>
+                </a:solidFill>
+                <a:latin typeface="Meiryo UI"/>
+              </a:rPr>
+              <a:t>※ M/O はルータからの推奨でしかなく、従うかは OS 次第 (Android は DHCPv6 を使いません)。</a:t>
             </a:r>
           </a:p>
           <a:p>
@@ -8651,7 +8715,7 @@
         </p:nvGraphicFramePr>
         <p:xfrm>
           <a:off x="502920" y="1143000"/>
-          <a:ext cx="10972800" cy="2688336"/>
+          <a:ext cx="10972800" cy="3072384"/>
         </p:xfrm>
         <a:graphic>
           <a:graphicData uri="http://schemas.openxmlformats.org/drawingml/2006/table">
@@ -9323,6 +9387,100 @@
                   </a:tcPr>
                 </a:tc>
               </a:tr>
+              <a:tr h="384048">
+                <a:tc>
+                  <a:txBody>
+                    <a:bodyPr/>
+                    <a:lstStyle/>
+                    <a:p>
+                      <a:pPr algn="l"/>
+                      <a:r>
+                        <a:rPr sz="1200" b="0">
+                          <a:solidFill>
+                            <a:srgbClr val="1F3355"/>
+                          </a:solidFill>
+                          <a:latin typeface="Meiryo UI"/>
+                        </a:rPr>
+                        <a:t>ソフトバンク光 IPv6 高速ハイブリッド</a:t>
+                      </a:r>
+                    </a:p>
+                  </a:txBody>
+                  <a:tcPr>
+                    <a:solidFill>
+                      <a:srgbClr val="FFFFFF"/>
+                    </a:solidFill>
+                  </a:tcPr>
+                </a:tc>
+                <a:tc>
+                  <a:txBody>
+                    <a:bodyPr/>
+                    <a:lstStyle/>
+                    <a:p>
+                      <a:pPr algn="l"/>
+                      <a:r>
+                        <a:rPr sz="1200" b="0">
+                          <a:solidFill>
+                            <a:srgbClr val="1F3355"/>
+                          </a:solidFill>
+                          <a:latin typeface="Meiryo UI"/>
+                        </a:rPr>
+                        <a:t>BBIX</a:t>
+                      </a:r>
+                    </a:p>
+                  </a:txBody>
+                  <a:tcPr>
+                    <a:solidFill>
+                      <a:srgbClr val="FFFFFF"/>
+                    </a:solidFill>
+                  </a:tcPr>
+                </a:tc>
+                <a:tc>
+                  <a:txBody>
+                    <a:bodyPr/>
+                    <a:lstStyle/>
+                    <a:p>
+                      <a:pPr algn="l"/>
+                      <a:r>
+                        <a:rPr sz="1200" b="0">
+                          <a:solidFill>
+                            <a:srgbClr val="1F3355"/>
+                          </a:solidFill>
+                          <a:latin typeface="Meiryo UI"/>
+                        </a:rPr>
+                        <a:t>独自方式</a:t>
+                      </a:r>
+                    </a:p>
+                  </a:txBody>
+                  <a:tcPr>
+                    <a:solidFill>
+                      <a:srgbClr val="FFFFFF"/>
+                    </a:solidFill>
+                  </a:tcPr>
+                </a:tc>
+                <a:tc>
+                  <a:txBody>
+                    <a:bodyPr/>
+                    <a:lstStyle/>
+                    <a:p>
+                      <a:pPr algn="l"/>
+                      <a:r>
+                        <a:rPr sz="1200" b="0">
+                          <a:solidFill>
+                            <a:srgbClr val="1F3355"/>
+                          </a:solidFill>
+                          <a:latin typeface="Meiryo UI"/>
+                        </a:rPr>
+                        <a:t>光BBユニット前提。本資料の対象外</a:t>
+                      </a:r>
+                    </a:p>
+                  </a:txBody>
+                  <a:tcPr>
+                    <a:solidFill>
+                      <a:srgbClr val="FFFFFF"/>
+                    </a:solidFill>
+                  </a:tcPr>
+                </a:tc>
+              </a:tr>
             </a:tbl>
           </a:graphicData>
         </a:graphic>
@@ -9335,7 +9493,7 @@
         </p:nvSpPr>
         <p:spPr>
           <a:xfrm>
-            <a:off x="502920" y="4014215"/>
+            <a:off x="502920" y="4398264"/>
             <a:ext cx="11155680" cy="548640"/>
           </a:xfrm>
           <a:prstGeom prst="rect">
@@ -10007,7 +10165,23 @@
                 </a:solidFill>
                 <a:latin typeface="Meiryo UI"/>
               </a:rPr>
-              <a:t>VNE … IPv6 の上で IPv4 を通す事業者 (JPNE / インターネットマルチフィード等)</a:t>
+              <a:t>VNE … NGN 上の IPv6 (IPoE) 接続を ISP に卸す事業者。多くは IPv4 over IPv6 もセットで提供</a:t>
+            </a:r>
+          </a:p>
+          <a:p>
+            <a:pPr lvl="1" algn="l">
+              <a:spcAft>
+                <a:spcPts val="400"/>
+              </a:spcAft>
+            </a:pPr>
+            <a:r>
+              <a:rPr sz="1700" b="0">
+                <a:solidFill>
+                  <a:srgbClr val="555555"/>
+                </a:solidFill>
+                <a:latin typeface="Meiryo UI"/>
+              </a:rPr>
+              <a:t>JPIX (旧 JPNE) / インターネットマルチフィード / NTT ドコモビジネス (旧 NTT Com) 等</a:t>
             </a:r>
           </a:p>
           <a:p>
@@ -11160,7 +11334,7 @@
                 </a:solidFill>
                 <a:latin typeface="Meiryo UI"/>
               </a:rPr>
-              <a:t>1-4. 演習 1-A: CPE の WAN に何が付いているか  (実測済み)</a:t>
+              <a:t>1-4. 演習 1-A: CPE の WAN に何が付いているか  (手順は実測済み)</a:t>
             </a:r>
           </a:p>
         </p:txBody>
@@ -11469,7 +11643,7 @@
                 </a:solidFill>
                 <a:latin typeface="Meiryo UI"/>
               </a:rPr>
-              <a:t>⚠ 実走で確認: 実際に GUA が付くか、付くならどのプレフィックスか → study-guide に書き込む</a:t>
+              <a:t>手順はラボで実走済み。当日の受講者環境で GUA がどのプレフィックスで付くかは、その場で study-guide に記録すること</a:t>
             </a:r>
           </a:p>
         </p:txBody>
@@ -12087,7 +12261,7 @@
                 </a:solidFill>
                 <a:latin typeface="Meiryo UI"/>
               </a:rPr>
-              <a:t>サイクル 1〜6 実走済み。R1〜R6/D1 の 7 件も実測完了</a:t>
+              <a:t>サイクル 1〜7 実走済み。R1〜R6/D1 の 7 件も実測完了</a:t>
             </a:r>
           </a:p>
           <a:p>
@@ -12581,7 +12755,7 @@
                 </a:solidFill>
                 <a:latin typeface="Meiryo UI"/>
               </a:rPr>
-              <a:t>IPv6 に ARP はない。代わりに ICMPv6 の 4 兄弟が働く</a:t>
+              <a:t>IPv6 に ARP はない。代わりに ICMPv6 の 4 兄弟が働く (ほかに Redirect もある)</a:t>
             </a:r>
           </a:p>
           <a:p>
@@ -15201,7 +15375,55 @@
                 </a:solidFill>
                 <a:latin typeface="Meiryo UI"/>
               </a:rPr>
-              <a:t>実サービスとの対応表: docs/ipoe-lab/research-notes.md §2</a:t>
+              <a:t>実サービスとの対応表: 第2部の早見表 / study-guide.md §1.35</a:t>
+            </a:r>
+          </a:p>
+          <a:p>
+            <a:pPr algn="l">
+              <a:spcAft>
+                <a:spcPts val="700"/>
+              </a:spcAft>
+            </a:pPr>
+            <a:r>
+              <a:rPr sz="2000" b="1">
+                <a:solidFill>
+                  <a:srgbClr val="C0392B"/>
+                </a:solidFill>
+                <a:latin typeface="Meiryo UI"/>
+              </a:rPr>
+              <a:t>※ ソフトバンク光は例外です</a:t>
+            </a:r>
+          </a:p>
+          <a:p>
+            <a:pPr lvl="1" algn="l">
+              <a:spcAft>
+                <a:spcPts val="400"/>
+              </a:spcAft>
+            </a:pPr>
+            <a:r>
+              <a:rPr sz="1700" b="0">
+                <a:solidFill>
+                  <a:srgbClr val="555555"/>
+                </a:solidFill>
+                <a:latin typeface="Meiryo UI"/>
+              </a:rPr>
+              <a:t>BBIX の独自方式 (IPv6 高速ハイブリッド。4rd/SAM 系) で、光BBユニット前提</a:t>
+            </a:r>
+          </a:p>
+          <a:p>
+            <a:pPr lvl="1" algn="l">
+              <a:spcAft>
+                <a:spcPts val="400"/>
+              </a:spcAft>
+            </a:pPr>
+            <a:r>
+              <a:rPr sz="1700" b="0">
+                <a:solidFill>
+                  <a:srgbClr val="555555"/>
+                </a:solidFill>
+                <a:latin typeface="Meiryo UI"/>
+              </a:rPr>
+              <a:t>MAP-E でも DS-Lite でもないので、本資料の設計対象外として扱ってください</a:t>
             </a:r>
           </a:p>
         </p:txBody>
@@ -15269,7 +15491,7 @@
         </p:nvGraphicFramePr>
         <p:xfrm>
           <a:off x="502920" y="1143000"/>
-          <a:ext cx="11155680" cy="2304288"/>
+          <a:ext cx="11155680" cy="3072384"/>
         </p:xfrm>
         <a:graphic>
           <a:graphicData uri="http://schemas.openxmlformats.org/drawingml/2006/table">
@@ -15847,6 +16069,194 @@
                   </a:tcPr>
                 </a:tc>
               </a:tr>
+              <a:tr h="384048">
+                <a:tc>
+                  <a:txBody>
+                    <a:bodyPr/>
+                    <a:lstStyle/>
+                    <a:p>
+                      <a:pPr algn="l"/>
+                      <a:r>
+                        <a:rPr sz="1300" b="0">
+                          <a:solidFill>
+                            <a:srgbClr val="1F3355"/>
+                          </a:solidFill>
+                          <a:latin typeface="Meiryo UI"/>
+                        </a:rPr>
+                        <a:t>第4部</a:t>
+                      </a:r>
+                    </a:p>
+                  </a:txBody>
+                  <a:tcPr>
+                    <a:solidFill>
+                      <a:srgbClr val="F2F6FA"/>
+                    </a:solidFill>
+                  </a:tcPr>
+                </a:tc>
+                <a:tc>
+                  <a:txBody>
+                    <a:bodyPr/>
+                    <a:lstStyle/>
+                    <a:p>
+                      <a:pPr algn="l"/>
+                      <a:r>
+                        <a:rPr sz="1300" b="0">
+                          <a:solidFill>
+                            <a:srgbClr val="1F3355"/>
+                          </a:solidFill>
+                          <a:latin typeface="Meiryo UI"/>
+                        </a:rPr>
+                        <a:t>検証結果 (ラボ / 実機 892FJ / CML の実測値)</a:t>
+                      </a:r>
+                    </a:p>
+                  </a:txBody>
+                  <a:tcPr>
+                    <a:solidFill>
+                      <a:srgbClr val="F2F6FA"/>
+                    </a:solidFill>
+                  </a:tcPr>
+                </a:tc>
+                <a:tc>
+                  <a:txBody>
+                    <a:bodyPr/>
+                    <a:lstStyle/>
+                    <a:p>
+                      <a:pPr algn="l"/>
+                      <a:r>
+                        <a:rPr sz="1300" b="0">
+                          <a:solidFill>
+                            <a:srgbClr val="1F3355"/>
+                          </a:solidFill>
+                          <a:latin typeface="Meiryo UI"/>
+                        </a:rPr>
+                        <a:t>—</a:t>
+                      </a:r>
+                    </a:p>
+                  </a:txBody>
+                  <a:tcPr>
+                    <a:solidFill>
+                      <a:srgbClr val="F2F6FA"/>
+                    </a:solidFill>
+                  </a:tcPr>
+                </a:tc>
+                <a:tc>
+                  <a:txBody>
+                    <a:bodyPr/>
+                    <a:lstStyle/>
+                    <a:p>
+                      <a:pPr algn="l"/>
+                      <a:r>
+                        <a:rPr sz="1300" b="0">
+                          <a:solidFill>
+                            <a:srgbClr val="1F3355"/>
+                          </a:solidFill>
+                          <a:latin typeface="Meiryo UI"/>
+                        </a:rPr>
+                        <a:t>—</a:t>
+                      </a:r>
+                    </a:p>
+                  </a:txBody>
+                  <a:tcPr>
+                    <a:solidFill>
+                      <a:srgbClr val="F2F6FA"/>
+                    </a:solidFill>
+                  </a:tcPr>
+                </a:tc>
+              </a:tr>
+              <a:tr h="384048">
+                <a:tc>
+                  <a:txBody>
+                    <a:bodyPr/>
+                    <a:lstStyle/>
+                    <a:p>
+                      <a:pPr algn="l"/>
+                      <a:r>
+                        <a:rPr sz="1300" b="0">
+                          <a:solidFill>
+                            <a:srgbClr val="1F3355"/>
+                          </a:solidFill>
+                          <a:latin typeface="Meiryo UI"/>
+                        </a:rPr>
+                        <a:t>巻末</a:t>
+                      </a:r>
+                    </a:p>
+                  </a:txBody>
+                  <a:tcPr>
+                    <a:solidFill>
+                      <a:srgbClr val="FFFFFF"/>
+                    </a:solidFill>
+                  </a:tcPr>
+                </a:tc>
+                <a:tc>
+                  <a:txBody>
+                    <a:bodyPr/>
+                    <a:lstStyle/>
+                    <a:p>
+                      <a:pPr algn="l"/>
+                      <a:r>
+                        <a:rPr sz="1300" b="0">
+                          <a:solidFill>
+                            <a:srgbClr val="1F3355"/>
+                          </a:solidFill>
+                          <a:latin typeface="Meiryo UI"/>
+                        </a:rPr>
+                        <a:t>つまずきの壁 Q&amp;A (各回 +15〜20 分)</a:t>
+                      </a:r>
+                    </a:p>
+                  </a:txBody>
+                  <a:tcPr>
+                    <a:solidFill>
+                      <a:srgbClr val="FFFFFF"/>
+                    </a:solidFill>
+                  </a:tcPr>
+                </a:tc>
+                <a:tc>
+                  <a:txBody>
+                    <a:bodyPr/>
+                    <a:lstStyle/>
+                    <a:p>
+                      <a:pPr algn="l"/>
+                      <a:r>
+                        <a:rPr sz="1300" b="0">
+                          <a:solidFill>
+                            <a:srgbClr val="1F3355"/>
+                          </a:solidFill>
+                          <a:latin typeface="Meiryo UI"/>
+                        </a:rPr>
+                        <a:t>—</a:t>
+                      </a:r>
+                    </a:p>
+                  </a:txBody>
+                  <a:tcPr>
+                    <a:solidFill>
+                      <a:srgbClr val="FFFFFF"/>
+                    </a:solidFill>
+                  </a:tcPr>
+                </a:tc>
+                <a:tc>
+                  <a:txBody>
+                    <a:bodyPr/>
+                    <a:lstStyle/>
+                    <a:p>
+                      <a:pPr algn="l"/>
+                      <a:r>
+                        <a:rPr sz="1300" b="0">
+                          <a:solidFill>
+                            <a:srgbClr val="1F3355"/>
+                          </a:solidFill>
+                          <a:latin typeface="Meiryo UI"/>
+                        </a:rPr>
+                        <a:t>—</a:t>
+                      </a:r>
+                    </a:p>
+                  </a:txBody>
+                  <a:tcPr>
+                    <a:solidFill>
+                      <a:srgbClr val="FFFFFF"/>
+                    </a:solidFill>
+                  </a:tcPr>
+                </a:tc>
+              </a:tr>
             </a:tbl>
           </a:graphicData>
         </a:graphic>
@@ -15859,7 +16269,7 @@
         </p:nvSpPr>
         <p:spPr>
           <a:xfrm>
-            <a:off x="502920" y="3630168"/>
+            <a:off x="502920" y="4398264"/>
             <a:ext cx="11155680" cy="548640"/>
           </a:xfrm>
           <a:prstGeom prst="rect">
@@ -16112,7 +16522,7 @@
                 </a:solidFill>
                 <a:latin typeface="Consolas"/>
               </a:rPr>
-              <a:t>ブロック数 = 2^offset − 1 = 15   ← 0 は well-known 回避で使わない</a:t>
+              <a:t>ブロック数 = 2^offset − 1 = 15   ← ブロック 0 (ポート 0〜4095) は使わない</a:t>
             </a:r>
           </a:p>
           <a:p>
@@ -16160,7 +16570,7 @@
                 </a:solidFill>
                 <a:latin typeface="Meiryo UI"/>
               </a:rPr>
-              <a:t>v6プラス (JPNE) = 240 ポート / OCNバーチャルコネクト (NTT Com) = 1008 ポート</a:t>
+              <a:t>v6プラス (JPIX) = 240 ポート / OCN バーチャルコネクト (NTT ドコモビジネス) = 1008 ポート</a:t>
             </a:r>
           </a:p>
           <a:p>
@@ -17149,13 +17559,29 @@
               </a:spcAft>
             </a:pPr>
             <a:r>
+              <a:rPr sz="2000" b="1">
+                <a:solidFill>
+                  <a:srgbClr val="1F3355"/>
+                </a:solidFill>
+                <a:latin typeface="Meiryo UI"/>
+              </a:rPr>
+              <a:t>連続した引き算ではありません。PPPoE 系と IPoE トンネル系の 2 系統です</a:t>
+            </a:r>
+          </a:p>
+          <a:p>
+            <a:pPr algn="l">
+              <a:spcAft>
+                <a:spcPts val="700"/>
+              </a:spcAft>
+            </a:pPr>
+            <a:r>
               <a:rPr sz="2000" b="0">
                 <a:solidFill>
                   <a:srgbClr val="0B6040"/>
                 </a:solidFill>
                 <a:latin typeface="Consolas"/>
               </a:rPr>
-              <a:t>素の Ethernet                   1500</a:t>
+              <a:t>【PPPoE の場合】 1500 − PPPoE ヘッダ 8 = 1492 (MRU 上限で実質 1454 が多い)</a:t>
             </a:r>
           </a:p>
           <a:p>
@@ -17171,7 +17597,7 @@
                 </a:solidFill>
                 <a:latin typeface="Consolas"/>
               </a:rPr>
-              <a:t>  − PPPoE ヘッダ 8              → 1492  (MRU 上限で実質 1454 が多い)</a:t>
+              <a:t>【MAP-E / DS-Lite の場合】 1500 − IPv6 ヘッダ 40 = 1460</a:t>
             </a:r>
           </a:p>
           <a:p>
@@ -17187,7 +17613,7 @@
                 </a:solidFill>
                 <a:latin typeface="Consolas"/>
               </a:rPr>
-              <a:t>  − IPv6 ヘッダ 40 (トンネル)   → 1460  MAP-E / DS-Lite</a:t>
+              <a:t>     さらに encaplimit (Dst Options) が付くと −8 → 1452</a:t>
             </a:r>
           </a:p>
           <a:p>
@@ -17203,7 +17629,7 @@
                 </a:solidFill>
                 <a:latin typeface="Consolas"/>
               </a:rPr>
-              <a:t>  − encaplimit (Dst Options) 8  → 1452  ip6tnl の既定。片方向断の原因 (R11)</a:t>
+              <a:t>     ip6tnl の既定でこれが付く。片方向だけ切れる原因になる (R11)</a:t>
             </a:r>
           </a:p>
           <a:p>
@@ -18013,7 +18439,7 @@
                 </a:solidFill>
                 <a:latin typeface="Meiryo UI"/>
               </a:rPr>
-              <a:t>③ CML (Cat8000v。892FJ が MAP-E 非対応なので、MAP-E の実機確認はこちら)</a:t>
+              <a:t>③ CML (Cat8000v = 仮想ルータ。892FJ が MAP-E 非対応なので Cisco 実装の確認はこちら)</a:t>
             </a:r>
           </a:p>
           <a:p>
@@ -18881,7 +19307,7 @@
                           </a:solidFill>
                           <a:latin typeface="Meiryo UI"/>
                         </a:rPr>
-                        <a:t>2 ホップ減っている = トンネルを経由している</a:t>
+                        <a:t>Linux の初期値 64 から 2 減 = ルータを 2 つ越えている</a:t>
                       </a:r>
                     </a:p>
                   </a:txBody>
@@ -20397,7 +20823,7 @@
                 </a:solidFill>
                 <a:latin typeface="Meiryo UI"/>
               </a:rPr>
-              <a:t>実機 CE で 240 ポートを数えたかった — Cisco IOS XE で試した結果</a:t>
+              <a:t>Cisco 実装 (IOS XE) で 240 ポートを数えたかった — CML で試した結果</a:t>
             </a:r>
           </a:p>
         </p:txBody>

--- a/docs/ipoe-lab/slides/toranomaki.pptx
+++ b/docs/ipoe-lab/slides/toranomaki.pptx
@@ -3525,7 +3525,7 @@
         </p:nvGraphicFramePr>
         <p:xfrm>
           <a:off x="502920" y="1143000"/>
-          <a:ext cx="10789920" cy="3456432"/>
+          <a:ext cx="10789920" cy="2798064"/>
         </p:xfrm>
         <a:graphic>
           <a:graphicData uri="http://schemas.openxmlformats.org/drawingml/2006/table">
@@ -3539,7 +3539,7 @@
                 <a:gridCol w="2103120"/>
                 <a:gridCol w="5212080"/>
               </a:tblGrid>
-              <a:tr h="384048">
+              <a:tr h="310896">
                 <a:tc>
                   <a:txBody>
                     <a:bodyPr/>
@@ -3633,7 +3633,7 @@
                   </a:tcPr>
                 </a:tc>
               </a:tr>
-              <a:tr h="384048">
+              <a:tr h="310896">
                 <a:tc>
                   <a:txBody>
                     <a:bodyPr/>
@@ -3727,7 +3727,7 @@
                   </a:tcPr>
                 </a:tc>
               </a:tr>
-              <a:tr h="384048">
+              <a:tr h="310896">
                 <a:tc>
                   <a:txBody>
                     <a:bodyPr/>
@@ -3821,7 +3821,7 @@
                   </a:tcPr>
                 </a:tc>
               </a:tr>
-              <a:tr h="384048">
+              <a:tr h="310896">
                 <a:tc>
                   <a:txBody>
                     <a:bodyPr/>
@@ -3915,7 +3915,7 @@
                   </a:tcPr>
                 </a:tc>
               </a:tr>
-              <a:tr h="384048">
+              <a:tr h="310896">
                 <a:tc>
                   <a:txBody>
                     <a:bodyPr/>
@@ -4009,7 +4009,7 @@
                   </a:tcPr>
                 </a:tc>
               </a:tr>
-              <a:tr h="384048">
+              <a:tr h="310896">
                 <a:tc>
                   <a:txBody>
                     <a:bodyPr/>
@@ -4103,7 +4103,7 @@
                   </a:tcPr>
                 </a:tc>
               </a:tr>
-              <a:tr h="384048">
+              <a:tr h="310896">
                 <a:tc>
                   <a:txBody>
                     <a:bodyPr/>
@@ -4197,7 +4197,7 @@
                   </a:tcPr>
                 </a:tc>
               </a:tr>
-              <a:tr h="384048">
+              <a:tr h="310896">
                 <a:tc>
                   <a:txBody>
                     <a:bodyPr/>
@@ -4291,7 +4291,7 @@
                   </a:tcPr>
                 </a:tc>
               </a:tr>
-              <a:tr h="384048">
+              <a:tr h="310896">
                 <a:tc>
                   <a:txBody>
                     <a:bodyPr/>
@@ -4397,7 +4397,7 @@
         </p:nvSpPr>
         <p:spPr>
           <a:xfrm>
-            <a:off x="502920" y="4782312"/>
+            <a:off x="502920" y="4197096"/>
             <a:ext cx="11155680" cy="548640"/>
           </a:xfrm>
           <a:prstGeom prst="rect">
@@ -4529,7 +4529,7 @@
         <p:spPr>
           <a:xfrm>
             <a:off x="594360" y="1371600"/>
-            <a:ext cx="10972800" cy="4846320"/>
+            <a:ext cx="10972800" cy="4709160"/>
           </a:xfrm>
           <a:prstGeom prst="rect">
             <a:avLst/>
@@ -4544,11 +4544,11 @@
           <a:p>
             <a:pPr algn="l">
               <a:spcAft>
-                <a:spcPts val="700"/>
-              </a:spcAft>
-            </a:pPr>
-            <a:r>
-              <a:rPr sz="2000" b="1">
+                <a:spcPts val="800"/>
+              </a:spcAft>
+            </a:pPr>
+            <a:r>
+              <a:rPr sz="1800" b="1">
                 <a:solidFill>
                   <a:srgbClr val="1F3355"/>
                 </a:solidFill>
@@ -4564,7 +4564,7 @@
               </a:spcAft>
             </a:pPr>
             <a:r>
-              <a:rPr sz="1700" b="0">
+              <a:rPr sz="1500" b="0">
                 <a:solidFill>
                   <a:srgbClr val="555555"/>
                 </a:solidFill>
@@ -4580,7 +4580,7 @@
               </a:spcAft>
             </a:pPr>
             <a:r>
-              <a:rPr sz="1700" b="0">
+              <a:rPr sz="1500" b="0">
                 <a:solidFill>
                   <a:srgbClr val="555555"/>
                 </a:solidFill>
@@ -4596,7 +4596,7 @@
               </a:spcAft>
             </a:pPr>
             <a:r>
-              <a:rPr sz="1700" b="0">
+              <a:rPr sz="1500" b="0">
                 <a:solidFill>
                   <a:srgbClr val="555555"/>
                 </a:solidFill>
@@ -4612,7 +4612,7 @@
               </a:spcAft>
             </a:pPr>
             <a:r>
-              <a:rPr sz="1700" b="0">
+              <a:rPr sz="1500" b="0">
                 <a:solidFill>
                   <a:srgbClr val="0B6040"/>
                 </a:solidFill>
@@ -4624,11 +4624,11 @@
           <a:p>
             <a:pPr algn="l">
               <a:spcAft>
-                <a:spcPts val="700"/>
-              </a:spcAft>
-            </a:pPr>
-            <a:r>
-              <a:rPr sz="2000" b="1">
+                <a:spcPts val="800"/>
+              </a:spcAft>
+            </a:pPr>
+            <a:r>
+              <a:rPr sz="1800" b="1">
                 <a:solidFill>
                   <a:srgbClr val="1F3355"/>
                 </a:solidFill>
@@ -4644,7 +4644,7 @@
               </a:spcAft>
             </a:pPr>
             <a:r>
-              <a:rPr sz="1700" b="0">
+              <a:rPr sz="1500" b="0">
                 <a:solidFill>
                   <a:srgbClr val="555555"/>
                 </a:solidFill>
@@ -4660,7 +4660,7 @@
               </a:spcAft>
             </a:pPr>
             <a:r>
-              <a:rPr sz="1700" b="0">
+              <a:rPr sz="1500" b="0">
                 <a:solidFill>
                   <a:srgbClr val="555555"/>
                 </a:solidFill>
@@ -4676,7 +4676,7 @@
               </a:spcAft>
             </a:pPr>
             <a:r>
-              <a:rPr sz="1700" b="1">
+              <a:rPr sz="1500" b="1">
                 <a:solidFill>
                   <a:srgbClr val="C0392B"/>
                 </a:solidFill>
@@ -4688,11 +4688,11 @@
           <a:p>
             <a:pPr algn="l">
               <a:spcAft>
-                <a:spcPts val="700"/>
-              </a:spcAft>
-            </a:pPr>
-            <a:r>
-              <a:rPr sz="2000" b="1">
+                <a:spcPts val="800"/>
+              </a:spcAft>
+            </a:pPr>
+            <a:r>
+              <a:rPr sz="1800" b="1">
                 <a:solidFill>
                   <a:srgbClr val="1F3355"/>
                 </a:solidFill>
@@ -4708,7 +4708,7 @@
               </a:spcAft>
             </a:pPr>
             <a:r>
-              <a:rPr sz="1700" b="0">
+              <a:rPr sz="1500" b="0">
                 <a:solidFill>
                   <a:srgbClr val="555555"/>
                 </a:solidFill>
@@ -4724,7 +4724,7 @@
               </a:spcAft>
             </a:pPr>
             <a:r>
-              <a:rPr sz="1700" b="0">
+              <a:rPr sz="1500" b="0">
                 <a:solidFill>
                   <a:srgbClr val="555555"/>
                 </a:solidFill>
@@ -4740,7 +4740,7 @@
               </a:spcAft>
             </a:pPr>
             <a:r>
-              <a:rPr sz="1700" b="0">
+              <a:rPr sz="1500" b="0">
                 <a:solidFill>
                   <a:srgbClr val="555555"/>
                 </a:solidFill>
@@ -4756,7 +4756,7 @@
               </a:spcAft>
             </a:pPr>
             <a:r>
-              <a:rPr sz="1700" b="1">
+              <a:rPr sz="1500" b="1">
                 <a:solidFill>
                   <a:srgbClr val="C0392B"/>
                 </a:solidFill>
@@ -4775,8 +4775,8 @@
         </p:nvSpPr>
         <p:spPr>
           <a:xfrm>
-            <a:off x="594360" y="6263640"/>
-            <a:ext cx="10972800" cy="457200"/>
+            <a:off x="594360" y="6217920"/>
+            <a:ext cx="10972800" cy="502920"/>
           </a:xfrm>
           <a:prstGeom prst="rect">
             <a:avLst/>
@@ -4865,7 +4865,7 @@
         </p:nvGraphicFramePr>
         <p:xfrm>
           <a:off x="502920" y="1143000"/>
-          <a:ext cx="11155680" cy="3072384"/>
+          <a:ext cx="11155680" cy="2581402"/>
         </p:xfrm>
         <a:graphic>
           <a:graphicData uri="http://schemas.openxmlformats.org/drawingml/2006/table">
@@ -4880,7 +4880,7 @@
                 <a:gridCol w="1920240"/>
                 <a:gridCol w="3566160"/>
               </a:tblGrid>
-              <a:tr h="384048">
+              <a:tr h="322675">
                 <a:tc>
                   <a:txBody>
                     <a:bodyPr/>
@@ -4997,7 +4997,7 @@
                   </a:tcPr>
                 </a:tc>
               </a:tr>
-              <a:tr h="384048">
+              <a:tr h="322675">
                 <a:tc>
                   <a:txBody>
                     <a:bodyPr/>
@@ -5114,7 +5114,7 @@
                   </a:tcPr>
                 </a:tc>
               </a:tr>
-              <a:tr h="384048">
+              <a:tr h="322675">
                 <a:tc>
                   <a:txBody>
                     <a:bodyPr/>
@@ -5231,7 +5231,7 @@
                   </a:tcPr>
                 </a:tc>
               </a:tr>
-              <a:tr h="384048">
+              <a:tr h="322675">
                 <a:tc>
                   <a:txBody>
                     <a:bodyPr/>
@@ -5348,7 +5348,7 @@
                   </a:tcPr>
                 </a:tc>
               </a:tr>
-              <a:tr h="384048">
+              <a:tr h="322675">
                 <a:tc>
                   <a:txBody>
                     <a:bodyPr/>
@@ -5465,7 +5465,7 @@
                   </a:tcPr>
                 </a:tc>
               </a:tr>
-              <a:tr h="384048">
+              <a:tr h="322675">
                 <a:tc>
                   <a:txBody>
                     <a:bodyPr/>
@@ -5582,7 +5582,7 @@
                   </a:tcPr>
                 </a:tc>
               </a:tr>
-              <a:tr h="384048">
+              <a:tr h="322675">
                 <a:tc>
                   <a:txBody>
                     <a:bodyPr/>
@@ -5699,7 +5699,7 @@
                   </a:tcPr>
                 </a:tc>
               </a:tr>
-              <a:tr h="384048">
+              <a:tr h="322677">
                 <a:tc>
                   <a:txBody>
                     <a:bodyPr/>
@@ -5828,7 +5828,7 @@
         </p:nvSpPr>
         <p:spPr>
           <a:xfrm>
-            <a:off x="502920" y="4672583"/>
+            <a:off x="502920" y="3980434"/>
             <a:ext cx="11155680" cy="548640"/>
           </a:xfrm>
           <a:prstGeom prst="rect">
@@ -5960,7 +5960,7 @@
         <p:spPr>
           <a:xfrm>
             <a:off x="594360" y="1371600"/>
-            <a:ext cx="10972800" cy="4846320"/>
+            <a:ext cx="10972800" cy="4709160"/>
           </a:xfrm>
           <a:prstGeom prst="rect">
             <a:avLst/>
@@ -5975,7 +5975,7 @@
           <a:p>
             <a:pPr algn="l">
               <a:spcAft>
-                <a:spcPts val="700"/>
+                <a:spcPts val="1000"/>
               </a:spcAft>
             </a:pPr>
             <a:r>
@@ -5991,7 +5991,7 @@
           <a:p>
             <a:pPr lvl="1" algn="l">
               <a:spcAft>
-                <a:spcPts val="400"/>
+                <a:spcPts val="600"/>
               </a:spcAft>
             </a:pPr>
             <a:r>
@@ -6007,7 +6007,7 @@
           <a:p>
             <a:pPr lvl="1" algn="l">
               <a:spcAft>
-                <a:spcPts val="400"/>
+                <a:spcPts val="600"/>
               </a:spcAft>
             </a:pPr>
             <a:r>
@@ -6023,7 +6023,7 @@
           <a:p>
             <a:pPr algn="l">
               <a:spcAft>
-                <a:spcPts val="700"/>
+                <a:spcPts val="1000"/>
               </a:spcAft>
             </a:pPr>
             <a:r>
@@ -6039,7 +6039,7 @@
           <a:p>
             <a:pPr lvl="1" algn="l">
               <a:spcAft>
-                <a:spcPts val="400"/>
+                <a:spcPts val="600"/>
               </a:spcAft>
             </a:pPr>
             <a:r>
@@ -6055,7 +6055,7 @@
           <a:p>
             <a:pPr lvl="1" algn="l">
               <a:spcAft>
-                <a:spcPts val="400"/>
+                <a:spcPts val="600"/>
               </a:spcAft>
             </a:pPr>
             <a:r>
@@ -6071,7 +6071,7 @@
           <a:p>
             <a:pPr lvl="1" algn="l">
               <a:spcAft>
-                <a:spcPts val="400"/>
+                <a:spcPts val="600"/>
               </a:spcAft>
             </a:pPr>
             <a:r>
@@ -6087,7 +6087,7 @@
           <a:p>
             <a:pPr algn="l">
               <a:spcAft>
-                <a:spcPts val="700"/>
+                <a:spcPts val="1000"/>
               </a:spcAft>
             </a:pPr>
             <a:r>
@@ -6103,7 +6103,7 @@
           <a:p>
             <a:pPr lvl="1" algn="l">
               <a:spcAft>
-                <a:spcPts val="400"/>
+                <a:spcPts val="600"/>
               </a:spcAft>
             </a:pPr>
             <a:r>
@@ -6119,7 +6119,7 @@
           <a:p>
             <a:pPr lvl="1" algn="l">
               <a:spcAft>
-                <a:spcPts val="400"/>
+                <a:spcPts val="600"/>
               </a:spcAft>
             </a:pPr>
             <a:r>
@@ -6135,7 +6135,7 @@
           <a:p>
             <a:pPr lvl="1" algn="l">
               <a:spcAft>
-                <a:spcPts val="400"/>
+                <a:spcPts val="600"/>
               </a:spcAft>
             </a:pPr>
             <a:r>
@@ -6158,8 +6158,8 @@
         </p:nvSpPr>
         <p:spPr>
           <a:xfrm>
-            <a:off x="594360" y="6263640"/>
-            <a:ext cx="10972800" cy="457200"/>
+            <a:off x="594360" y="6217920"/>
+            <a:ext cx="10972800" cy="502920"/>
           </a:xfrm>
           <a:prstGeom prst="rect">
             <a:avLst/>
@@ -8443,7 +8443,7 @@
         <p:spPr>
           <a:xfrm>
             <a:off x="594360" y="1371600"/>
-            <a:ext cx="10972800" cy="4846320"/>
+            <a:ext cx="10972800" cy="4709160"/>
           </a:xfrm>
           <a:prstGeom prst="rect">
             <a:avLst/>
@@ -8458,7 +8458,7 @@
           <a:p>
             <a:pPr algn="l">
               <a:spcAft>
-                <a:spcPts val="700"/>
+                <a:spcPts val="1000"/>
               </a:spcAft>
             </a:pPr>
             <a:r>
@@ -8474,7 +8474,7 @@
           <a:p>
             <a:pPr lvl="1" algn="l">
               <a:spcAft>
-                <a:spcPts val="400"/>
+                <a:spcPts val="600"/>
               </a:spcAft>
             </a:pPr>
             <a:r>
@@ -8490,7 +8490,7 @@
           <a:p>
             <a:pPr lvl="1" algn="l">
               <a:spcAft>
-                <a:spcPts val="400"/>
+                <a:spcPts val="600"/>
               </a:spcAft>
             </a:pPr>
             <a:r>
@@ -8506,7 +8506,7 @@
           <a:p>
             <a:pPr algn="l">
               <a:spcAft>
-                <a:spcPts val="700"/>
+                <a:spcPts val="1000"/>
               </a:spcAft>
             </a:pPr>
             <a:r>
@@ -8522,7 +8522,7 @@
           <a:p>
             <a:pPr lvl="1" algn="l">
               <a:spcAft>
-                <a:spcPts val="400"/>
+                <a:spcPts val="600"/>
               </a:spcAft>
             </a:pPr>
             <a:r>
@@ -8538,7 +8538,7 @@
           <a:p>
             <a:pPr lvl="1" algn="l">
               <a:spcAft>
-                <a:spcPts val="400"/>
+                <a:spcPts val="600"/>
               </a:spcAft>
             </a:pPr>
             <a:r>
@@ -8554,7 +8554,7 @@
           <a:p>
             <a:pPr algn="l">
               <a:spcAft>
-                <a:spcPts val="700"/>
+                <a:spcPts val="1000"/>
               </a:spcAft>
             </a:pPr>
             <a:r>
@@ -8570,7 +8570,7 @@
           <a:p>
             <a:pPr lvl="1" algn="l">
               <a:spcAft>
-                <a:spcPts val="400"/>
+                <a:spcPts val="600"/>
               </a:spcAft>
             </a:pPr>
             <a:r>
@@ -8586,7 +8586,7 @@
           <a:p>
             <a:pPr lvl="1" algn="l">
               <a:spcAft>
-                <a:spcPts val="400"/>
+                <a:spcPts val="600"/>
               </a:spcAft>
             </a:pPr>
             <a:r>
@@ -8602,7 +8602,7 @@
           <a:p>
             <a:pPr lvl="1" algn="l">
               <a:spcAft>
-                <a:spcPts val="400"/>
+                <a:spcPts val="600"/>
               </a:spcAft>
             </a:pPr>
             <a:r>
@@ -8625,8 +8625,8 @@
         </p:nvSpPr>
         <p:spPr>
           <a:xfrm>
-            <a:off x="594360" y="6263640"/>
-            <a:ext cx="10972800" cy="457200"/>
+            <a:off x="594360" y="6217920"/>
+            <a:ext cx="10972800" cy="502920"/>
           </a:xfrm>
           <a:prstGeom prst="rect">
             <a:avLst/>
@@ -8715,7 +8715,7 @@
         </p:nvGraphicFramePr>
         <p:xfrm>
           <a:off x="502920" y="1143000"/>
-          <a:ext cx="10972800" cy="3072384"/>
+          <a:ext cx="10972800" cy="2487168"/>
         </p:xfrm>
         <a:graphic>
           <a:graphicData uri="http://schemas.openxmlformats.org/drawingml/2006/table">
@@ -8729,7 +8729,7 @@
                 <a:gridCol w="1463040"/>
                 <a:gridCol w="2926080"/>
               </a:tblGrid>
-              <a:tr h="384048">
+              <a:tr h="310896">
                 <a:tc>
                   <a:txBody>
                     <a:bodyPr/>
@@ -8823,7 +8823,7 @@
                   </a:tcPr>
                 </a:tc>
               </a:tr>
-              <a:tr h="384048">
+              <a:tr h="310896">
                 <a:tc>
                   <a:txBody>
                     <a:bodyPr/>
@@ -8917,7 +8917,7 @@
                   </a:tcPr>
                 </a:tc>
               </a:tr>
-              <a:tr h="384048">
+              <a:tr h="310896">
                 <a:tc>
                   <a:txBody>
                     <a:bodyPr/>
@@ -9011,7 +9011,7 @@
                   </a:tcPr>
                 </a:tc>
               </a:tr>
-              <a:tr h="384048">
+              <a:tr h="310896">
                 <a:tc>
                   <a:txBody>
                     <a:bodyPr/>
@@ -9105,7 +9105,7 @@
                   </a:tcPr>
                 </a:tc>
               </a:tr>
-              <a:tr h="384048">
+              <a:tr h="310896">
                 <a:tc>
                   <a:txBody>
                     <a:bodyPr/>
@@ -9199,7 +9199,7 @@
                   </a:tcPr>
                 </a:tc>
               </a:tr>
-              <a:tr h="384048">
+              <a:tr h="310896">
                 <a:tc>
                   <a:txBody>
                     <a:bodyPr/>
@@ -9293,7 +9293,7 @@
                   </a:tcPr>
                 </a:tc>
               </a:tr>
-              <a:tr h="384048">
+              <a:tr h="310896">
                 <a:tc>
                   <a:txBody>
                     <a:bodyPr/>
@@ -9387,7 +9387,7 @@
                   </a:tcPr>
                 </a:tc>
               </a:tr>
-              <a:tr h="384048">
+              <a:tr h="310896">
                 <a:tc>
                   <a:txBody>
                     <a:bodyPr/>
@@ -9493,7 +9493,7 @@
         </p:nvSpPr>
         <p:spPr>
           <a:xfrm>
-            <a:off x="502920" y="4398264"/>
+            <a:off x="502920" y="3886200"/>
             <a:ext cx="11155680" cy="548640"/>
           </a:xfrm>
           <a:prstGeom prst="rect">
@@ -9625,7 +9625,7 @@
         <p:spPr>
           <a:xfrm>
             <a:off x="594360" y="1371600"/>
-            <a:ext cx="10972800" cy="4846320"/>
+            <a:ext cx="10972800" cy="4983480"/>
           </a:xfrm>
           <a:prstGeom prst="rect">
             <a:avLst/>
@@ -9640,7 +9640,7 @@
           <a:p>
             <a:pPr algn="l">
               <a:spcAft>
-                <a:spcPts val="700"/>
+                <a:spcPts val="1000"/>
               </a:spcAft>
             </a:pPr>
             <a:r>
@@ -9656,7 +9656,7 @@
           <a:p>
             <a:pPr lvl="1" algn="l">
               <a:spcAft>
-                <a:spcPts val="400"/>
+                <a:spcPts val="600"/>
               </a:spcAft>
             </a:pPr>
             <a:r>
@@ -9672,7 +9672,7 @@
           <a:p>
             <a:pPr lvl="1" algn="l">
               <a:spcAft>
-                <a:spcPts val="400"/>
+                <a:spcPts val="600"/>
               </a:spcAft>
             </a:pPr>
             <a:r>
@@ -9688,7 +9688,7 @@
           <a:p>
             <a:pPr lvl="1" algn="l">
               <a:spcAft>
-                <a:spcPts val="400"/>
+                <a:spcPts val="600"/>
               </a:spcAft>
             </a:pPr>
             <a:r>
@@ -9704,7 +9704,7 @@
           <a:p>
             <a:pPr algn="l">
               <a:spcAft>
-                <a:spcPts val="700"/>
+                <a:spcPts val="1000"/>
               </a:spcAft>
             </a:pPr>
             <a:r>
@@ -9720,7 +9720,7 @@
           <a:p>
             <a:pPr lvl="1" algn="l">
               <a:spcAft>
-                <a:spcPts val="400"/>
+                <a:spcPts val="600"/>
               </a:spcAft>
             </a:pPr>
             <a:r>
@@ -9736,7 +9736,7 @@
           <a:p>
             <a:pPr lvl="1" algn="l">
               <a:spcAft>
-                <a:spcPts val="400"/>
+                <a:spcPts val="600"/>
               </a:spcAft>
             </a:pPr>
             <a:r>
@@ -9752,7 +9752,7 @@
           <a:p>
             <a:pPr algn="l">
               <a:spcAft>
-                <a:spcPts val="700"/>
+                <a:spcPts val="1000"/>
               </a:spcAft>
             </a:pPr>
             <a:r>
@@ -9768,7 +9768,7 @@
           <a:p>
             <a:pPr lvl="1" algn="l">
               <a:spcAft>
-                <a:spcPts val="400"/>
+                <a:spcPts val="600"/>
               </a:spcAft>
             </a:pPr>
             <a:r>
@@ -9784,7 +9784,7 @@
           <a:p>
             <a:pPr lvl="1" algn="l">
               <a:spcAft>
-                <a:spcPts val="400"/>
+                <a:spcPts val="600"/>
               </a:spcAft>
             </a:pPr>
             <a:r>
@@ -9800,7 +9800,7 @@
           <a:p>
             <a:pPr algn="l">
               <a:spcAft>
-                <a:spcPts val="700"/>
+                <a:spcPts val="1000"/>
               </a:spcAft>
             </a:pPr>
             <a:r>
@@ -9816,7 +9816,7 @@
           <a:p>
             <a:pPr lvl="1" algn="l">
               <a:spcAft>
-                <a:spcPts val="400"/>
+                <a:spcPts val="600"/>
               </a:spcAft>
             </a:pPr>
             <a:r>
@@ -10060,7 +10060,7 @@
         <p:spPr>
           <a:xfrm>
             <a:off x="594360" y="1371600"/>
-            <a:ext cx="10972800" cy="4846320"/>
+            <a:ext cx="10972800" cy="4709160"/>
           </a:xfrm>
           <a:prstGeom prst="rect">
             <a:avLst/>
@@ -10075,11 +10075,11 @@
           <a:p>
             <a:pPr algn="l">
               <a:spcAft>
-                <a:spcPts val="700"/>
-              </a:spcAft>
-            </a:pPr>
-            <a:r>
-              <a:rPr sz="2000" b="1">
+                <a:spcPts val="800"/>
+              </a:spcAft>
+            </a:pPr>
+            <a:r>
+              <a:rPr sz="1800" b="1">
                 <a:solidFill>
                   <a:srgbClr val="1F3355"/>
                 </a:solidFill>
@@ -10095,7 +10095,7 @@
               </a:spcAft>
             </a:pPr>
             <a:r>
-              <a:rPr sz="1700" b="0">
+              <a:rPr sz="1500" b="0">
                 <a:solidFill>
                   <a:srgbClr val="555555"/>
                 </a:solidFill>
@@ -10107,11 +10107,11 @@
           <a:p>
             <a:pPr algn="l">
               <a:spcAft>
-                <a:spcPts val="700"/>
-              </a:spcAft>
-            </a:pPr>
-            <a:r>
-              <a:rPr sz="2000" b="0">
+                <a:spcPts val="800"/>
+              </a:spcAft>
+            </a:pPr>
+            <a:r>
+              <a:rPr sz="1800" b="0">
                 <a:solidFill>
                   <a:srgbClr val="1F3355"/>
                 </a:solidFill>
@@ -10123,11 +10123,11 @@
           <a:p>
             <a:pPr algn="l">
               <a:spcAft>
-                <a:spcPts val="700"/>
-              </a:spcAft>
-            </a:pPr>
-            <a:r>
-              <a:rPr sz="2000" b="1">
+                <a:spcPts val="800"/>
+              </a:spcAft>
+            </a:pPr>
+            <a:r>
+              <a:rPr sz="1800" b="1">
                 <a:solidFill>
                   <a:srgbClr val="C0392B"/>
                 </a:solidFill>
@@ -10139,11 +10139,11 @@
           <a:p>
             <a:pPr algn="l">
               <a:spcAft>
-                <a:spcPts val="700"/>
-              </a:spcAft>
-            </a:pPr>
-            <a:r>
-              <a:rPr sz="2000" b="0">
+                <a:spcPts val="800"/>
+              </a:spcAft>
+            </a:pPr>
+            <a:r>
+              <a:rPr sz="1800" b="0">
                 <a:solidFill>
                   <a:srgbClr val="1F3355"/>
                 </a:solidFill>
@@ -10155,11 +10155,11 @@
           <a:p>
             <a:pPr algn="l">
               <a:spcAft>
-                <a:spcPts val="700"/>
-              </a:spcAft>
-            </a:pPr>
-            <a:r>
-              <a:rPr sz="2000" b="0">
+                <a:spcPts val="800"/>
+              </a:spcAft>
+            </a:pPr>
+            <a:r>
+              <a:rPr sz="1800" b="0">
                 <a:solidFill>
                   <a:srgbClr val="1F3355"/>
                 </a:solidFill>
@@ -10175,7 +10175,7 @@
               </a:spcAft>
             </a:pPr>
             <a:r>
-              <a:rPr sz="1700" b="0">
+              <a:rPr sz="1500" b="0">
                 <a:solidFill>
                   <a:srgbClr val="555555"/>
                 </a:solidFill>
@@ -10187,11 +10187,11 @@
           <a:p>
             <a:pPr algn="l">
               <a:spcAft>
-                <a:spcPts val="700"/>
-              </a:spcAft>
-            </a:pPr>
-            <a:r>
-              <a:rPr sz="2000" b="0">
+                <a:spcPts val="800"/>
+              </a:spcAft>
+            </a:pPr>
+            <a:r>
+              <a:rPr sz="1800" b="0">
                 <a:solidFill>
                   <a:srgbClr val="1F3355"/>
                 </a:solidFill>
@@ -10203,11 +10203,11 @@
           <a:p>
             <a:pPr algn="l">
               <a:spcAft>
-                <a:spcPts val="700"/>
-              </a:spcAft>
-            </a:pPr>
-            <a:r>
-              <a:rPr sz="2000" b="0">
+                <a:spcPts val="800"/>
+              </a:spcAft>
+            </a:pPr>
+            <a:r>
+              <a:rPr sz="1800" b="0">
                 <a:solidFill>
                   <a:srgbClr val="1F3355"/>
                 </a:solidFill>
@@ -10219,11 +10219,11 @@
           <a:p>
             <a:pPr algn="l">
               <a:spcAft>
-                <a:spcPts val="700"/>
-              </a:spcAft>
-            </a:pPr>
-            <a:r>
-              <a:rPr sz="2000" b="1">
+                <a:spcPts val="800"/>
+              </a:spcAft>
+            </a:pPr>
+            <a:r>
+              <a:rPr sz="1800" b="1">
                 <a:solidFill>
                   <a:srgbClr val="1F3355"/>
                 </a:solidFill>
@@ -10239,7 +10239,7 @@
               </a:spcAft>
             </a:pPr>
             <a:r>
-              <a:rPr sz="1700" b="0">
+              <a:rPr sz="1500" b="0">
                 <a:solidFill>
                   <a:srgbClr val="555555"/>
                 </a:solidFill>
@@ -10255,7 +10255,7 @@
               </a:spcAft>
             </a:pPr>
             <a:r>
-              <a:rPr sz="1700" b="0">
+              <a:rPr sz="1500" b="0">
                 <a:solidFill>
                   <a:srgbClr val="555555"/>
                 </a:solidFill>
@@ -10274,8 +10274,8 @@
         </p:nvSpPr>
         <p:spPr>
           <a:xfrm>
-            <a:off x="594360" y="6263640"/>
-            <a:ext cx="10972800" cy="457200"/>
+            <a:off x="594360" y="6217920"/>
+            <a:ext cx="10972800" cy="502920"/>
           </a:xfrm>
           <a:prstGeom prst="rect">
             <a:avLst/>
@@ -10406,7 +10406,7 @@
         <p:spPr>
           <a:xfrm>
             <a:off x="594360" y="1371600"/>
-            <a:ext cx="10972800" cy="4846320"/>
+            <a:ext cx="10972800" cy="4983480"/>
           </a:xfrm>
           <a:prstGeom prst="rect">
             <a:avLst/>
@@ -10421,7 +10421,7 @@
           <a:p>
             <a:pPr algn="l">
               <a:spcAft>
-                <a:spcPts val="700"/>
+                <a:spcPts val="1000"/>
               </a:spcAft>
             </a:pPr>
             <a:r>
@@ -10437,7 +10437,7 @@
           <a:p>
             <a:pPr algn="l">
               <a:spcAft>
-                <a:spcPts val="700"/>
+                <a:spcPts val="1000"/>
               </a:spcAft>
             </a:pPr>
             <a:r>
@@ -10453,7 +10453,7 @@
           <a:p>
             <a:pPr lvl="1" algn="l">
               <a:spcAft>
-                <a:spcPts val="400"/>
+                <a:spcPts val="600"/>
               </a:spcAft>
             </a:pPr>
             <a:r>
@@ -10469,7 +10469,7 @@
           <a:p>
             <a:pPr lvl="1" algn="l">
               <a:spcAft>
-                <a:spcPts val="400"/>
+                <a:spcPts val="600"/>
               </a:spcAft>
             </a:pPr>
             <a:r>
@@ -10485,7 +10485,7 @@
           <a:p>
             <a:pPr lvl="1" algn="l">
               <a:spcAft>
-                <a:spcPts val="400"/>
+                <a:spcPts val="600"/>
               </a:spcAft>
             </a:pPr>
             <a:r>
@@ -10501,7 +10501,7 @@
           <a:p>
             <a:pPr algn="l">
               <a:spcAft>
-                <a:spcPts val="700"/>
+                <a:spcPts val="1000"/>
               </a:spcAft>
             </a:pPr>
             <a:r>
@@ -10517,7 +10517,7 @@
           <a:p>
             <a:pPr algn="l">
               <a:spcAft>
-                <a:spcPts val="700"/>
+                <a:spcPts val="1000"/>
               </a:spcAft>
             </a:pPr>
             <a:r>
@@ -10637,7 +10637,7 @@
         <p:spPr>
           <a:xfrm>
             <a:off x="594360" y="1371600"/>
-            <a:ext cx="10972800" cy="4846320"/>
+            <a:ext cx="10972800" cy="4709160"/>
           </a:xfrm>
           <a:prstGeom prst="rect">
             <a:avLst/>
@@ -10652,7 +10652,7 @@
           <a:p>
             <a:pPr algn="l">
               <a:spcAft>
-                <a:spcPts val="700"/>
+                <a:spcPts val="1000"/>
               </a:spcAft>
             </a:pPr>
             <a:r>
@@ -10668,7 +10668,7 @@
           <a:p>
             <a:pPr lvl="1" algn="l">
               <a:spcAft>
-                <a:spcPts val="400"/>
+                <a:spcPts val="600"/>
               </a:spcAft>
             </a:pPr>
             <a:r>
@@ -10684,7 +10684,7 @@
           <a:p>
             <a:pPr algn="l">
               <a:spcAft>
-                <a:spcPts val="700"/>
+                <a:spcPts val="1000"/>
               </a:spcAft>
             </a:pPr>
             <a:r>
@@ -10700,7 +10700,7 @@
           <a:p>
             <a:pPr lvl="1" algn="l">
               <a:spcAft>
-                <a:spcPts val="400"/>
+                <a:spcPts val="600"/>
               </a:spcAft>
             </a:pPr>
             <a:r>
@@ -10716,7 +10716,7 @@
           <a:p>
             <a:pPr lvl="1" algn="l">
               <a:spcAft>
-                <a:spcPts val="400"/>
+                <a:spcPts val="600"/>
               </a:spcAft>
             </a:pPr>
             <a:r>
@@ -10732,7 +10732,7 @@
           <a:p>
             <a:pPr lvl="1" algn="l">
               <a:spcAft>
-                <a:spcPts val="400"/>
+                <a:spcPts val="600"/>
               </a:spcAft>
             </a:pPr>
             <a:r>
@@ -10748,7 +10748,7 @@
           <a:p>
             <a:pPr algn="l">
               <a:spcAft>
-                <a:spcPts val="700"/>
+                <a:spcPts val="1000"/>
               </a:spcAft>
             </a:pPr>
             <a:r>
@@ -10764,7 +10764,7 @@
           <a:p>
             <a:pPr lvl="1" algn="l">
               <a:spcAft>
-                <a:spcPts val="400"/>
+                <a:spcPts val="600"/>
               </a:spcAft>
             </a:pPr>
             <a:r>
@@ -10780,7 +10780,7 @@
           <a:p>
             <a:pPr lvl="1" algn="l">
               <a:spcAft>
-                <a:spcPts val="400"/>
+                <a:spcPts val="600"/>
               </a:spcAft>
             </a:pPr>
             <a:r>
@@ -10796,7 +10796,7 @@
           <a:p>
             <a:pPr lvl="1" algn="l">
               <a:spcAft>
-                <a:spcPts val="400"/>
+                <a:spcPts val="600"/>
               </a:spcAft>
             </a:pPr>
             <a:r>
@@ -10812,7 +10812,7 @@
           <a:p>
             <a:pPr algn="l">
               <a:spcAft>
-                <a:spcPts val="700"/>
+                <a:spcPts val="1000"/>
               </a:spcAft>
             </a:pPr>
             <a:r>
@@ -10835,8 +10835,8 @@
         </p:nvSpPr>
         <p:spPr>
           <a:xfrm>
-            <a:off x="594360" y="6263640"/>
-            <a:ext cx="10972800" cy="457200"/>
+            <a:off x="594360" y="6217920"/>
+            <a:ext cx="10972800" cy="502920"/>
           </a:xfrm>
           <a:prstGeom prst="rect">
             <a:avLst/>
@@ -11391,7 +11391,7 @@
         <p:spPr>
           <a:xfrm>
             <a:off x="594360" y="1371600"/>
-            <a:ext cx="10972800" cy="4846320"/>
+            <a:ext cx="10972800" cy="4709160"/>
           </a:xfrm>
           <a:prstGeom prst="rect">
             <a:avLst/>
@@ -11406,11 +11406,11 @@
           <a:p>
             <a:pPr algn="l">
               <a:spcAft>
-                <a:spcPts val="700"/>
-              </a:spcAft>
-            </a:pPr>
-            <a:r>
-              <a:rPr sz="2000" b="1">
+                <a:spcPts val="900"/>
+              </a:spcAft>
+            </a:pPr>
+            <a:r>
+              <a:rPr sz="1900" b="1">
                 <a:solidFill>
                   <a:srgbClr val="1F3355"/>
                 </a:solidFill>
@@ -11422,11 +11422,11 @@
           <a:p>
             <a:pPr lvl="1" algn="l">
               <a:spcAft>
-                <a:spcPts val="400"/>
-              </a:spcAft>
-            </a:pPr>
-            <a:r>
-              <a:rPr sz="1700" b="0">
+                <a:spcPts val="500"/>
+              </a:spcAft>
+            </a:pPr>
+            <a:r>
+              <a:rPr sz="1600" b="0">
                 <a:solidFill>
                   <a:srgbClr val="555555"/>
                 </a:solidFill>
@@ -11438,11 +11438,11 @@
           <a:p>
             <a:pPr lvl="1" algn="l">
               <a:spcAft>
-                <a:spcPts val="400"/>
-              </a:spcAft>
-            </a:pPr>
-            <a:r>
-              <a:rPr sz="1700" b="0">
+                <a:spcPts val="500"/>
+              </a:spcAft>
+            </a:pPr>
+            <a:r>
+              <a:rPr sz="1600" b="0">
                 <a:solidFill>
                   <a:srgbClr val="0B6040"/>
                 </a:solidFill>
@@ -11454,11 +11454,11 @@
           <a:p>
             <a:pPr lvl="1" algn="l">
               <a:spcAft>
-                <a:spcPts val="400"/>
-              </a:spcAft>
-            </a:pPr>
-            <a:r>
-              <a:rPr sz="1700" b="0">
+                <a:spcPts val="500"/>
+              </a:spcAft>
+            </a:pPr>
+            <a:r>
+              <a:rPr sz="1600" b="0">
                 <a:solidFill>
                   <a:srgbClr val="0B6040"/>
                 </a:solidFill>
@@ -11470,11 +11470,11 @@
           <a:p>
             <a:pPr lvl="1" algn="l">
               <a:spcAft>
-                <a:spcPts val="400"/>
-              </a:spcAft>
-            </a:pPr>
-            <a:r>
-              <a:rPr sz="1700" b="0">
+                <a:spcPts val="500"/>
+              </a:spcAft>
+            </a:pPr>
+            <a:r>
+              <a:rPr sz="1600" b="0">
                 <a:solidFill>
                   <a:srgbClr val="555555"/>
                 </a:solidFill>
@@ -11486,11 +11486,11 @@
           <a:p>
             <a:pPr algn="l">
               <a:spcAft>
-                <a:spcPts val="700"/>
-              </a:spcAft>
-            </a:pPr>
-            <a:r>
-              <a:rPr sz="2000" b="1">
+                <a:spcPts val="900"/>
+              </a:spcAft>
+            </a:pPr>
+            <a:r>
+              <a:rPr sz="1900" b="1">
                 <a:solidFill>
                   <a:srgbClr val="1F3355"/>
                 </a:solidFill>
@@ -11502,11 +11502,11 @@
           <a:p>
             <a:pPr lvl="1" algn="l">
               <a:spcAft>
-                <a:spcPts val="400"/>
-              </a:spcAft>
-            </a:pPr>
-            <a:r>
-              <a:rPr sz="1700" b="0">
+                <a:spcPts val="500"/>
+              </a:spcAft>
+            </a:pPr>
+            <a:r>
+              <a:rPr sz="1600" b="0">
                 <a:solidFill>
                   <a:srgbClr val="555555"/>
                 </a:solidFill>
@@ -11518,11 +11518,11 @@
           <a:p>
             <a:pPr lvl="1" algn="l">
               <a:spcAft>
-                <a:spcPts val="400"/>
-              </a:spcAft>
-            </a:pPr>
-            <a:r>
-              <a:rPr sz="1700" b="0">
+                <a:spcPts val="500"/>
+              </a:spcAft>
+            </a:pPr>
+            <a:r>
+              <a:rPr sz="1600" b="0">
                 <a:solidFill>
                   <a:srgbClr val="555555"/>
                 </a:solidFill>
@@ -11534,11 +11534,11 @@
           <a:p>
             <a:pPr lvl="1" algn="l">
               <a:spcAft>
-                <a:spcPts val="400"/>
-              </a:spcAft>
-            </a:pPr>
-            <a:r>
-              <a:rPr sz="1700" b="0">
+                <a:spcPts val="500"/>
+              </a:spcAft>
+            </a:pPr>
+            <a:r>
+              <a:rPr sz="1600" b="0">
                 <a:solidFill>
                   <a:srgbClr val="555555"/>
                 </a:solidFill>
@@ -11550,11 +11550,11 @@
           <a:p>
             <a:pPr lvl="1" algn="l">
               <a:spcAft>
-                <a:spcPts val="400"/>
-              </a:spcAft>
-            </a:pPr>
-            <a:r>
-              <a:rPr sz="1700" b="0">
+                <a:spcPts val="500"/>
+              </a:spcAft>
+            </a:pPr>
+            <a:r>
+              <a:rPr sz="1600" b="0">
                 <a:solidFill>
                   <a:srgbClr val="555555"/>
                 </a:solidFill>
@@ -11566,11 +11566,11 @@
           <a:p>
             <a:pPr algn="l">
               <a:spcAft>
-                <a:spcPts val="700"/>
-              </a:spcAft>
-            </a:pPr>
-            <a:r>
-              <a:rPr sz="2000" b="1">
+                <a:spcPts val="900"/>
+              </a:spcAft>
+            </a:pPr>
+            <a:r>
+              <a:rPr sz="1900" b="1">
                 <a:solidFill>
                   <a:srgbClr val="C0392B"/>
                 </a:solidFill>
@@ -11582,11 +11582,11 @@
           <a:p>
             <a:pPr lvl="1" algn="l">
               <a:spcAft>
-                <a:spcPts val="400"/>
-              </a:spcAft>
-            </a:pPr>
-            <a:r>
-              <a:rPr sz="1700" b="0">
+                <a:spcPts val="500"/>
+              </a:spcAft>
+            </a:pPr>
+            <a:r>
+              <a:rPr sz="1600" b="0">
                 <a:solidFill>
                   <a:srgbClr val="555555"/>
                 </a:solidFill>
@@ -11598,11 +11598,11 @@
           <a:p>
             <a:pPr lvl="1" algn="l">
               <a:spcAft>
-                <a:spcPts val="400"/>
-              </a:spcAft>
-            </a:pPr>
-            <a:r>
-              <a:rPr sz="1700" b="0">
+                <a:spcPts val="500"/>
+              </a:spcAft>
+            </a:pPr>
+            <a:r>
+              <a:rPr sz="1600" b="0">
                 <a:solidFill>
                   <a:srgbClr val="555555"/>
                 </a:solidFill>
@@ -11621,8 +11621,8 @@
         </p:nvSpPr>
         <p:spPr>
           <a:xfrm>
-            <a:off x="594360" y="6263640"/>
-            <a:ext cx="10972800" cy="457200"/>
+            <a:off x="594360" y="6217920"/>
+            <a:ext cx="10972800" cy="502920"/>
           </a:xfrm>
           <a:prstGeom prst="rect">
             <a:avLst/>
@@ -11637,7 +11637,7 @@
           <a:p>
             <a:pPr algn="l"/>
             <a:r>
-              <a:rPr sz="1200" b="0">
+              <a:rPr sz="1100" b="0">
                 <a:solidFill>
                   <a:srgbClr val="007ACC"/>
                 </a:solidFill>
@@ -11753,7 +11753,7 @@
         <p:spPr>
           <a:xfrm>
             <a:off x="594360" y="1371600"/>
-            <a:ext cx="10972800" cy="4846320"/>
+            <a:ext cx="10972800" cy="4983480"/>
           </a:xfrm>
           <a:prstGeom prst="rect">
             <a:avLst/>
@@ -11768,7 +11768,7 @@
           <a:p>
             <a:pPr algn="l">
               <a:spcAft>
-                <a:spcPts val="700"/>
+                <a:spcPts val="1000"/>
               </a:spcAft>
             </a:pPr>
             <a:r>
@@ -11784,7 +11784,7 @@
           <a:p>
             <a:pPr lvl="1" algn="l">
               <a:spcAft>
-                <a:spcPts val="400"/>
+                <a:spcPts val="600"/>
               </a:spcAft>
             </a:pPr>
             <a:r>
@@ -11800,7 +11800,7 @@
           <a:p>
             <a:pPr lvl="1" algn="l">
               <a:spcAft>
-                <a:spcPts val="400"/>
+                <a:spcPts val="600"/>
               </a:spcAft>
             </a:pPr>
             <a:r>
@@ -11816,7 +11816,7 @@
           <a:p>
             <a:pPr algn="l">
               <a:spcAft>
-                <a:spcPts val="700"/>
+                <a:spcPts val="1000"/>
               </a:spcAft>
             </a:pPr>
             <a:r>
@@ -11832,7 +11832,7 @@
           <a:p>
             <a:pPr algn="l">
               <a:spcAft>
-                <a:spcPts val="700"/>
+                <a:spcPts val="1000"/>
               </a:spcAft>
             </a:pPr>
             <a:r>
@@ -11848,7 +11848,7 @@
           <a:p>
             <a:pPr lvl="1" algn="l">
               <a:spcAft>
-                <a:spcPts val="400"/>
+                <a:spcPts val="600"/>
               </a:spcAft>
             </a:pPr>
             <a:r>
@@ -11864,7 +11864,7 @@
           <a:p>
             <a:pPr lvl="1" algn="l">
               <a:spcAft>
-                <a:spcPts val="400"/>
+                <a:spcPts val="600"/>
               </a:spcAft>
             </a:pPr>
             <a:r>
@@ -11880,7 +11880,7 @@
           <a:p>
             <a:pPr algn="l">
               <a:spcAft>
-                <a:spcPts val="700"/>
+                <a:spcPts val="1000"/>
               </a:spcAft>
             </a:pPr>
             <a:r>
@@ -11896,7 +11896,7 @@
           <a:p>
             <a:pPr lvl="1" algn="l">
               <a:spcAft>
-                <a:spcPts val="400"/>
+                <a:spcPts val="600"/>
               </a:spcAft>
             </a:pPr>
             <a:r>
@@ -11912,7 +11912,7 @@
           <a:p>
             <a:pPr lvl="1" algn="l">
               <a:spcAft>
-                <a:spcPts val="400"/>
+                <a:spcPts val="600"/>
               </a:spcAft>
             </a:pPr>
             <a:r>
@@ -11928,7 +11928,7 @@
           <a:p>
             <a:pPr algn="l">
               <a:spcAft>
-                <a:spcPts val="700"/>
+                <a:spcPts val="1000"/>
               </a:spcAft>
             </a:pPr>
             <a:r>
@@ -12172,7 +12172,7 @@
         <p:spPr>
           <a:xfrm>
             <a:off x="594360" y="1371600"/>
-            <a:ext cx="10972800" cy="4846320"/>
+            <a:ext cx="10972800" cy="4983480"/>
           </a:xfrm>
           <a:prstGeom prst="rect">
             <a:avLst/>
@@ -12187,7 +12187,7 @@
           <a:p>
             <a:pPr algn="l">
               <a:spcAft>
-                <a:spcPts val="700"/>
+                <a:spcPts val="1000"/>
               </a:spcAft>
             </a:pPr>
             <a:r>
@@ -12203,7 +12203,7 @@
           <a:p>
             <a:pPr lvl="1" algn="l">
               <a:spcAft>
-                <a:spcPts val="400"/>
+                <a:spcPts val="600"/>
               </a:spcAft>
             </a:pPr>
             <a:r>
@@ -12219,7 +12219,7 @@
           <a:p>
             <a:pPr algn="l">
               <a:spcAft>
-                <a:spcPts val="700"/>
+                <a:spcPts val="1000"/>
               </a:spcAft>
             </a:pPr>
             <a:r>
@@ -12235,7 +12235,7 @@
           <a:p>
             <a:pPr lvl="1" algn="l">
               <a:spcAft>
-                <a:spcPts val="400"/>
+                <a:spcPts val="600"/>
               </a:spcAft>
             </a:pPr>
             <a:r>
@@ -12251,7 +12251,7 @@
           <a:p>
             <a:pPr lvl="1" algn="l">
               <a:spcAft>
-                <a:spcPts val="400"/>
+                <a:spcPts val="600"/>
               </a:spcAft>
             </a:pPr>
             <a:r>
@@ -12267,7 +12267,7 @@
           <a:p>
             <a:pPr lvl="1" algn="l">
               <a:spcAft>
-                <a:spcPts val="400"/>
+                <a:spcPts val="600"/>
               </a:spcAft>
             </a:pPr>
             <a:r>
@@ -12283,7 +12283,7 @@
           <a:p>
             <a:pPr lvl="1" algn="l">
               <a:spcAft>
-                <a:spcPts val="400"/>
+                <a:spcPts val="600"/>
               </a:spcAft>
             </a:pPr>
             <a:r>
@@ -12299,7 +12299,7 @@
           <a:p>
             <a:pPr algn="l">
               <a:spcAft>
-                <a:spcPts val="700"/>
+                <a:spcPts val="1000"/>
               </a:spcAft>
             </a:pPr>
             <a:r>
@@ -12315,7 +12315,7 @@
           <a:p>
             <a:pPr lvl="1" algn="l">
               <a:spcAft>
-                <a:spcPts val="400"/>
+                <a:spcPts val="600"/>
               </a:spcAft>
             </a:pPr>
             <a:r>
@@ -12331,7 +12331,7 @@
           <a:p>
             <a:pPr lvl="1" algn="l">
               <a:spcAft>
-                <a:spcPts val="400"/>
+                <a:spcPts val="600"/>
               </a:spcAft>
             </a:pPr>
             <a:r>
@@ -12347,7 +12347,7 @@
           <a:p>
             <a:pPr lvl="1" algn="l">
               <a:spcAft>
-                <a:spcPts val="400"/>
+                <a:spcPts val="600"/>
               </a:spcAft>
             </a:pPr>
             <a:r>
@@ -12467,7 +12467,7 @@
         <p:spPr>
           <a:xfrm>
             <a:off x="594360" y="1371600"/>
-            <a:ext cx="10972800" cy="4846320"/>
+            <a:ext cx="10972800" cy="4983480"/>
           </a:xfrm>
           <a:prstGeom prst="rect">
             <a:avLst/>
@@ -12482,7 +12482,7 @@
           <a:p>
             <a:pPr algn="l">
               <a:spcAft>
-                <a:spcPts val="700"/>
+                <a:spcPts val="1000"/>
               </a:spcAft>
             </a:pPr>
             <a:r>
@@ -12498,7 +12498,7 @@
           <a:p>
             <a:pPr lvl="1" algn="l">
               <a:spcAft>
-                <a:spcPts val="400"/>
+                <a:spcPts val="600"/>
               </a:spcAft>
             </a:pPr>
             <a:r>
@@ -12514,7 +12514,7 @@
           <a:p>
             <a:pPr algn="l">
               <a:spcAft>
-                <a:spcPts val="700"/>
+                <a:spcPts val="1000"/>
               </a:spcAft>
             </a:pPr>
             <a:r>
@@ -12530,7 +12530,7 @@
           <a:p>
             <a:pPr lvl="1" algn="l">
               <a:spcAft>
-                <a:spcPts val="400"/>
+                <a:spcPts val="600"/>
               </a:spcAft>
             </a:pPr>
             <a:r>
@@ -12546,7 +12546,7 @@
           <a:p>
             <a:pPr lvl="1" algn="l">
               <a:spcAft>
-                <a:spcPts val="400"/>
+                <a:spcPts val="600"/>
               </a:spcAft>
             </a:pPr>
             <a:r>
@@ -12562,7 +12562,7 @@
           <a:p>
             <a:pPr algn="l">
               <a:spcAft>
-                <a:spcPts val="700"/>
+                <a:spcPts val="1000"/>
               </a:spcAft>
             </a:pPr>
             <a:r>
@@ -12578,7 +12578,7 @@
           <a:p>
             <a:pPr lvl="1" algn="l">
               <a:spcAft>
-                <a:spcPts val="400"/>
+                <a:spcPts val="600"/>
               </a:spcAft>
             </a:pPr>
             <a:r>
@@ -12594,7 +12594,7 @@
           <a:p>
             <a:pPr lvl="1" algn="l">
               <a:spcAft>
-                <a:spcPts val="400"/>
+                <a:spcPts val="600"/>
               </a:spcAft>
             </a:pPr>
             <a:r>
@@ -12610,7 +12610,7 @@
           <a:p>
             <a:pPr algn="l">
               <a:spcAft>
-                <a:spcPts val="700"/>
+                <a:spcPts val="1000"/>
               </a:spcAft>
             </a:pPr>
             <a:r>
@@ -12730,7 +12730,7 @@
         <p:spPr>
           <a:xfrm>
             <a:off x="594360" y="1371600"/>
-            <a:ext cx="10972800" cy="4846320"/>
+            <a:ext cx="10972800" cy="4983480"/>
           </a:xfrm>
           <a:prstGeom prst="rect">
             <a:avLst/>
@@ -12745,7 +12745,7 @@
           <a:p>
             <a:pPr algn="l">
               <a:spcAft>
-                <a:spcPts val="700"/>
+                <a:spcPts val="1000"/>
               </a:spcAft>
             </a:pPr>
             <a:r>
@@ -12761,7 +12761,7 @@
           <a:p>
             <a:pPr lvl="1" algn="l">
               <a:spcAft>
-                <a:spcPts val="400"/>
+                <a:spcPts val="600"/>
               </a:spcAft>
             </a:pPr>
             <a:r>
@@ -12777,7 +12777,7 @@
           <a:p>
             <a:pPr lvl="1" algn="l">
               <a:spcAft>
-                <a:spcPts val="400"/>
+                <a:spcPts val="600"/>
               </a:spcAft>
             </a:pPr>
             <a:r>
@@ -12793,7 +12793,7 @@
           <a:p>
             <a:pPr lvl="1" algn="l">
               <a:spcAft>
-                <a:spcPts val="400"/>
+                <a:spcPts val="600"/>
               </a:spcAft>
             </a:pPr>
             <a:r>
@@ -12809,7 +12809,7 @@
           <a:p>
             <a:pPr lvl="1" algn="l">
               <a:spcAft>
-                <a:spcPts val="400"/>
+                <a:spcPts val="600"/>
               </a:spcAft>
             </a:pPr>
             <a:r>
@@ -12825,7 +12825,7 @@
           <a:p>
             <a:pPr algn="l">
               <a:spcAft>
-                <a:spcPts val="700"/>
+                <a:spcPts val="1000"/>
               </a:spcAft>
             </a:pPr>
             <a:r>
@@ -12841,7 +12841,7 @@
           <a:p>
             <a:pPr lvl="1" algn="l">
               <a:spcAft>
-                <a:spcPts val="400"/>
+                <a:spcPts val="600"/>
               </a:spcAft>
             </a:pPr>
             <a:r>
@@ -12857,7 +12857,7 @@
           <a:p>
             <a:pPr lvl="1" algn="l">
               <a:spcAft>
-                <a:spcPts val="400"/>
+                <a:spcPts val="600"/>
               </a:spcAft>
             </a:pPr>
             <a:r>
@@ -12873,7 +12873,7 @@
           <a:p>
             <a:pPr algn="l">
               <a:spcAft>
-                <a:spcPts val="700"/>
+                <a:spcPts val="1000"/>
               </a:spcAft>
             </a:pPr>
             <a:r>
@@ -12993,7 +12993,7 @@
         <p:spPr>
           <a:xfrm>
             <a:off x="594360" y="1371600"/>
-            <a:ext cx="10972800" cy="4846320"/>
+            <a:ext cx="10972800" cy="4983480"/>
           </a:xfrm>
           <a:prstGeom prst="rect">
             <a:avLst/>
@@ -13008,7 +13008,7 @@
           <a:p>
             <a:pPr algn="l">
               <a:spcAft>
-                <a:spcPts val="700"/>
+                <a:spcPts val="1000"/>
               </a:spcAft>
             </a:pPr>
             <a:r>
@@ -13024,7 +13024,7 @@
           <a:p>
             <a:pPr lvl="1" algn="l">
               <a:spcAft>
-                <a:spcPts val="400"/>
+                <a:spcPts val="600"/>
               </a:spcAft>
             </a:pPr>
             <a:r>
@@ -13040,7 +13040,7 @@
           <a:p>
             <a:pPr lvl="1" algn="l">
               <a:spcAft>
-                <a:spcPts val="400"/>
+                <a:spcPts val="600"/>
               </a:spcAft>
             </a:pPr>
             <a:r>
@@ -13056,7 +13056,7 @@
           <a:p>
             <a:pPr algn="l">
               <a:spcAft>
-                <a:spcPts val="700"/>
+                <a:spcPts val="1000"/>
               </a:spcAft>
             </a:pPr>
             <a:r>
@@ -13072,7 +13072,7 @@
           <a:p>
             <a:pPr lvl="1" algn="l">
               <a:spcAft>
-                <a:spcPts val="400"/>
+                <a:spcPts val="600"/>
               </a:spcAft>
             </a:pPr>
             <a:r>
@@ -13088,7 +13088,7 @@
           <a:p>
             <a:pPr lvl="1" algn="l">
               <a:spcAft>
-                <a:spcPts val="400"/>
+                <a:spcPts val="600"/>
               </a:spcAft>
             </a:pPr>
             <a:r>
@@ -13104,7 +13104,7 @@
           <a:p>
             <a:pPr algn="l">
               <a:spcAft>
-                <a:spcPts val="700"/>
+                <a:spcPts val="1000"/>
               </a:spcAft>
             </a:pPr>
             <a:r>
@@ -13120,7 +13120,7 @@
           <a:p>
             <a:pPr lvl="1" algn="l">
               <a:spcAft>
-                <a:spcPts val="400"/>
+                <a:spcPts val="600"/>
               </a:spcAft>
             </a:pPr>
             <a:r>
@@ -13136,7 +13136,7 @@
           <a:p>
             <a:pPr lvl="1" algn="l">
               <a:spcAft>
-                <a:spcPts val="400"/>
+                <a:spcPts val="600"/>
               </a:spcAft>
             </a:pPr>
             <a:r>
@@ -13152,7 +13152,7 @@
           <a:p>
             <a:pPr algn="l">
               <a:spcAft>
-                <a:spcPts val="700"/>
+                <a:spcPts val="1000"/>
               </a:spcAft>
             </a:pPr>
             <a:r>
@@ -13708,7 +13708,7 @@
         </p:nvGraphicFramePr>
         <p:xfrm>
           <a:off x="502920" y="1143000"/>
-          <a:ext cx="11155680" cy="1152144"/>
+          <a:ext cx="11155680" cy="932688"/>
         </p:xfrm>
         <a:graphic>
           <a:graphicData uri="http://schemas.openxmlformats.org/drawingml/2006/table">
@@ -13722,7 +13722,7 @@
                 <a:gridCol w="2286000"/>
                 <a:gridCol w="3291840"/>
               </a:tblGrid>
-              <a:tr h="384048">
+              <a:tr h="310896">
                 <a:tc>
                   <a:txBody>
                     <a:bodyPr/>
@@ -13816,7 +13816,7 @@
                   </a:tcPr>
                 </a:tc>
               </a:tr>
-              <a:tr h="384048">
+              <a:tr h="310896">
                 <a:tc>
                   <a:txBody>
                     <a:bodyPr/>
@@ -13910,7 +13910,7 @@
                   </a:tcPr>
                 </a:tc>
               </a:tr>
-              <a:tr h="384048">
+              <a:tr h="310896">
                 <a:tc>
                   <a:txBody>
                     <a:bodyPr/>
@@ -14016,7 +14016,7 @@
         </p:nvSpPr>
         <p:spPr>
           <a:xfrm>
-            <a:off x="502920" y="2478024"/>
+            <a:off x="502920" y="2331720"/>
             <a:ext cx="11155680" cy="548640"/>
           </a:xfrm>
           <a:prstGeom prst="rect">
@@ -14149,7 +14149,7 @@
         <p:spPr>
           <a:xfrm>
             <a:off x="594360" y="1371600"/>
-            <a:ext cx="10972800" cy="4846320"/>
+            <a:ext cx="10972800" cy="4983480"/>
           </a:xfrm>
           <a:prstGeom prst="rect">
             <a:avLst/>
@@ -14164,7 +14164,7 @@
           <a:p>
             <a:pPr algn="l">
               <a:spcAft>
-                <a:spcPts val="700"/>
+                <a:spcPts val="1000"/>
               </a:spcAft>
             </a:pPr>
             <a:r>
@@ -14180,7 +14180,7 @@
           <a:p>
             <a:pPr lvl="1" algn="l">
               <a:spcAft>
-                <a:spcPts val="400"/>
+                <a:spcPts val="600"/>
               </a:spcAft>
             </a:pPr>
             <a:r>
@@ -14196,7 +14196,7 @@
           <a:p>
             <a:pPr lvl="1" algn="l">
               <a:spcAft>
-                <a:spcPts val="400"/>
+                <a:spcPts val="600"/>
               </a:spcAft>
             </a:pPr>
             <a:r>
@@ -14212,7 +14212,7 @@
           <a:p>
             <a:pPr lvl="1" algn="l">
               <a:spcAft>
-                <a:spcPts val="400"/>
+                <a:spcPts val="600"/>
               </a:spcAft>
             </a:pPr>
             <a:r>
@@ -14228,7 +14228,7 @@
           <a:p>
             <a:pPr algn="l">
               <a:spcAft>
-                <a:spcPts val="700"/>
+                <a:spcPts val="1000"/>
               </a:spcAft>
             </a:pPr>
             <a:r>
@@ -14244,7 +14244,7 @@
           <a:p>
             <a:pPr lvl="1" algn="l">
               <a:spcAft>
-                <a:spcPts val="400"/>
+                <a:spcPts val="600"/>
               </a:spcAft>
             </a:pPr>
             <a:r>
@@ -14260,7 +14260,7 @@
           <a:p>
             <a:pPr lvl="1" algn="l">
               <a:spcAft>
-                <a:spcPts val="400"/>
+                <a:spcPts val="600"/>
               </a:spcAft>
             </a:pPr>
             <a:r>
@@ -14276,7 +14276,7 @@
           <a:p>
             <a:pPr lvl="1" algn="l">
               <a:spcAft>
-                <a:spcPts val="400"/>
+                <a:spcPts val="600"/>
               </a:spcAft>
             </a:pPr>
             <a:r>
@@ -14292,7 +14292,7 @@
           <a:p>
             <a:pPr algn="l">
               <a:spcAft>
-                <a:spcPts val="700"/>
+                <a:spcPts val="1000"/>
               </a:spcAft>
             </a:pPr>
             <a:r>
@@ -14308,7 +14308,7 @@
           <a:p>
             <a:pPr lvl="1" algn="l">
               <a:spcAft>
-                <a:spcPts val="400"/>
+                <a:spcPts val="600"/>
               </a:spcAft>
             </a:pPr>
             <a:r>
@@ -14324,7 +14324,7 @@
           <a:p>
             <a:pPr lvl="1" algn="l">
               <a:spcAft>
-                <a:spcPts val="400"/>
+                <a:spcPts val="600"/>
               </a:spcAft>
             </a:pPr>
             <a:r>
@@ -14340,7 +14340,7 @@
           <a:p>
             <a:pPr lvl="1" algn="l">
               <a:spcAft>
-                <a:spcPts val="400"/>
+                <a:spcPts val="600"/>
               </a:spcAft>
             </a:pPr>
             <a:r>
@@ -14356,7 +14356,7 @@
           <a:p>
             <a:pPr lvl="1" algn="l">
               <a:spcAft>
-                <a:spcPts val="400"/>
+                <a:spcPts val="600"/>
               </a:spcAft>
             </a:pPr>
             <a:r>
@@ -14476,7 +14476,7 @@
         <p:spPr>
           <a:xfrm>
             <a:off x="594360" y="1371600"/>
-            <a:ext cx="10972800" cy="4846320"/>
+            <a:ext cx="10972800" cy="4983480"/>
           </a:xfrm>
           <a:prstGeom prst="rect">
             <a:avLst/>
@@ -14491,11 +14491,11 @@
           <a:p>
             <a:pPr algn="l">
               <a:spcAft>
-                <a:spcPts val="700"/>
-              </a:spcAft>
-            </a:pPr>
-            <a:r>
-              <a:rPr sz="2000" b="1">
+                <a:spcPts val="900"/>
+              </a:spcAft>
+            </a:pPr>
+            <a:r>
+              <a:rPr sz="1900" b="1">
                 <a:solidFill>
                   <a:srgbClr val="C0392B"/>
                 </a:solidFill>
@@ -14507,11 +14507,11 @@
           <a:p>
             <a:pPr lvl="1" algn="l">
               <a:spcAft>
-                <a:spcPts val="400"/>
-              </a:spcAft>
-            </a:pPr>
-            <a:r>
-              <a:rPr sz="1700" b="0">
+                <a:spcPts val="500"/>
+              </a:spcAft>
+            </a:pPr>
+            <a:r>
+              <a:rPr sz="1600" b="0">
                 <a:solidFill>
                   <a:srgbClr val="555555"/>
                 </a:solidFill>
@@ -14523,11 +14523,11 @@
           <a:p>
             <a:pPr algn="l">
               <a:spcAft>
-                <a:spcPts val="700"/>
-              </a:spcAft>
-            </a:pPr>
-            <a:r>
-              <a:rPr sz="2000" b="1">
+                <a:spcPts val="900"/>
+              </a:spcAft>
+            </a:pPr>
+            <a:r>
+              <a:rPr sz="1900" b="1">
                 <a:solidFill>
                   <a:srgbClr val="1F3355"/>
                 </a:solidFill>
@@ -14539,11 +14539,11 @@
           <a:p>
             <a:pPr lvl="1" algn="l">
               <a:spcAft>
-                <a:spcPts val="400"/>
-              </a:spcAft>
-            </a:pPr>
-            <a:r>
-              <a:rPr sz="1700" b="0">
+                <a:spcPts val="500"/>
+              </a:spcAft>
+            </a:pPr>
+            <a:r>
+              <a:rPr sz="1600" b="0">
                 <a:solidFill>
                   <a:srgbClr val="555555"/>
                 </a:solidFill>
@@ -14555,11 +14555,11 @@
           <a:p>
             <a:pPr lvl="1" algn="l">
               <a:spcAft>
-                <a:spcPts val="400"/>
-              </a:spcAft>
-            </a:pPr>
-            <a:r>
-              <a:rPr sz="1700" b="0">
+                <a:spcPts val="500"/>
+              </a:spcAft>
+            </a:pPr>
+            <a:r>
+              <a:rPr sz="1600" b="0">
                 <a:solidFill>
                   <a:srgbClr val="555555"/>
                 </a:solidFill>
@@ -14571,11 +14571,11 @@
           <a:p>
             <a:pPr lvl="1" algn="l">
               <a:spcAft>
-                <a:spcPts val="400"/>
-              </a:spcAft>
-            </a:pPr>
-            <a:r>
-              <a:rPr sz="1700" b="0">
+                <a:spcPts val="500"/>
+              </a:spcAft>
+            </a:pPr>
+            <a:r>
+              <a:rPr sz="1600" b="0">
                 <a:solidFill>
                   <a:srgbClr val="555555"/>
                 </a:solidFill>
@@ -14587,11 +14587,11 @@
           <a:p>
             <a:pPr lvl="1" algn="l">
               <a:spcAft>
-                <a:spcPts val="400"/>
-              </a:spcAft>
-            </a:pPr>
-            <a:r>
-              <a:rPr sz="1700" b="0">
+                <a:spcPts val="500"/>
+              </a:spcAft>
+            </a:pPr>
+            <a:r>
+              <a:rPr sz="1600" b="0">
                 <a:solidFill>
                   <a:srgbClr val="555555"/>
                 </a:solidFill>
@@ -14603,11 +14603,11 @@
           <a:p>
             <a:pPr algn="l">
               <a:spcAft>
-                <a:spcPts val="700"/>
-              </a:spcAft>
-            </a:pPr>
-            <a:r>
-              <a:rPr sz="2000" b="1">
+                <a:spcPts val="900"/>
+              </a:spcAft>
+            </a:pPr>
+            <a:r>
+              <a:rPr sz="1900" b="1">
                 <a:solidFill>
                   <a:srgbClr val="1F3355"/>
                 </a:solidFill>
@@ -14619,11 +14619,11 @@
           <a:p>
             <a:pPr lvl="1" algn="l">
               <a:spcAft>
-                <a:spcPts val="400"/>
-              </a:spcAft>
-            </a:pPr>
-            <a:r>
-              <a:rPr sz="1700" b="0">
+                <a:spcPts val="500"/>
+              </a:spcAft>
+            </a:pPr>
+            <a:r>
+              <a:rPr sz="1600" b="0">
                 <a:solidFill>
                   <a:srgbClr val="555555"/>
                 </a:solidFill>
@@ -14635,11 +14635,11 @@
           <a:p>
             <a:pPr lvl="1" algn="l">
               <a:spcAft>
-                <a:spcPts val="400"/>
-              </a:spcAft>
-            </a:pPr>
-            <a:r>
-              <a:rPr sz="1700" b="0">
+                <a:spcPts val="500"/>
+              </a:spcAft>
+            </a:pPr>
+            <a:r>
+              <a:rPr sz="1600" b="0">
                 <a:solidFill>
                   <a:srgbClr val="555555"/>
                 </a:solidFill>
@@ -14651,11 +14651,11 @@
           <a:p>
             <a:pPr algn="l">
               <a:spcAft>
-                <a:spcPts val="700"/>
-              </a:spcAft>
-            </a:pPr>
-            <a:r>
-              <a:rPr sz="2000" b="1">
+                <a:spcPts val="900"/>
+              </a:spcAft>
+            </a:pPr>
+            <a:r>
+              <a:rPr sz="1900" b="1">
                 <a:solidFill>
                   <a:srgbClr val="C0392B"/>
                 </a:solidFill>
@@ -14667,11 +14667,11 @@
           <a:p>
             <a:pPr lvl="1" algn="l">
               <a:spcAft>
-                <a:spcPts val="400"/>
-              </a:spcAft>
-            </a:pPr>
-            <a:r>
-              <a:rPr sz="1700" b="0">
+                <a:spcPts val="500"/>
+              </a:spcAft>
+            </a:pPr>
+            <a:r>
+              <a:rPr sz="1600" b="0">
                 <a:solidFill>
                   <a:srgbClr val="555555"/>
                 </a:solidFill>
@@ -14683,11 +14683,11 @@
           <a:p>
             <a:pPr algn="l">
               <a:spcAft>
-                <a:spcPts val="700"/>
-              </a:spcAft>
-            </a:pPr>
-            <a:r>
-              <a:rPr sz="2000" b="0">
+                <a:spcPts val="900"/>
+              </a:spcAft>
+            </a:pPr>
+            <a:r>
+              <a:rPr sz="1900" b="0">
                 <a:solidFill>
                   <a:srgbClr val="1F3355"/>
                 </a:solidFill>
@@ -14927,7 +14927,7 @@
         <p:spPr>
           <a:xfrm>
             <a:off x="594360" y="1371600"/>
-            <a:ext cx="10972800" cy="4846320"/>
+            <a:ext cx="10972800" cy="4983480"/>
           </a:xfrm>
           <a:prstGeom prst="rect">
             <a:avLst/>
@@ -14942,7 +14942,7 @@
           <a:p>
             <a:pPr algn="l">
               <a:spcAft>
-                <a:spcPts val="700"/>
+                <a:spcPts val="1000"/>
               </a:spcAft>
             </a:pPr>
             <a:r>
@@ -14958,7 +14958,7 @@
           <a:p>
             <a:pPr lvl="1" algn="l">
               <a:spcAft>
-                <a:spcPts val="400"/>
+                <a:spcPts val="600"/>
               </a:spcAft>
             </a:pPr>
             <a:r>
@@ -14974,7 +14974,7 @@
           <a:p>
             <a:pPr lvl="1" algn="l">
               <a:spcAft>
-                <a:spcPts val="400"/>
+                <a:spcPts val="600"/>
               </a:spcAft>
             </a:pPr>
             <a:r>
@@ -14990,7 +14990,7 @@
           <a:p>
             <a:pPr lvl="1" algn="l">
               <a:spcAft>
-                <a:spcPts val="400"/>
+                <a:spcPts val="600"/>
               </a:spcAft>
             </a:pPr>
             <a:r>
@@ -15006,7 +15006,7 @@
           <a:p>
             <a:pPr algn="l">
               <a:spcAft>
-                <a:spcPts val="700"/>
+                <a:spcPts val="1000"/>
               </a:spcAft>
             </a:pPr>
             <a:r>
@@ -15022,7 +15022,7 @@
           <a:p>
             <a:pPr lvl="1" algn="l">
               <a:spcAft>
-                <a:spcPts val="400"/>
+                <a:spcPts val="600"/>
               </a:spcAft>
             </a:pPr>
             <a:r>
@@ -15038,7 +15038,7 @@
           <a:p>
             <a:pPr lvl="1" algn="l">
               <a:spcAft>
-                <a:spcPts val="400"/>
+                <a:spcPts val="600"/>
               </a:spcAft>
             </a:pPr>
             <a:r>
@@ -15054,7 +15054,7 @@
           <a:p>
             <a:pPr lvl="1" algn="l">
               <a:spcAft>
-                <a:spcPts val="400"/>
+                <a:spcPts val="600"/>
               </a:spcAft>
             </a:pPr>
             <a:r>
@@ -15070,7 +15070,7 @@
           <a:p>
             <a:pPr lvl="1" algn="l">
               <a:spcAft>
-                <a:spcPts val="400"/>
+                <a:spcPts val="600"/>
               </a:spcAft>
             </a:pPr>
             <a:r>
@@ -15086,7 +15086,7 @@
           <a:p>
             <a:pPr lvl="1" algn="l">
               <a:spcAft>
-                <a:spcPts val="400"/>
+                <a:spcPts val="600"/>
               </a:spcAft>
             </a:pPr>
             <a:r>
@@ -15102,7 +15102,7 @@
           <a:p>
             <a:pPr algn="l">
               <a:spcAft>
-                <a:spcPts val="700"/>
+                <a:spcPts val="1000"/>
               </a:spcAft>
             </a:pPr>
             <a:r>
@@ -15222,7 +15222,7 @@
         <p:spPr>
           <a:xfrm>
             <a:off x="594360" y="1371600"/>
-            <a:ext cx="10972800" cy="4846320"/>
+            <a:ext cx="10972800" cy="4983480"/>
           </a:xfrm>
           <a:prstGeom prst="rect">
             <a:avLst/>
@@ -15237,7 +15237,7 @@
           <a:p>
             <a:pPr algn="l">
               <a:spcAft>
-                <a:spcPts val="700"/>
+                <a:spcPts val="1000"/>
               </a:spcAft>
             </a:pPr>
             <a:r>
@@ -15253,7 +15253,7 @@
           <a:p>
             <a:pPr lvl="1" algn="l">
               <a:spcAft>
-                <a:spcPts val="400"/>
+                <a:spcPts val="600"/>
               </a:spcAft>
             </a:pPr>
             <a:r>
@@ -15269,7 +15269,7 @@
           <a:p>
             <a:pPr algn="l">
               <a:spcAft>
-                <a:spcPts val="700"/>
+                <a:spcPts val="1000"/>
               </a:spcAft>
             </a:pPr>
             <a:r>
@@ -15285,7 +15285,7 @@
           <a:p>
             <a:pPr lvl="1" algn="l">
               <a:spcAft>
-                <a:spcPts val="400"/>
+                <a:spcPts val="600"/>
               </a:spcAft>
             </a:pPr>
             <a:r>
@@ -15301,7 +15301,7 @@
           <a:p>
             <a:pPr lvl="1" algn="l">
               <a:spcAft>
-                <a:spcPts val="400"/>
+                <a:spcPts val="600"/>
               </a:spcAft>
             </a:pPr>
             <a:r>
@@ -15317,7 +15317,7 @@
           <a:p>
             <a:pPr algn="l">
               <a:spcAft>
-                <a:spcPts val="700"/>
+                <a:spcPts val="1000"/>
               </a:spcAft>
             </a:pPr>
             <a:r>
@@ -15333,7 +15333,7 @@
           <a:p>
             <a:pPr lvl="1" algn="l">
               <a:spcAft>
-                <a:spcPts val="400"/>
+                <a:spcPts val="600"/>
               </a:spcAft>
             </a:pPr>
             <a:r>
@@ -15349,7 +15349,7 @@
           <a:p>
             <a:pPr lvl="1" algn="l">
               <a:spcAft>
-                <a:spcPts val="400"/>
+                <a:spcPts val="600"/>
               </a:spcAft>
             </a:pPr>
             <a:r>
@@ -15365,7 +15365,7 @@
           <a:p>
             <a:pPr algn="l">
               <a:spcAft>
-                <a:spcPts val="700"/>
+                <a:spcPts val="1000"/>
               </a:spcAft>
             </a:pPr>
             <a:r>
@@ -15381,7 +15381,7 @@
           <a:p>
             <a:pPr algn="l">
               <a:spcAft>
-                <a:spcPts val="700"/>
+                <a:spcPts val="1000"/>
               </a:spcAft>
             </a:pPr>
             <a:r>
@@ -15397,7 +15397,7 @@
           <a:p>
             <a:pPr lvl="1" algn="l">
               <a:spcAft>
-                <a:spcPts val="400"/>
+                <a:spcPts val="600"/>
               </a:spcAft>
             </a:pPr>
             <a:r>
@@ -15413,7 +15413,7 @@
           <a:p>
             <a:pPr lvl="1" algn="l">
               <a:spcAft>
-                <a:spcPts val="400"/>
+                <a:spcPts val="600"/>
               </a:spcAft>
             </a:pPr>
             <a:r>
@@ -15491,7 +15491,7 @@
         </p:nvGraphicFramePr>
         <p:xfrm>
           <a:off x="502920" y="1143000"/>
-          <a:ext cx="11155680" cy="3072384"/>
+          <a:ext cx="11155680" cy="2487168"/>
         </p:xfrm>
         <a:graphic>
           <a:graphicData uri="http://schemas.openxmlformats.org/drawingml/2006/table">
@@ -15505,7 +15505,7 @@
                 <a:gridCol w="2194560"/>
                 <a:gridCol w="2194560"/>
               </a:tblGrid>
-              <a:tr h="384048">
+              <a:tr h="310896">
                 <a:tc>
                   <a:txBody>
                     <a:bodyPr/>
@@ -15599,7 +15599,7 @@
                   </a:tcPr>
                 </a:tc>
               </a:tr>
-              <a:tr h="384048">
+              <a:tr h="310896">
                 <a:tc>
                   <a:txBody>
                     <a:bodyPr/>
@@ -15693,7 +15693,7 @@
                   </a:tcPr>
                 </a:tc>
               </a:tr>
-              <a:tr h="384048">
+              <a:tr h="310896">
                 <a:tc>
                   <a:txBody>
                     <a:bodyPr/>
@@ -15787,7 +15787,7 @@
                   </a:tcPr>
                 </a:tc>
               </a:tr>
-              <a:tr h="384048">
+              <a:tr h="310896">
                 <a:tc>
                   <a:txBody>
                     <a:bodyPr/>
@@ -15881,7 +15881,7 @@
                   </a:tcPr>
                 </a:tc>
               </a:tr>
-              <a:tr h="384048">
+              <a:tr h="310896">
                 <a:tc>
                   <a:txBody>
                     <a:bodyPr/>
@@ -15975,7 +15975,7 @@
                   </a:tcPr>
                 </a:tc>
               </a:tr>
-              <a:tr h="384048">
+              <a:tr h="310896">
                 <a:tc>
                   <a:txBody>
                     <a:bodyPr/>
@@ -16069,7 +16069,7 @@
                   </a:tcPr>
                 </a:tc>
               </a:tr>
-              <a:tr h="384048">
+              <a:tr h="310896">
                 <a:tc>
                   <a:txBody>
                     <a:bodyPr/>
@@ -16163,7 +16163,7 @@
                   </a:tcPr>
                 </a:tc>
               </a:tr>
-              <a:tr h="384048">
+              <a:tr h="310896">
                 <a:tc>
                   <a:txBody>
                     <a:bodyPr/>
@@ -16269,7 +16269,7 @@
         </p:nvSpPr>
         <p:spPr>
           <a:xfrm>
-            <a:off x="502920" y="4398264"/>
+            <a:off x="502920" y="3886200"/>
             <a:ext cx="11155680" cy="548640"/>
           </a:xfrm>
           <a:prstGeom prst="rect">
@@ -16401,7 +16401,7 @@
         <p:spPr>
           <a:xfrm>
             <a:off x="594360" y="1371600"/>
-            <a:ext cx="10972800" cy="4846320"/>
+            <a:ext cx="10972800" cy="4983480"/>
           </a:xfrm>
           <a:prstGeom prst="rect">
             <a:avLst/>
@@ -16416,7 +16416,7 @@
           <a:p>
             <a:pPr algn="l">
               <a:spcAft>
-                <a:spcPts val="700"/>
+                <a:spcPts val="1000"/>
               </a:spcAft>
             </a:pPr>
             <a:r>
@@ -16432,7 +16432,7 @@
           <a:p>
             <a:pPr lvl="1" algn="l">
               <a:spcAft>
-                <a:spcPts val="400"/>
+                <a:spcPts val="600"/>
               </a:spcAft>
             </a:pPr>
             <a:r>
@@ -16448,7 +16448,7 @@
           <a:p>
             <a:pPr lvl="1" algn="l">
               <a:spcAft>
-                <a:spcPts val="400"/>
+                <a:spcPts val="600"/>
               </a:spcAft>
             </a:pPr>
             <a:r>
@@ -16464,7 +16464,7 @@
           <a:p>
             <a:pPr algn="l">
               <a:spcAft>
-                <a:spcPts val="700"/>
+                <a:spcPts val="1000"/>
               </a:spcAft>
             </a:pPr>
             <a:r>
@@ -16480,7 +16480,7 @@
           <a:p>
             <a:pPr lvl="1" algn="l">
               <a:spcAft>
-                <a:spcPts val="400"/>
+                <a:spcPts val="600"/>
               </a:spcAft>
             </a:pPr>
             <a:r>
@@ -16496,7 +16496,7 @@
           <a:p>
             <a:pPr lvl="1" algn="l">
               <a:spcAft>
-                <a:spcPts val="400"/>
+                <a:spcPts val="600"/>
               </a:spcAft>
             </a:pPr>
             <a:r>
@@ -16512,7 +16512,7 @@
           <a:p>
             <a:pPr lvl="1" algn="l">
               <a:spcAft>
-                <a:spcPts val="400"/>
+                <a:spcPts val="600"/>
               </a:spcAft>
             </a:pPr>
             <a:r>
@@ -16528,7 +16528,7 @@
           <a:p>
             <a:pPr lvl="1" algn="l">
               <a:spcAft>
-                <a:spcPts val="400"/>
+                <a:spcPts val="600"/>
               </a:spcAft>
             </a:pPr>
             <a:r>
@@ -16544,7 +16544,7 @@
           <a:p>
             <a:pPr algn="l">
               <a:spcAft>
-                <a:spcPts val="700"/>
+                <a:spcPts val="1000"/>
               </a:spcAft>
             </a:pPr>
             <a:r>
@@ -16560,7 +16560,7 @@
           <a:p>
             <a:pPr lvl="1" algn="l">
               <a:spcAft>
-                <a:spcPts val="400"/>
+                <a:spcPts val="600"/>
               </a:spcAft>
             </a:pPr>
             <a:r>
@@ -16576,7 +16576,7 @@
           <a:p>
             <a:pPr algn="l">
               <a:spcAft>
-                <a:spcPts val="700"/>
+                <a:spcPts val="1000"/>
               </a:spcAft>
             </a:pPr>
             <a:r>
@@ -16592,7 +16592,7 @@
           <a:p>
             <a:pPr lvl="1" algn="l">
               <a:spcAft>
-                <a:spcPts val="400"/>
+                <a:spcPts val="600"/>
               </a:spcAft>
             </a:pPr>
             <a:r>
@@ -16712,7 +16712,7 @@
         <p:spPr>
           <a:xfrm>
             <a:off x="594360" y="1371600"/>
-            <a:ext cx="10972800" cy="4846320"/>
+            <a:ext cx="10972800" cy="4983480"/>
           </a:xfrm>
           <a:prstGeom prst="rect">
             <a:avLst/>
@@ -16727,7 +16727,7 @@
           <a:p>
             <a:pPr algn="l">
               <a:spcAft>
-                <a:spcPts val="700"/>
+                <a:spcPts val="1000"/>
               </a:spcAft>
             </a:pPr>
             <a:r>
@@ -16743,7 +16743,7 @@
           <a:p>
             <a:pPr algn="l">
               <a:spcAft>
-                <a:spcPts val="700"/>
+                <a:spcPts val="1000"/>
               </a:spcAft>
             </a:pPr>
             <a:r>
@@ -16759,7 +16759,7 @@
           <a:p>
             <a:pPr algn="l">
               <a:spcAft>
-                <a:spcPts val="700"/>
+                <a:spcPts val="1000"/>
               </a:spcAft>
             </a:pPr>
             <a:r>
@@ -16775,7 +16775,7 @@
           <a:p>
             <a:pPr algn="l">
               <a:spcAft>
-                <a:spcPts val="700"/>
+                <a:spcPts val="1000"/>
               </a:spcAft>
             </a:pPr>
             <a:r>
@@ -16791,7 +16791,7 @@
           <a:p>
             <a:pPr algn="l">
               <a:spcAft>
-                <a:spcPts val="700"/>
+                <a:spcPts val="1000"/>
               </a:spcAft>
             </a:pPr>
             <a:r>
@@ -16807,7 +16807,7 @@
           <a:p>
             <a:pPr lvl="1" algn="l">
               <a:spcAft>
-                <a:spcPts val="400"/>
+                <a:spcPts val="600"/>
               </a:spcAft>
             </a:pPr>
             <a:r>
@@ -16823,7 +16823,7 @@
           <a:p>
             <a:pPr lvl="1" algn="l">
               <a:spcAft>
-                <a:spcPts val="400"/>
+                <a:spcPts val="600"/>
               </a:spcAft>
             </a:pPr>
             <a:r>
@@ -16839,7 +16839,7 @@
           <a:p>
             <a:pPr lvl="1" algn="l">
               <a:spcAft>
-                <a:spcPts val="400"/>
+                <a:spcPts val="600"/>
               </a:spcAft>
             </a:pPr>
             <a:r>
@@ -16855,7 +16855,7 @@
           <a:p>
             <a:pPr algn="l">
               <a:spcAft>
-                <a:spcPts val="700"/>
+                <a:spcPts val="1000"/>
               </a:spcAft>
             </a:pPr>
             <a:r>
@@ -16871,7 +16871,7 @@
           <a:p>
             <a:pPr algn="l">
               <a:spcAft>
-                <a:spcPts val="700"/>
+                <a:spcPts val="1000"/>
               </a:spcAft>
             </a:pPr>
             <a:r>
@@ -16887,7 +16887,7 @@
           <a:p>
             <a:pPr algn="l">
               <a:spcAft>
-                <a:spcPts val="700"/>
+                <a:spcPts val="1000"/>
               </a:spcAft>
             </a:pPr>
             <a:r>
@@ -17540,7 +17540,7 @@
         <p:spPr>
           <a:xfrm>
             <a:off x="594360" y="1371600"/>
-            <a:ext cx="10972800" cy="4846320"/>
+            <a:ext cx="10972800" cy="4983480"/>
           </a:xfrm>
           <a:prstGeom prst="rect">
             <a:avLst/>
@@ -17555,11 +17555,11 @@
           <a:p>
             <a:pPr algn="l">
               <a:spcAft>
-                <a:spcPts val="700"/>
-              </a:spcAft>
-            </a:pPr>
-            <a:r>
-              <a:rPr sz="2000" b="1">
+                <a:spcPts val="800"/>
+              </a:spcAft>
+            </a:pPr>
+            <a:r>
+              <a:rPr sz="1800" b="1">
                 <a:solidFill>
                   <a:srgbClr val="1F3355"/>
                 </a:solidFill>
@@ -17571,11 +17571,11 @@
           <a:p>
             <a:pPr algn="l">
               <a:spcAft>
-                <a:spcPts val="700"/>
-              </a:spcAft>
-            </a:pPr>
-            <a:r>
-              <a:rPr sz="2000" b="0">
+                <a:spcPts val="800"/>
+              </a:spcAft>
+            </a:pPr>
+            <a:r>
+              <a:rPr sz="1800" b="0">
                 <a:solidFill>
                   <a:srgbClr val="0B6040"/>
                 </a:solidFill>
@@ -17587,11 +17587,11 @@
           <a:p>
             <a:pPr algn="l">
               <a:spcAft>
-                <a:spcPts val="700"/>
-              </a:spcAft>
-            </a:pPr>
-            <a:r>
-              <a:rPr sz="2000" b="0">
+                <a:spcPts val="800"/>
+              </a:spcAft>
+            </a:pPr>
+            <a:r>
+              <a:rPr sz="1800" b="0">
                 <a:solidFill>
                   <a:srgbClr val="0B6040"/>
                 </a:solidFill>
@@ -17603,11 +17603,11 @@
           <a:p>
             <a:pPr algn="l">
               <a:spcAft>
-                <a:spcPts val="700"/>
-              </a:spcAft>
-            </a:pPr>
-            <a:r>
-              <a:rPr sz="2000" b="0">
+                <a:spcPts val="800"/>
+              </a:spcAft>
+            </a:pPr>
+            <a:r>
+              <a:rPr sz="1800" b="0">
                 <a:solidFill>
                   <a:srgbClr val="0B6040"/>
                 </a:solidFill>
@@ -17619,11 +17619,11 @@
           <a:p>
             <a:pPr algn="l">
               <a:spcAft>
-                <a:spcPts val="700"/>
-              </a:spcAft>
-            </a:pPr>
-            <a:r>
-              <a:rPr sz="2000" b="0">
+                <a:spcPts val="800"/>
+              </a:spcAft>
+            </a:pPr>
+            <a:r>
+              <a:rPr sz="1800" b="0">
                 <a:solidFill>
                   <a:srgbClr val="0B6040"/>
                 </a:solidFill>
@@ -17635,11 +17635,11 @@
           <a:p>
             <a:pPr algn="l">
               <a:spcAft>
-                <a:spcPts val="700"/>
-              </a:spcAft>
-            </a:pPr>
-            <a:r>
-              <a:rPr sz="2000" b="1">
+                <a:spcPts val="800"/>
+              </a:spcAft>
+            </a:pPr>
+            <a:r>
+              <a:rPr sz="1800" b="1">
                 <a:solidFill>
                   <a:srgbClr val="C0392B"/>
                 </a:solidFill>
@@ -17655,7 +17655,7 @@
               </a:spcAft>
             </a:pPr>
             <a:r>
-              <a:rPr sz="1700" b="0">
+              <a:rPr sz="1500" b="0">
                 <a:solidFill>
                   <a:srgbClr val="555555"/>
                 </a:solidFill>
@@ -17671,7 +17671,7 @@
               </a:spcAft>
             </a:pPr>
             <a:r>
-              <a:rPr sz="1700" b="0">
+              <a:rPr sz="1500" b="0">
                 <a:solidFill>
                   <a:srgbClr val="555555"/>
                 </a:solidFill>
@@ -17683,11 +17683,11 @@
           <a:p>
             <a:pPr algn="l">
               <a:spcAft>
-                <a:spcPts val="700"/>
-              </a:spcAft>
-            </a:pPr>
-            <a:r>
-              <a:rPr sz="2000" b="1">
+                <a:spcPts val="800"/>
+              </a:spcAft>
+            </a:pPr>
+            <a:r>
+              <a:rPr sz="1800" b="1">
                 <a:solidFill>
                   <a:srgbClr val="1F3355"/>
                 </a:solidFill>
@@ -17703,7 +17703,7 @@
               </a:spcAft>
             </a:pPr>
             <a:r>
-              <a:rPr sz="1700" b="0">
+              <a:rPr sz="1500" b="0">
                 <a:solidFill>
                   <a:srgbClr val="0B6040"/>
                 </a:solidFill>
@@ -17719,7 +17719,7 @@
               </a:spcAft>
             </a:pPr>
             <a:r>
-              <a:rPr sz="1700" b="0">
+              <a:rPr sz="1500" b="0">
                 <a:solidFill>
                   <a:srgbClr val="0B6040"/>
                 </a:solidFill>
@@ -17735,7 +17735,7 @@
               </a:spcAft>
             </a:pPr>
             <a:r>
-              <a:rPr sz="1700" b="0">
+              <a:rPr sz="1500" b="0">
                 <a:solidFill>
                   <a:srgbClr val="555555"/>
                 </a:solidFill>
@@ -17751,7 +17751,7 @@
               </a:spcAft>
             </a:pPr>
             <a:r>
-              <a:rPr sz="1700" b="0">
+              <a:rPr sz="1500" b="0">
                 <a:solidFill>
                   <a:srgbClr val="555555"/>
                 </a:solidFill>
@@ -17763,11 +17763,11 @@
           <a:p>
             <a:pPr algn="l">
               <a:spcAft>
-                <a:spcPts val="700"/>
-              </a:spcAft>
-            </a:pPr>
-            <a:r>
-              <a:rPr sz="2000" b="0">
+                <a:spcPts val="800"/>
+              </a:spcAft>
+            </a:pPr>
+            <a:r>
+              <a:rPr sz="1800" b="0">
                 <a:solidFill>
                   <a:srgbClr val="1F3355"/>
                 </a:solidFill>
@@ -17883,7 +17883,7 @@
         <p:spPr>
           <a:xfrm>
             <a:off x="594360" y="1371600"/>
-            <a:ext cx="10972800" cy="4846320"/>
+            <a:ext cx="10972800" cy="4983480"/>
           </a:xfrm>
           <a:prstGeom prst="rect">
             <a:avLst/>
@@ -17898,7 +17898,7 @@
           <a:p>
             <a:pPr algn="l">
               <a:spcAft>
-                <a:spcPts val="700"/>
+                <a:spcPts val="1000"/>
               </a:spcAft>
             </a:pPr>
             <a:r>
@@ -17914,7 +17914,7 @@
           <a:p>
             <a:pPr algn="l">
               <a:spcAft>
-                <a:spcPts val="700"/>
+                <a:spcPts val="1000"/>
               </a:spcAft>
             </a:pPr>
             <a:r>
@@ -17930,7 +17930,7 @@
           <a:p>
             <a:pPr algn="l">
               <a:spcAft>
-                <a:spcPts val="700"/>
+                <a:spcPts val="1000"/>
               </a:spcAft>
             </a:pPr>
             <a:r>
@@ -17946,7 +17946,7 @@
           <a:p>
             <a:pPr lvl="1" algn="l">
               <a:spcAft>
-                <a:spcPts val="400"/>
+                <a:spcPts val="600"/>
               </a:spcAft>
             </a:pPr>
             <a:r>
@@ -17962,7 +17962,7 @@
           <a:p>
             <a:pPr lvl="1" algn="l">
               <a:spcAft>
-                <a:spcPts val="400"/>
+                <a:spcPts val="600"/>
               </a:spcAft>
             </a:pPr>
             <a:r>
@@ -17978,7 +17978,7 @@
           <a:p>
             <a:pPr lvl="1" algn="l">
               <a:spcAft>
-                <a:spcPts val="400"/>
+                <a:spcPts val="600"/>
               </a:spcAft>
             </a:pPr>
             <a:r>
@@ -17994,7 +17994,7 @@
           <a:p>
             <a:pPr algn="l">
               <a:spcAft>
-                <a:spcPts val="700"/>
+                <a:spcPts val="1000"/>
               </a:spcAft>
             </a:pPr>
             <a:r>
@@ -18010,7 +18010,7 @@
           <a:p>
             <a:pPr lvl="1" algn="l">
               <a:spcAft>
-                <a:spcPts val="400"/>
+                <a:spcPts val="600"/>
               </a:spcAft>
             </a:pPr>
             <a:r>
@@ -18026,7 +18026,7 @@
           <a:p>
             <a:pPr algn="l">
               <a:spcAft>
-                <a:spcPts val="700"/>
+                <a:spcPts val="1000"/>
               </a:spcAft>
             </a:pPr>
             <a:r>
@@ -18042,7 +18042,7 @@
           <a:p>
             <a:pPr lvl="1" algn="l">
               <a:spcAft>
-                <a:spcPts val="400"/>
+                <a:spcPts val="600"/>
               </a:spcAft>
             </a:pPr>
             <a:r>
@@ -18058,7 +18058,7 @@
           <a:p>
             <a:pPr lvl="1" algn="l">
               <a:spcAft>
-                <a:spcPts val="400"/>
+                <a:spcPts val="600"/>
               </a:spcAft>
             </a:pPr>
             <a:r>
@@ -18074,7 +18074,7 @@
           <a:p>
             <a:pPr algn="l">
               <a:spcAft>
-                <a:spcPts val="700"/>
+                <a:spcPts val="1000"/>
               </a:spcAft>
             </a:pPr>
             <a:r>
@@ -18318,7 +18318,7 @@
         <p:spPr>
           <a:xfrm>
             <a:off x="594360" y="1371600"/>
-            <a:ext cx="10972800" cy="4846320"/>
+            <a:ext cx="10972800" cy="4983480"/>
           </a:xfrm>
           <a:prstGeom prst="rect">
             <a:avLst/>
@@ -18333,7 +18333,7 @@
           <a:p>
             <a:pPr algn="l">
               <a:spcAft>
-                <a:spcPts val="700"/>
+                <a:spcPts val="1000"/>
               </a:spcAft>
             </a:pPr>
             <a:r>
@@ -18349,7 +18349,7 @@
           <a:p>
             <a:pPr lvl="1" algn="l">
               <a:spcAft>
-                <a:spcPts val="400"/>
+                <a:spcPts val="600"/>
               </a:spcAft>
             </a:pPr>
             <a:r>
@@ -18365,7 +18365,7 @@
           <a:p>
             <a:pPr lvl="1" algn="l">
               <a:spcAft>
-                <a:spcPts val="400"/>
+                <a:spcPts val="600"/>
               </a:spcAft>
             </a:pPr>
             <a:r>
@@ -18381,7 +18381,7 @@
           <a:p>
             <a:pPr algn="l">
               <a:spcAft>
-                <a:spcPts val="700"/>
+                <a:spcPts val="1000"/>
               </a:spcAft>
             </a:pPr>
             <a:r>
@@ -18397,7 +18397,7 @@
           <a:p>
             <a:pPr lvl="1" algn="l">
               <a:spcAft>
-                <a:spcPts val="400"/>
+                <a:spcPts val="600"/>
               </a:spcAft>
             </a:pPr>
             <a:r>
@@ -18413,7 +18413,7 @@
           <a:p>
             <a:pPr lvl="1" algn="l">
               <a:spcAft>
-                <a:spcPts val="400"/>
+                <a:spcPts val="600"/>
               </a:spcAft>
             </a:pPr>
             <a:r>
@@ -18429,7 +18429,7 @@
           <a:p>
             <a:pPr lvl="1" algn="l">
               <a:spcAft>
-                <a:spcPts val="400"/>
+                <a:spcPts val="600"/>
               </a:spcAft>
             </a:pPr>
             <a:r>
@@ -18445,7 +18445,7 @@
           <a:p>
             <a:pPr algn="l">
               <a:spcAft>
-                <a:spcPts val="700"/>
+                <a:spcPts val="1000"/>
               </a:spcAft>
             </a:pPr>
             <a:r>
@@ -18461,7 +18461,7 @@
           <a:p>
             <a:pPr lvl="1" algn="l">
               <a:spcAft>
-                <a:spcPts val="400"/>
+                <a:spcPts val="600"/>
               </a:spcAft>
             </a:pPr>
             <a:r>
@@ -18477,7 +18477,7 @@
           <a:p>
             <a:pPr lvl="1" algn="l">
               <a:spcAft>
-                <a:spcPts val="400"/>
+                <a:spcPts val="600"/>
               </a:spcAft>
             </a:pPr>
             <a:r>
@@ -19092,7 +19092,7 @@
         </p:nvGraphicFramePr>
         <p:xfrm>
           <a:off x="502920" y="1143000"/>
-          <a:ext cx="10972800" cy="2688336"/>
+          <a:ext cx="10972800" cy="2176272"/>
         </p:xfrm>
         <a:graphic>
           <a:graphicData uri="http://schemas.openxmlformats.org/drawingml/2006/table">
@@ -19105,7 +19105,7 @@
                 <a:gridCol w="3108960"/>
                 <a:gridCol w="4572000"/>
               </a:tblGrid>
-              <a:tr h="384048">
+              <a:tr h="310896">
                 <a:tc>
                   <a:txBody>
                     <a:bodyPr/>
@@ -19176,7 +19176,7 @@
                   </a:tcPr>
                 </a:tc>
               </a:tr>
-              <a:tr h="384048">
+              <a:tr h="310896">
                 <a:tc>
                   <a:txBody>
                     <a:bodyPr/>
@@ -19247,7 +19247,7 @@
                   </a:tcPr>
                 </a:tc>
               </a:tr>
-              <a:tr h="384048">
+              <a:tr h="310896">
                 <a:tc>
                   <a:txBody>
                     <a:bodyPr/>
@@ -19318,7 +19318,7 @@
                   </a:tcPr>
                 </a:tc>
               </a:tr>
-              <a:tr h="384048">
+              <a:tr h="310896">
                 <a:tc>
                   <a:txBody>
                     <a:bodyPr/>
@@ -19389,7 +19389,7 @@
                   </a:tcPr>
                 </a:tc>
               </a:tr>
-              <a:tr h="384048">
+              <a:tr h="310896">
                 <a:tc>
                   <a:txBody>
                     <a:bodyPr/>
@@ -19460,7 +19460,7 @@
                   </a:tcPr>
                 </a:tc>
               </a:tr>
-              <a:tr h="384048">
+              <a:tr h="310896">
                 <a:tc>
                   <a:txBody>
                     <a:bodyPr/>
@@ -19531,7 +19531,7 @@
                   </a:tcPr>
                 </a:tc>
               </a:tr>
-              <a:tr h="384048">
+              <a:tr h="310896">
                 <a:tc>
                   <a:txBody>
                     <a:bodyPr/>
@@ -19614,7 +19614,7 @@
         </p:nvSpPr>
         <p:spPr>
           <a:xfrm>
-            <a:off x="502920" y="4288536"/>
+            <a:off x="502920" y="3575304"/>
             <a:ext cx="11155680" cy="548640"/>
           </a:xfrm>
           <a:prstGeom prst="rect">
@@ -19746,7 +19746,7 @@
         <p:spPr>
           <a:xfrm>
             <a:off x="594360" y="1371600"/>
-            <a:ext cx="10972800" cy="4846320"/>
+            <a:ext cx="10972800" cy="4709160"/>
           </a:xfrm>
           <a:prstGeom prst="rect">
             <a:avLst/>
@@ -19761,7 +19761,7 @@
           <a:p>
             <a:pPr algn="l">
               <a:spcAft>
-                <a:spcPts val="700"/>
+                <a:spcPts val="1000"/>
               </a:spcAft>
             </a:pPr>
             <a:r>
@@ -19777,7 +19777,7 @@
           <a:p>
             <a:pPr lvl="1" algn="l">
               <a:spcAft>
-                <a:spcPts val="400"/>
+                <a:spcPts val="600"/>
               </a:spcAft>
             </a:pPr>
             <a:r>
@@ -19793,7 +19793,7 @@
           <a:p>
             <a:pPr lvl="1" algn="l">
               <a:spcAft>
-                <a:spcPts val="400"/>
+                <a:spcPts val="600"/>
               </a:spcAft>
             </a:pPr>
             <a:r>
@@ -19809,7 +19809,7 @@
           <a:p>
             <a:pPr lvl="1" algn="l">
               <a:spcAft>
-                <a:spcPts val="400"/>
+                <a:spcPts val="600"/>
               </a:spcAft>
             </a:pPr>
             <a:r>
@@ -19825,7 +19825,7 @@
           <a:p>
             <a:pPr algn="l">
               <a:spcAft>
-                <a:spcPts val="700"/>
+                <a:spcPts val="1000"/>
               </a:spcAft>
             </a:pPr>
             <a:r>
@@ -19841,7 +19841,7 @@
           <a:p>
             <a:pPr lvl="1" algn="l">
               <a:spcAft>
-                <a:spcPts val="400"/>
+                <a:spcPts val="600"/>
               </a:spcAft>
             </a:pPr>
             <a:r>
@@ -19857,7 +19857,7 @@
           <a:p>
             <a:pPr lvl="1" algn="l">
               <a:spcAft>
-                <a:spcPts val="400"/>
+                <a:spcPts val="600"/>
               </a:spcAft>
             </a:pPr>
             <a:r>
@@ -19873,7 +19873,7 @@
           <a:p>
             <a:pPr algn="l">
               <a:spcAft>
-                <a:spcPts val="700"/>
+                <a:spcPts val="1000"/>
               </a:spcAft>
             </a:pPr>
             <a:r>
@@ -19889,7 +19889,7 @@
           <a:p>
             <a:pPr lvl="1" algn="l">
               <a:spcAft>
-                <a:spcPts val="400"/>
+                <a:spcPts val="600"/>
               </a:spcAft>
             </a:pPr>
             <a:r>
@@ -19905,7 +19905,7 @@
           <a:p>
             <a:pPr lvl="1" algn="l">
               <a:spcAft>
-                <a:spcPts val="400"/>
+                <a:spcPts val="600"/>
               </a:spcAft>
             </a:pPr>
             <a:r>
@@ -19921,7 +19921,7 @@
           <a:p>
             <a:pPr lvl="1" algn="l">
               <a:spcAft>
-                <a:spcPts val="400"/>
+                <a:spcPts val="600"/>
               </a:spcAft>
             </a:pPr>
             <a:r>
@@ -19944,8 +19944,8 @@
         </p:nvSpPr>
         <p:spPr>
           <a:xfrm>
-            <a:off x="594360" y="6263640"/>
-            <a:ext cx="10972800" cy="457200"/>
+            <a:off x="594360" y="6217920"/>
+            <a:ext cx="10972800" cy="502920"/>
           </a:xfrm>
           <a:prstGeom prst="rect">
             <a:avLst/>
@@ -20158,7 +20158,7 @@
         </p:nvGraphicFramePr>
         <p:xfrm>
           <a:off x="502920" y="1143000"/>
-          <a:ext cx="10972800" cy="2304288"/>
+          <a:ext cx="10972800" cy="1865376"/>
         </p:xfrm>
         <a:graphic>
           <a:graphicData uri="http://schemas.openxmlformats.org/drawingml/2006/table">
@@ -20172,7 +20172,7 @@
                 <a:gridCol w="2743200"/>
                 <a:gridCol w="2011680"/>
               </a:tblGrid>
-              <a:tr h="384048">
+              <a:tr h="310896">
                 <a:tc>
                   <a:txBody>
                     <a:bodyPr/>
@@ -20266,7 +20266,7 @@
                   </a:tcPr>
                 </a:tc>
               </a:tr>
-              <a:tr h="384048">
+              <a:tr h="310896">
                 <a:tc>
                   <a:txBody>
                     <a:bodyPr/>
@@ -20360,7 +20360,7 @@
                   </a:tcPr>
                 </a:tc>
               </a:tr>
-              <a:tr h="384048">
+              <a:tr h="310896">
                 <a:tc>
                   <a:txBody>
                     <a:bodyPr/>
@@ -20454,7 +20454,7 @@
                   </a:tcPr>
                 </a:tc>
               </a:tr>
-              <a:tr h="384048">
+              <a:tr h="310896">
                 <a:tc>
                   <a:txBody>
                     <a:bodyPr/>
@@ -20548,7 +20548,7 @@
                   </a:tcPr>
                 </a:tc>
               </a:tr>
-              <a:tr h="384048">
+              <a:tr h="310896">
                 <a:tc>
                   <a:txBody>
                     <a:bodyPr/>
@@ -20642,7 +20642,7 @@
                   </a:tcPr>
                 </a:tc>
               </a:tr>
-              <a:tr h="384048">
+              <a:tr h="310896">
                 <a:tc>
                   <a:txBody>
                     <a:bodyPr/>
@@ -20748,7 +20748,7 @@
         </p:nvSpPr>
         <p:spPr>
           <a:xfrm>
-            <a:off x="502920" y="3630168"/>
+            <a:off x="502920" y="3264408"/>
             <a:ext cx="11155680" cy="548640"/>
           </a:xfrm>
           <a:prstGeom prst="rect">
@@ -20880,7 +20880,7 @@
         <p:spPr>
           <a:xfrm>
             <a:off x="594360" y="1371600"/>
-            <a:ext cx="10972800" cy="4846320"/>
+            <a:ext cx="10972800" cy="4983480"/>
           </a:xfrm>
           <a:prstGeom prst="rect">
             <a:avLst/>
@@ -20895,7 +20895,7 @@
           <a:p>
             <a:pPr algn="l">
               <a:spcAft>
-                <a:spcPts val="700"/>
+                <a:spcPts val="1000"/>
               </a:spcAft>
             </a:pPr>
             <a:r>
@@ -20911,7 +20911,7 @@
           <a:p>
             <a:pPr lvl="1" algn="l">
               <a:spcAft>
-                <a:spcPts val="400"/>
+                <a:spcPts val="600"/>
               </a:spcAft>
             </a:pPr>
             <a:r>
@@ -20927,7 +20927,7 @@
           <a:p>
             <a:pPr lvl="1" algn="l">
               <a:spcAft>
-                <a:spcPts val="400"/>
+                <a:spcPts val="600"/>
               </a:spcAft>
             </a:pPr>
             <a:r>
@@ -20943,7 +20943,7 @@
           <a:p>
             <a:pPr lvl="1" algn="l">
               <a:spcAft>
-                <a:spcPts val="400"/>
+                <a:spcPts val="600"/>
               </a:spcAft>
             </a:pPr>
             <a:r>
@@ -20959,7 +20959,7 @@
           <a:p>
             <a:pPr algn="l">
               <a:spcAft>
-                <a:spcPts val="700"/>
+                <a:spcPts val="1000"/>
               </a:spcAft>
             </a:pPr>
             <a:r>
@@ -20975,7 +20975,7 @@
           <a:p>
             <a:pPr lvl="1" algn="l">
               <a:spcAft>
-                <a:spcPts val="400"/>
+                <a:spcPts val="600"/>
               </a:spcAft>
             </a:pPr>
             <a:r>
@@ -20991,7 +20991,7 @@
           <a:p>
             <a:pPr lvl="1" algn="l">
               <a:spcAft>
-                <a:spcPts val="400"/>
+                <a:spcPts val="600"/>
               </a:spcAft>
             </a:pPr>
             <a:r>
@@ -21007,7 +21007,7 @@
           <a:p>
             <a:pPr lvl="1" algn="l">
               <a:spcAft>
-                <a:spcPts val="400"/>
+                <a:spcPts val="600"/>
               </a:spcAft>
             </a:pPr>
             <a:r>
@@ -21023,7 +21023,7 @@
           <a:p>
             <a:pPr algn="l">
               <a:spcAft>
-                <a:spcPts val="700"/>
+                <a:spcPts val="1000"/>
               </a:spcAft>
             </a:pPr>
             <a:r>
@@ -21039,7 +21039,7 @@
           <a:p>
             <a:pPr lvl="1" algn="l">
               <a:spcAft>
-                <a:spcPts val="400"/>
+                <a:spcPts val="600"/>
               </a:spcAft>
             </a:pPr>
             <a:r>
@@ -21055,7 +21055,7 @@
           <a:p>
             <a:pPr lvl="1" algn="l">
               <a:spcAft>
-                <a:spcPts val="400"/>
+                <a:spcPts val="600"/>
               </a:spcAft>
             </a:pPr>
             <a:r>
@@ -21133,7 +21133,7 @@
         </p:nvGraphicFramePr>
         <p:xfrm>
           <a:off x="502920" y="1143000"/>
-          <a:ext cx="10972800" cy="2688336"/>
+          <a:ext cx="10972800" cy="2176272"/>
         </p:xfrm>
         <a:graphic>
           <a:graphicData uri="http://schemas.openxmlformats.org/drawingml/2006/table">
@@ -21147,7 +21147,7 @@
                 <a:gridCol w="3108960"/>
                 <a:gridCol w="2926080"/>
               </a:tblGrid>
-              <a:tr h="384048">
+              <a:tr h="310896">
                 <a:tc>
                   <a:txBody>
                     <a:bodyPr/>
@@ -21241,7 +21241,7 @@
                   </a:tcPr>
                 </a:tc>
               </a:tr>
-              <a:tr h="384048">
+              <a:tr h="310896">
                 <a:tc>
                   <a:txBody>
                     <a:bodyPr/>
@@ -21335,7 +21335,7 @@
                   </a:tcPr>
                 </a:tc>
               </a:tr>
-              <a:tr h="384048">
+              <a:tr h="310896">
                 <a:tc>
                   <a:txBody>
                     <a:bodyPr/>
@@ -21429,7 +21429,7 @@
                   </a:tcPr>
                 </a:tc>
               </a:tr>
-              <a:tr h="384048">
+              <a:tr h="310896">
                 <a:tc>
                   <a:txBody>
                     <a:bodyPr/>
@@ -21523,7 +21523,7 @@
                   </a:tcPr>
                 </a:tc>
               </a:tr>
-              <a:tr h="384048">
+              <a:tr h="310896">
                 <a:tc>
                   <a:txBody>
                     <a:bodyPr/>
@@ -21617,7 +21617,7 @@
                   </a:tcPr>
                 </a:tc>
               </a:tr>
-              <a:tr h="384048">
+              <a:tr h="310896">
                 <a:tc>
                   <a:txBody>
                     <a:bodyPr/>
@@ -21711,7 +21711,7 @@
                   </a:tcPr>
                 </a:tc>
               </a:tr>
-              <a:tr h="384048">
+              <a:tr h="310896">
                 <a:tc>
                   <a:txBody>
                     <a:bodyPr/>
@@ -21817,7 +21817,7 @@
         </p:nvSpPr>
         <p:spPr>
           <a:xfrm>
-            <a:off x="502920" y="4014215"/>
+            <a:off x="502920" y="3575304"/>
             <a:ext cx="11155680" cy="548640"/>
           </a:xfrm>
           <a:prstGeom prst="rect">
@@ -21949,7 +21949,7 @@
         <p:spPr>
           <a:xfrm>
             <a:off x="594360" y="1371600"/>
-            <a:ext cx="10972800" cy="4846320"/>
+            <a:ext cx="10972800" cy="4709160"/>
           </a:xfrm>
           <a:prstGeom prst="rect">
             <a:avLst/>
@@ -21964,11 +21964,11 @@
           <a:p>
             <a:pPr algn="l">
               <a:spcAft>
-                <a:spcPts val="700"/>
-              </a:spcAft>
-            </a:pPr>
-            <a:r>
-              <a:rPr sz="2000" b="1">
+                <a:spcPts val="800"/>
+              </a:spcAft>
+            </a:pPr>
+            <a:r>
+              <a:rPr sz="1800" b="1">
                 <a:solidFill>
                   <a:srgbClr val="1F3355"/>
                 </a:solidFill>
@@ -21984,7 +21984,7 @@
               </a:spcAft>
             </a:pPr>
             <a:r>
-              <a:rPr sz="1700" b="0">
+              <a:rPr sz="1500" b="0">
                 <a:solidFill>
                   <a:srgbClr val="555555"/>
                 </a:solidFill>
@@ -22000,7 +22000,7 @@
               </a:spcAft>
             </a:pPr>
             <a:r>
-              <a:rPr sz="1700" b="0">
+              <a:rPr sz="1500" b="0">
                 <a:solidFill>
                   <a:srgbClr val="0B6040"/>
                 </a:solidFill>
@@ -22012,11 +22012,11 @@
           <a:p>
             <a:pPr algn="l">
               <a:spcAft>
-                <a:spcPts val="700"/>
-              </a:spcAft>
-            </a:pPr>
-            <a:r>
-              <a:rPr sz="2000" b="1">
+                <a:spcPts val="800"/>
+              </a:spcAft>
+            </a:pPr>
+            <a:r>
+              <a:rPr sz="1800" b="1">
                 <a:solidFill>
                   <a:srgbClr val="1F3355"/>
                 </a:solidFill>
@@ -22032,7 +22032,7 @@
               </a:spcAft>
             </a:pPr>
             <a:r>
-              <a:rPr sz="1700" b="0">
+              <a:rPr sz="1500" b="0">
                 <a:solidFill>
                   <a:srgbClr val="555555"/>
                 </a:solidFill>
@@ -22048,7 +22048,7 @@
               </a:spcAft>
             </a:pPr>
             <a:r>
-              <a:rPr sz="1700" b="0">
+              <a:rPr sz="1500" b="0">
                 <a:solidFill>
                   <a:srgbClr val="555555"/>
                 </a:solidFill>
@@ -22064,7 +22064,7 @@
               </a:spcAft>
             </a:pPr>
             <a:r>
-              <a:rPr sz="1700" b="1">
+              <a:rPr sz="1500" b="1">
                 <a:solidFill>
                   <a:srgbClr val="C0392B"/>
                 </a:solidFill>
@@ -22080,7 +22080,7 @@
               </a:spcAft>
             </a:pPr>
             <a:r>
-              <a:rPr sz="1700" b="1">
+              <a:rPr sz="1500" b="1">
                 <a:solidFill>
                   <a:srgbClr val="C0392B"/>
                 </a:solidFill>
@@ -22092,11 +22092,11 @@
           <a:p>
             <a:pPr algn="l">
               <a:spcAft>
-                <a:spcPts val="700"/>
-              </a:spcAft>
-            </a:pPr>
-            <a:r>
-              <a:rPr sz="2000" b="1">
+                <a:spcPts val="800"/>
+              </a:spcAft>
+            </a:pPr>
+            <a:r>
+              <a:rPr sz="1800" b="1">
                 <a:solidFill>
                   <a:srgbClr val="1F3355"/>
                 </a:solidFill>
@@ -22112,7 +22112,7 @@
               </a:spcAft>
             </a:pPr>
             <a:r>
-              <a:rPr sz="1700" b="0">
+              <a:rPr sz="1500" b="0">
                 <a:solidFill>
                   <a:srgbClr val="555555"/>
                 </a:solidFill>
@@ -22128,7 +22128,7 @@
               </a:spcAft>
             </a:pPr>
             <a:r>
-              <a:rPr sz="1700" b="0">
+              <a:rPr sz="1500" b="0">
                 <a:solidFill>
                   <a:srgbClr val="555555"/>
                 </a:solidFill>
@@ -22140,11 +22140,11 @@
           <a:p>
             <a:pPr algn="l">
               <a:spcAft>
-                <a:spcPts val="700"/>
-              </a:spcAft>
-            </a:pPr>
-            <a:r>
-              <a:rPr sz="2000" b="1">
+                <a:spcPts val="800"/>
+              </a:spcAft>
+            </a:pPr>
+            <a:r>
+              <a:rPr sz="1800" b="1">
                 <a:solidFill>
                   <a:srgbClr val="C0392B"/>
                 </a:solidFill>
@@ -22160,7 +22160,7 @@
               </a:spcAft>
             </a:pPr>
             <a:r>
-              <a:rPr sz="1700" b="0">
+              <a:rPr sz="1500" b="0">
                 <a:solidFill>
                   <a:srgbClr val="555555"/>
                 </a:solidFill>
@@ -22176,7 +22176,7 @@
               </a:spcAft>
             </a:pPr>
             <a:r>
-              <a:rPr sz="1700" b="0">
+              <a:rPr sz="1500" b="0">
                 <a:solidFill>
                   <a:srgbClr val="555555"/>
                 </a:solidFill>
@@ -22195,8 +22195,8 @@
         </p:nvSpPr>
         <p:spPr>
           <a:xfrm>
-            <a:off x="594360" y="6263640"/>
-            <a:ext cx="10972800" cy="457200"/>
+            <a:off x="594360" y="6217920"/>
+            <a:ext cx="10972800" cy="502920"/>
           </a:xfrm>
           <a:prstGeom prst="rect">
             <a:avLst/>
@@ -23669,7 +23669,7 @@
         <p:spPr>
           <a:xfrm>
             <a:off x="594360" y="1371600"/>
-            <a:ext cx="10972800" cy="4846320"/>
+            <a:ext cx="10972800" cy="4983480"/>
           </a:xfrm>
           <a:prstGeom prst="rect">
             <a:avLst/>
@@ -23684,7 +23684,7 @@
           <a:p>
             <a:pPr algn="l">
               <a:spcAft>
-                <a:spcPts val="700"/>
+                <a:spcPts val="1000"/>
               </a:spcAft>
             </a:pPr>
             <a:r>
@@ -23700,7 +23700,7 @@
           <a:p>
             <a:pPr lvl="1" algn="l">
               <a:spcAft>
-                <a:spcPts val="400"/>
+                <a:spcPts val="600"/>
               </a:spcAft>
             </a:pPr>
             <a:r>
@@ -23716,7 +23716,7 @@
           <a:p>
             <a:pPr algn="l">
               <a:spcAft>
-                <a:spcPts val="700"/>
+                <a:spcPts val="1000"/>
               </a:spcAft>
             </a:pPr>
             <a:r>
@@ -23732,7 +23732,7 @@
           <a:p>
             <a:pPr lvl="1" algn="l">
               <a:spcAft>
-                <a:spcPts val="400"/>
+                <a:spcPts val="600"/>
               </a:spcAft>
             </a:pPr>
             <a:r>
@@ -23748,7 +23748,7 @@
           <a:p>
             <a:pPr algn="l">
               <a:spcAft>
-                <a:spcPts val="700"/>
+                <a:spcPts val="1000"/>
               </a:spcAft>
             </a:pPr>
             <a:r>
@@ -23764,7 +23764,7 @@
           <a:p>
             <a:pPr lvl="1" algn="l">
               <a:spcAft>
-                <a:spcPts val="400"/>
+                <a:spcPts val="600"/>
               </a:spcAft>
             </a:pPr>
             <a:r>
@@ -23780,7 +23780,7 @@
           <a:p>
             <a:pPr algn="l">
               <a:spcAft>
-                <a:spcPts val="700"/>
+                <a:spcPts val="1000"/>
               </a:spcAft>
             </a:pPr>
             <a:r>
@@ -23796,7 +23796,7 @@
           <a:p>
             <a:pPr lvl="1" algn="l">
               <a:spcAft>
-                <a:spcPts val="400"/>
+                <a:spcPts val="600"/>
               </a:spcAft>
             </a:pPr>
             <a:r>
@@ -23812,7 +23812,7 @@
           <a:p>
             <a:pPr algn="l">
               <a:spcAft>
-                <a:spcPts val="700"/>
+                <a:spcPts val="1000"/>
               </a:spcAft>
             </a:pPr>
             <a:r>
@@ -23828,7 +23828,7 @@
           <a:p>
             <a:pPr lvl="1" algn="l">
               <a:spcAft>
-                <a:spcPts val="400"/>
+                <a:spcPts val="600"/>
               </a:spcAft>
             </a:pPr>
             <a:r>
@@ -23844,7 +23844,7 @@
           <a:p>
             <a:pPr algn="l">
               <a:spcAft>
-                <a:spcPts val="700"/>
+                <a:spcPts val="1000"/>
               </a:spcAft>
             </a:pPr>
             <a:r>
@@ -25266,7 +25266,7 @@
         </p:nvGraphicFramePr>
         <p:xfrm>
           <a:off x="502920" y="1143000"/>
-          <a:ext cx="11155680" cy="5212080"/>
+          <a:ext cx="11155680" cy="4352544"/>
         </p:xfrm>
         <a:graphic>
           <a:graphicData uri="http://schemas.openxmlformats.org/drawingml/2006/table">
@@ -25279,7 +25279,7 @@
                 <a:gridCol w="3566160"/>
                 <a:gridCol w="3657600"/>
               </a:tblGrid>
-              <a:tr h="372291">
+              <a:tr h="310896">
                 <a:tc>
                   <a:txBody>
                     <a:bodyPr/>
@@ -25350,7 +25350,7 @@
                   </a:tcPr>
                 </a:tc>
               </a:tr>
-              <a:tr h="372291">
+              <a:tr h="310896">
                 <a:tc>
                   <a:txBody>
                     <a:bodyPr/>
@@ -25421,7 +25421,7 @@
                   </a:tcPr>
                 </a:tc>
               </a:tr>
-              <a:tr h="372291">
+              <a:tr h="310896">
                 <a:tc>
                   <a:txBody>
                     <a:bodyPr/>
@@ -25492,7 +25492,7 @@
                   </a:tcPr>
                 </a:tc>
               </a:tr>
-              <a:tr h="372291">
+              <a:tr h="310896">
                 <a:tc>
                   <a:txBody>
                     <a:bodyPr/>
@@ -25563,7 +25563,7 @@
                   </a:tcPr>
                 </a:tc>
               </a:tr>
-              <a:tr h="372291">
+              <a:tr h="310896">
                 <a:tc>
                   <a:txBody>
                     <a:bodyPr/>
@@ -25634,7 +25634,7 @@
                   </a:tcPr>
                 </a:tc>
               </a:tr>
-              <a:tr h="372291">
+              <a:tr h="310896">
                 <a:tc>
                   <a:txBody>
                     <a:bodyPr/>
@@ -25705,7 +25705,7 @@
                   </a:tcPr>
                 </a:tc>
               </a:tr>
-              <a:tr h="372291">
+              <a:tr h="310896">
                 <a:tc>
                   <a:txBody>
                     <a:bodyPr/>
@@ -25776,7 +25776,7 @@
                   </a:tcPr>
                 </a:tc>
               </a:tr>
-              <a:tr h="372291">
+              <a:tr h="310896">
                 <a:tc>
                   <a:txBody>
                     <a:bodyPr/>
@@ -25847,7 +25847,7 @@
                   </a:tcPr>
                 </a:tc>
               </a:tr>
-              <a:tr h="372291">
+              <a:tr h="310896">
                 <a:tc>
                   <a:txBody>
                     <a:bodyPr/>
@@ -25918,7 +25918,7 @@
                   </a:tcPr>
                 </a:tc>
               </a:tr>
-              <a:tr h="372291">
+              <a:tr h="310896">
                 <a:tc>
                   <a:txBody>
                     <a:bodyPr/>
@@ -25989,7 +25989,7 @@
                   </a:tcPr>
                 </a:tc>
               </a:tr>
-              <a:tr h="372291">
+              <a:tr h="310896">
                 <a:tc>
                   <a:txBody>
                     <a:bodyPr/>
@@ -26060,7 +26060,7 @@
                   </a:tcPr>
                 </a:tc>
               </a:tr>
-              <a:tr h="372291">
+              <a:tr h="310896">
                 <a:tc>
                   <a:txBody>
                     <a:bodyPr/>
@@ -26131,7 +26131,7 @@
                   </a:tcPr>
                 </a:tc>
               </a:tr>
-              <a:tr h="372291">
+              <a:tr h="310896">
                 <a:tc>
                   <a:txBody>
                     <a:bodyPr/>
@@ -26202,7 +26202,7 @@
                   </a:tcPr>
                 </a:tc>
               </a:tr>
-              <a:tr h="372297">
+              <a:tr h="310896">
                 <a:tc>
                   <a:txBody>
                     <a:bodyPr/>
@@ -26285,7 +26285,7 @@
         </p:nvSpPr>
         <p:spPr>
           <a:xfrm>
-            <a:off x="502920" y="6035040"/>
+            <a:off x="502920" y="5751576"/>
             <a:ext cx="11155680" cy="548640"/>
           </a:xfrm>
           <a:prstGeom prst="rect">
@@ -26375,7 +26375,7 @@
         </p:nvGraphicFramePr>
         <p:xfrm>
           <a:off x="502920" y="1143000"/>
-          <a:ext cx="11155680" cy="5212080"/>
+          <a:ext cx="11155680" cy="4352544"/>
         </p:xfrm>
         <a:graphic>
           <a:graphicData uri="http://schemas.openxmlformats.org/drawingml/2006/table">
@@ -26389,7 +26389,7 @@
                 <a:gridCol w="2651760"/>
                 <a:gridCol w="3017520"/>
               </a:tblGrid>
-              <a:tr h="372291">
+              <a:tr h="310896">
                 <a:tc>
                   <a:txBody>
                     <a:bodyPr/>
@@ -26483,7 +26483,7 @@
                   </a:tcPr>
                 </a:tc>
               </a:tr>
-              <a:tr h="372291">
+              <a:tr h="310896">
                 <a:tc>
                   <a:txBody>
                     <a:bodyPr/>
@@ -26577,7 +26577,7 @@
                   </a:tcPr>
                 </a:tc>
               </a:tr>
-              <a:tr h="372291">
+              <a:tr h="310896">
                 <a:tc>
                   <a:txBody>
                     <a:bodyPr/>
@@ -26671,7 +26671,7 @@
                   </a:tcPr>
                 </a:tc>
               </a:tr>
-              <a:tr h="372291">
+              <a:tr h="310896">
                 <a:tc>
                   <a:txBody>
                     <a:bodyPr/>
@@ -26765,7 +26765,7 @@
                   </a:tcPr>
                 </a:tc>
               </a:tr>
-              <a:tr h="372291">
+              <a:tr h="310896">
                 <a:tc>
                   <a:txBody>
                     <a:bodyPr/>
@@ -26859,7 +26859,7 @@
                   </a:tcPr>
                 </a:tc>
               </a:tr>
-              <a:tr h="372291">
+              <a:tr h="310896">
                 <a:tc>
                   <a:txBody>
                     <a:bodyPr/>
@@ -26953,7 +26953,7 @@
                   </a:tcPr>
                 </a:tc>
               </a:tr>
-              <a:tr h="372291">
+              <a:tr h="310896">
                 <a:tc>
                   <a:txBody>
                     <a:bodyPr/>
@@ -27047,7 +27047,7 @@
                   </a:tcPr>
                 </a:tc>
               </a:tr>
-              <a:tr h="372291">
+              <a:tr h="310896">
                 <a:tc>
                   <a:txBody>
                     <a:bodyPr/>
@@ -27141,7 +27141,7 @@
                   </a:tcPr>
                 </a:tc>
               </a:tr>
-              <a:tr h="372291">
+              <a:tr h="310896">
                 <a:tc>
                   <a:txBody>
                     <a:bodyPr/>
@@ -27235,7 +27235,7 @@
                   </a:tcPr>
                 </a:tc>
               </a:tr>
-              <a:tr h="372291">
+              <a:tr h="310896">
                 <a:tc>
                   <a:txBody>
                     <a:bodyPr/>
@@ -27329,7 +27329,7 @@
                   </a:tcPr>
                 </a:tc>
               </a:tr>
-              <a:tr h="372291">
+              <a:tr h="310896">
                 <a:tc>
                   <a:txBody>
                     <a:bodyPr/>
@@ -27423,7 +27423,7 @@
                   </a:tcPr>
                 </a:tc>
               </a:tr>
-              <a:tr h="372291">
+              <a:tr h="310896">
                 <a:tc>
                   <a:txBody>
                     <a:bodyPr/>
@@ -27517,7 +27517,7 @@
                   </a:tcPr>
                 </a:tc>
               </a:tr>
-              <a:tr h="372291">
+              <a:tr h="310896">
                 <a:tc>
                   <a:txBody>
                     <a:bodyPr/>
@@ -27611,7 +27611,7 @@
                   </a:tcPr>
                 </a:tc>
               </a:tr>
-              <a:tr h="372297">
+              <a:tr h="310896">
                 <a:tc>
                   <a:txBody>
                     <a:bodyPr/>
@@ -27717,7 +27717,7 @@
         </p:nvSpPr>
         <p:spPr>
           <a:xfrm>
-            <a:off x="502920" y="6035040"/>
+            <a:off x="502920" y="5751576"/>
             <a:ext cx="11155680" cy="548640"/>
           </a:xfrm>
           <a:prstGeom prst="rect">
@@ -27849,7 +27849,7 @@
         <p:spPr>
           <a:xfrm>
             <a:off x="594360" y="1371600"/>
-            <a:ext cx="10972800" cy="4846320"/>
+            <a:ext cx="10972800" cy="4709160"/>
           </a:xfrm>
           <a:prstGeom prst="rect">
             <a:avLst/>
@@ -27864,11 +27864,11 @@
           <a:p>
             <a:pPr algn="l">
               <a:spcAft>
-                <a:spcPts val="700"/>
-              </a:spcAft>
-            </a:pPr>
-            <a:r>
-              <a:rPr sz="2000" b="0">
+                <a:spcPts val="900"/>
+              </a:spcAft>
+            </a:pPr>
+            <a:r>
+              <a:rPr sz="1900" b="0">
                 <a:solidFill>
                   <a:srgbClr val="1F3355"/>
                 </a:solidFill>
@@ -27880,11 +27880,11 @@
           <a:p>
             <a:pPr algn="l">
               <a:spcAft>
-                <a:spcPts val="700"/>
-              </a:spcAft>
-            </a:pPr>
-            <a:r>
-              <a:rPr sz="2000" b="1">
+                <a:spcPts val="900"/>
+              </a:spcAft>
+            </a:pPr>
+            <a:r>
+              <a:rPr sz="1900" b="1">
                 <a:solidFill>
                   <a:srgbClr val="1F3355"/>
                 </a:solidFill>
@@ -27896,11 +27896,11 @@
           <a:p>
             <a:pPr lvl="1" algn="l">
               <a:spcAft>
-                <a:spcPts val="400"/>
-              </a:spcAft>
-            </a:pPr>
-            <a:r>
-              <a:rPr sz="1700" b="0">
+                <a:spcPts val="500"/>
+              </a:spcAft>
+            </a:pPr>
+            <a:r>
+              <a:rPr sz="1600" b="0">
                 <a:solidFill>
                   <a:srgbClr val="555555"/>
                 </a:solidFill>
@@ -27912,11 +27912,11 @@
           <a:p>
             <a:pPr algn="l">
               <a:spcAft>
-                <a:spcPts val="700"/>
-              </a:spcAft>
-            </a:pPr>
-            <a:r>
-              <a:rPr sz="2000" b="1">
+                <a:spcPts val="900"/>
+              </a:spcAft>
+            </a:pPr>
+            <a:r>
+              <a:rPr sz="1900" b="1">
                 <a:solidFill>
                   <a:srgbClr val="1F3355"/>
                 </a:solidFill>
@@ -27928,11 +27928,11 @@
           <a:p>
             <a:pPr lvl="1" algn="l">
               <a:spcAft>
-                <a:spcPts val="400"/>
-              </a:spcAft>
-            </a:pPr>
-            <a:r>
-              <a:rPr sz="1700" b="0">
+                <a:spcPts val="500"/>
+              </a:spcAft>
+            </a:pPr>
+            <a:r>
+              <a:rPr sz="1600" b="0">
                 <a:solidFill>
                   <a:srgbClr val="555555"/>
                 </a:solidFill>
@@ -27944,11 +27944,11 @@
           <a:p>
             <a:pPr lvl="1" algn="l">
               <a:spcAft>
-                <a:spcPts val="400"/>
-              </a:spcAft>
-            </a:pPr>
-            <a:r>
-              <a:rPr sz="1700" b="0">
+                <a:spcPts val="500"/>
+              </a:spcAft>
+            </a:pPr>
+            <a:r>
+              <a:rPr sz="1600" b="0">
                 <a:solidFill>
                   <a:srgbClr val="555555"/>
                 </a:solidFill>
@@ -27960,11 +27960,11 @@
           <a:p>
             <a:pPr algn="l">
               <a:spcAft>
-                <a:spcPts val="700"/>
-              </a:spcAft>
-            </a:pPr>
-            <a:r>
-              <a:rPr sz="2000" b="1">
+                <a:spcPts val="900"/>
+              </a:spcAft>
+            </a:pPr>
+            <a:r>
+              <a:rPr sz="1900" b="1">
                 <a:solidFill>
                   <a:srgbClr val="C0392B"/>
                 </a:solidFill>
@@ -27976,11 +27976,11 @@
           <a:p>
             <a:pPr algn="l">
               <a:spcAft>
-                <a:spcPts val="700"/>
-              </a:spcAft>
-            </a:pPr>
-            <a:r>
-              <a:rPr sz="2000" b="1">
+                <a:spcPts val="900"/>
+              </a:spcAft>
+            </a:pPr>
+            <a:r>
+              <a:rPr sz="1900" b="1">
                 <a:solidFill>
                   <a:srgbClr val="1F3355"/>
                 </a:solidFill>
@@ -27992,11 +27992,11 @@
           <a:p>
             <a:pPr lvl="1" algn="l">
               <a:spcAft>
-                <a:spcPts val="400"/>
-              </a:spcAft>
-            </a:pPr>
-            <a:r>
-              <a:rPr sz="1700" b="0">
+                <a:spcPts val="500"/>
+              </a:spcAft>
+            </a:pPr>
+            <a:r>
+              <a:rPr sz="1600" b="0">
                 <a:solidFill>
                   <a:srgbClr val="555555"/>
                 </a:solidFill>
@@ -28008,11 +28008,11 @@
           <a:p>
             <a:pPr lvl="1" algn="l">
               <a:spcAft>
-                <a:spcPts val="400"/>
-              </a:spcAft>
-            </a:pPr>
-            <a:r>
-              <a:rPr sz="1700" b="0">
+                <a:spcPts val="500"/>
+              </a:spcAft>
+            </a:pPr>
+            <a:r>
+              <a:rPr sz="1600" b="0">
                 <a:solidFill>
                   <a:srgbClr val="555555"/>
                 </a:solidFill>
@@ -28024,11 +28024,11 @@
           <a:p>
             <a:pPr algn="l">
               <a:spcAft>
-                <a:spcPts val="700"/>
-              </a:spcAft>
-            </a:pPr>
-            <a:r>
-              <a:rPr sz="2000" b="0">
+                <a:spcPts val="900"/>
+              </a:spcAft>
+            </a:pPr>
+            <a:r>
+              <a:rPr sz="1900" b="0">
                 <a:solidFill>
                   <a:srgbClr val="1F3355"/>
                 </a:solidFill>
@@ -28047,8 +28047,8 @@
         </p:nvSpPr>
         <p:spPr>
           <a:xfrm>
-            <a:off x="594360" y="6263640"/>
-            <a:ext cx="10972800" cy="457200"/>
+            <a:off x="594360" y="6217920"/>
+            <a:ext cx="10972800" cy="502920"/>
           </a:xfrm>
           <a:prstGeom prst="rect">
             <a:avLst/>
@@ -28179,7 +28179,7 @@
         <p:spPr>
           <a:xfrm>
             <a:off x="594360" y="1371600"/>
-            <a:ext cx="10972800" cy="4846320"/>
+            <a:ext cx="10972800" cy="4983480"/>
           </a:xfrm>
           <a:prstGeom prst="rect">
             <a:avLst/>
@@ -28194,7 +28194,7 @@
           <a:p>
             <a:pPr algn="l">
               <a:spcAft>
-                <a:spcPts val="700"/>
+                <a:spcPts val="1000"/>
               </a:spcAft>
             </a:pPr>
             <a:r>
@@ -28210,7 +28210,7 @@
           <a:p>
             <a:pPr lvl="1" algn="l">
               <a:spcAft>
-                <a:spcPts val="400"/>
+                <a:spcPts val="600"/>
               </a:spcAft>
             </a:pPr>
             <a:r>
@@ -28226,7 +28226,7 @@
           <a:p>
             <a:pPr lvl="1" algn="l">
               <a:spcAft>
-                <a:spcPts val="400"/>
+                <a:spcPts val="600"/>
               </a:spcAft>
             </a:pPr>
             <a:r>
@@ -28242,7 +28242,7 @@
           <a:p>
             <a:pPr algn="l">
               <a:spcAft>
-                <a:spcPts val="700"/>
+                <a:spcPts val="1000"/>
               </a:spcAft>
             </a:pPr>
             <a:r>
@@ -28258,7 +28258,7 @@
           <a:p>
             <a:pPr lvl="1" algn="l">
               <a:spcAft>
-                <a:spcPts val="400"/>
+                <a:spcPts val="600"/>
               </a:spcAft>
             </a:pPr>
             <a:r>
@@ -28274,7 +28274,7 @@
           <a:p>
             <a:pPr algn="l">
               <a:spcAft>
-                <a:spcPts val="700"/>
+                <a:spcPts val="1000"/>
               </a:spcAft>
             </a:pPr>
             <a:r>
@@ -28290,7 +28290,7 @@
           <a:p>
             <a:pPr algn="l">
               <a:spcAft>
-                <a:spcPts val="700"/>
+                <a:spcPts val="1000"/>
               </a:spcAft>
             </a:pPr>
             <a:r>
@@ -28306,7 +28306,7 @@
           <a:p>
             <a:pPr algn="l">
               <a:spcAft>
-                <a:spcPts val="700"/>
+                <a:spcPts val="1000"/>
               </a:spcAft>
             </a:pPr>
             <a:r>
@@ -28322,7 +28322,7 @@
           <a:p>
             <a:pPr algn="l">
               <a:spcAft>
-                <a:spcPts val="700"/>
+                <a:spcPts val="1000"/>
               </a:spcAft>
             </a:pPr>
             <a:r>
@@ -28338,7 +28338,7 @@
           <a:p>
             <a:pPr lvl="1" algn="l">
               <a:spcAft>
-                <a:spcPts val="400"/>
+                <a:spcPts val="600"/>
               </a:spcAft>
             </a:pPr>
             <a:r>
@@ -28458,7 +28458,7 @@
         <p:spPr>
           <a:xfrm>
             <a:off x="594360" y="1371600"/>
-            <a:ext cx="10972800" cy="4846320"/>
+            <a:ext cx="10972800" cy="4983480"/>
           </a:xfrm>
           <a:prstGeom prst="rect">
             <a:avLst/>
@@ -28473,11 +28473,11 @@
           <a:p>
             <a:pPr algn="l">
               <a:spcAft>
-                <a:spcPts val="700"/>
-              </a:spcAft>
-            </a:pPr>
-            <a:r>
-              <a:rPr sz="2000" b="1">
+                <a:spcPts val="900"/>
+              </a:spcAft>
+            </a:pPr>
+            <a:r>
+              <a:rPr sz="1900" b="1">
                 <a:solidFill>
                   <a:srgbClr val="1F3355"/>
                 </a:solidFill>
@@ -28489,11 +28489,11 @@
           <a:p>
             <a:pPr lvl="1" algn="l">
               <a:spcAft>
-                <a:spcPts val="400"/>
-              </a:spcAft>
-            </a:pPr>
-            <a:r>
-              <a:rPr sz="1700" b="0">
+                <a:spcPts val="500"/>
+              </a:spcAft>
+            </a:pPr>
+            <a:r>
+              <a:rPr sz="1600" b="0">
                 <a:solidFill>
                   <a:srgbClr val="555555"/>
                 </a:solidFill>
@@ -28505,11 +28505,11 @@
           <a:p>
             <a:pPr lvl="1" algn="l">
               <a:spcAft>
-                <a:spcPts val="400"/>
-              </a:spcAft>
-            </a:pPr>
-            <a:r>
-              <a:rPr sz="1700" b="0">
+                <a:spcPts val="500"/>
+              </a:spcAft>
+            </a:pPr>
+            <a:r>
+              <a:rPr sz="1600" b="0">
                 <a:solidFill>
                   <a:srgbClr val="555555"/>
                 </a:solidFill>
@@ -28521,11 +28521,11 @@
           <a:p>
             <a:pPr lvl="1" algn="l">
               <a:spcAft>
-                <a:spcPts val="400"/>
-              </a:spcAft>
-            </a:pPr>
-            <a:r>
-              <a:rPr sz="1700" b="1">
+                <a:spcPts val="500"/>
+              </a:spcAft>
+            </a:pPr>
+            <a:r>
+              <a:rPr sz="1600" b="1">
                 <a:solidFill>
                   <a:srgbClr val="C0392B"/>
                 </a:solidFill>
@@ -28537,11 +28537,11 @@
           <a:p>
             <a:pPr lvl="1" algn="l">
               <a:spcAft>
-                <a:spcPts val="400"/>
-              </a:spcAft>
-            </a:pPr>
-            <a:r>
-              <a:rPr sz="1700" b="1">
+                <a:spcPts val="500"/>
+              </a:spcAft>
+            </a:pPr>
+            <a:r>
+              <a:rPr sz="1600" b="1">
                 <a:solidFill>
                   <a:srgbClr val="C0392B"/>
                 </a:solidFill>
@@ -28553,11 +28553,11 @@
           <a:p>
             <a:pPr algn="l">
               <a:spcAft>
-                <a:spcPts val="700"/>
-              </a:spcAft>
-            </a:pPr>
-            <a:r>
-              <a:rPr sz="2000" b="1">
+                <a:spcPts val="900"/>
+              </a:spcAft>
+            </a:pPr>
+            <a:r>
+              <a:rPr sz="1900" b="1">
                 <a:solidFill>
                   <a:srgbClr val="1F3355"/>
                 </a:solidFill>
@@ -28569,11 +28569,11 @@
           <a:p>
             <a:pPr lvl="1" algn="l">
               <a:spcAft>
-                <a:spcPts val="400"/>
-              </a:spcAft>
-            </a:pPr>
-            <a:r>
-              <a:rPr sz="1700" b="0">
+                <a:spcPts val="500"/>
+              </a:spcAft>
+            </a:pPr>
+            <a:r>
+              <a:rPr sz="1600" b="0">
                 <a:solidFill>
                   <a:srgbClr val="555555"/>
                 </a:solidFill>
@@ -28585,11 +28585,11 @@
           <a:p>
             <a:pPr lvl="1" algn="l">
               <a:spcAft>
-                <a:spcPts val="400"/>
-              </a:spcAft>
-            </a:pPr>
-            <a:r>
-              <a:rPr sz="1700" b="0">
+                <a:spcPts val="500"/>
+              </a:spcAft>
+            </a:pPr>
+            <a:r>
+              <a:rPr sz="1600" b="0">
                 <a:solidFill>
                   <a:srgbClr val="555555"/>
                 </a:solidFill>
@@ -28601,11 +28601,11 @@
           <a:p>
             <a:pPr lvl="1" algn="l">
               <a:spcAft>
-                <a:spcPts val="400"/>
-              </a:spcAft>
-            </a:pPr>
-            <a:r>
-              <a:rPr sz="1700" b="0">
+                <a:spcPts val="500"/>
+              </a:spcAft>
+            </a:pPr>
+            <a:r>
+              <a:rPr sz="1600" b="0">
                 <a:solidFill>
                   <a:srgbClr val="555555"/>
                 </a:solidFill>
@@ -28617,11 +28617,11 @@
           <a:p>
             <a:pPr lvl="1" algn="l">
               <a:spcAft>
-                <a:spcPts val="400"/>
-              </a:spcAft>
-            </a:pPr>
-            <a:r>
-              <a:rPr sz="1700" b="0">
+                <a:spcPts val="500"/>
+              </a:spcAft>
+            </a:pPr>
+            <a:r>
+              <a:rPr sz="1600" b="0">
                 <a:solidFill>
                   <a:srgbClr val="555555"/>
                 </a:solidFill>
@@ -28633,11 +28633,11 @@
           <a:p>
             <a:pPr lvl="1" algn="l">
               <a:spcAft>
-                <a:spcPts val="400"/>
-              </a:spcAft>
-            </a:pPr>
-            <a:r>
-              <a:rPr sz="1700" b="0">
+                <a:spcPts val="500"/>
+              </a:spcAft>
+            </a:pPr>
+            <a:r>
+              <a:rPr sz="1600" b="0">
                 <a:solidFill>
                   <a:srgbClr val="555555"/>
                 </a:solidFill>
@@ -28649,11 +28649,11 @@
           <a:p>
             <a:pPr lvl="1" algn="l">
               <a:spcAft>
-                <a:spcPts val="400"/>
-              </a:spcAft>
-            </a:pPr>
-            <a:r>
-              <a:rPr sz="1700" b="0">
+                <a:spcPts val="500"/>
+              </a:spcAft>
+            </a:pPr>
+            <a:r>
+              <a:rPr sz="1600" b="0">
                 <a:solidFill>
                   <a:srgbClr val="555555"/>
                 </a:solidFill>
@@ -28665,11 +28665,11 @@
           <a:p>
             <a:pPr algn="l">
               <a:spcAft>
-                <a:spcPts val="700"/>
-              </a:spcAft>
-            </a:pPr>
-            <a:r>
-              <a:rPr sz="2000" b="1">
+                <a:spcPts val="900"/>
+              </a:spcAft>
+            </a:pPr>
+            <a:r>
+              <a:rPr sz="1900" b="1">
                 <a:solidFill>
                   <a:srgbClr val="1F3355"/>
                 </a:solidFill>
@@ -28681,11 +28681,11 @@
           <a:p>
             <a:pPr lvl="1" algn="l">
               <a:spcAft>
-                <a:spcPts val="400"/>
-              </a:spcAft>
-            </a:pPr>
-            <a:r>
-              <a:rPr sz="1700" b="0">
+                <a:spcPts val="500"/>
+              </a:spcAft>
+            </a:pPr>
+            <a:r>
+              <a:rPr sz="1600" b="0">
                 <a:solidFill>
                   <a:srgbClr val="0B6040"/>
                 </a:solidFill>
@@ -28801,7 +28801,7 @@
         <p:spPr>
           <a:xfrm>
             <a:off x="594360" y="1371600"/>
-            <a:ext cx="10972800" cy="4846320"/>
+            <a:ext cx="10972800" cy="4983480"/>
           </a:xfrm>
           <a:prstGeom prst="rect">
             <a:avLst/>
@@ -28816,7 +28816,7 @@
           <a:p>
             <a:pPr algn="l">
               <a:spcAft>
-                <a:spcPts val="700"/>
+                <a:spcPts val="1000"/>
               </a:spcAft>
             </a:pPr>
             <a:r>
@@ -28832,7 +28832,7 @@
           <a:p>
             <a:pPr lvl="1" algn="l">
               <a:spcAft>
-                <a:spcPts val="400"/>
+                <a:spcPts val="600"/>
               </a:spcAft>
             </a:pPr>
             <a:r>
@@ -28848,7 +28848,7 @@
           <a:p>
             <a:pPr algn="l">
               <a:spcAft>
-                <a:spcPts val="700"/>
+                <a:spcPts val="1000"/>
               </a:spcAft>
             </a:pPr>
             <a:r>
@@ -28864,7 +28864,7 @@
           <a:p>
             <a:pPr lvl="1" algn="l">
               <a:spcAft>
-                <a:spcPts val="400"/>
+                <a:spcPts val="600"/>
               </a:spcAft>
             </a:pPr>
             <a:r>
@@ -28880,7 +28880,7 @@
           <a:p>
             <a:pPr algn="l">
               <a:spcAft>
-                <a:spcPts val="700"/>
+                <a:spcPts val="1000"/>
               </a:spcAft>
             </a:pPr>
             <a:r>
@@ -28896,7 +28896,7 @@
           <a:p>
             <a:pPr lvl="1" algn="l">
               <a:spcAft>
-                <a:spcPts val="400"/>
+                <a:spcPts val="600"/>
               </a:spcAft>
             </a:pPr>
             <a:r>
@@ -28912,7 +28912,7 @@
           <a:p>
             <a:pPr algn="l">
               <a:spcAft>
-                <a:spcPts val="700"/>
+                <a:spcPts val="1000"/>
               </a:spcAft>
             </a:pPr>
             <a:r>
@@ -28928,7 +28928,7 @@
           <a:p>
             <a:pPr algn="l">
               <a:spcAft>
-                <a:spcPts val="700"/>
+                <a:spcPts val="1000"/>
               </a:spcAft>
             </a:pPr>
             <a:r>
@@ -29048,7 +29048,7 @@
         <p:spPr>
           <a:xfrm>
             <a:off x="594360" y="1371600"/>
-            <a:ext cx="10972800" cy="4846320"/>
+            <a:ext cx="10972800" cy="4709160"/>
           </a:xfrm>
           <a:prstGeom prst="rect">
             <a:avLst/>
@@ -29063,7 +29063,7 @@
           <a:p>
             <a:pPr algn="l">
               <a:spcAft>
-                <a:spcPts val="700"/>
+                <a:spcPts val="1000"/>
               </a:spcAft>
             </a:pPr>
             <a:r>
@@ -29079,7 +29079,7 @@
           <a:p>
             <a:pPr lvl="1" algn="l">
               <a:spcAft>
-                <a:spcPts val="400"/>
+                <a:spcPts val="600"/>
               </a:spcAft>
             </a:pPr>
             <a:r>
@@ -29095,7 +29095,7 @@
           <a:p>
             <a:pPr lvl="1" algn="l">
               <a:spcAft>
-                <a:spcPts val="400"/>
+                <a:spcPts val="600"/>
               </a:spcAft>
             </a:pPr>
             <a:r>
@@ -29111,7 +29111,7 @@
           <a:p>
             <a:pPr algn="l">
               <a:spcAft>
-                <a:spcPts val="700"/>
+                <a:spcPts val="1000"/>
               </a:spcAft>
             </a:pPr>
             <a:r>
@@ -29127,7 +29127,7 @@
           <a:p>
             <a:pPr lvl="1" algn="l">
               <a:spcAft>
-                <a:spcPts val="400"/>
+                <a:spcPts val="600"/>
               </a:spcAft>
             </a:pPr>
             <a:r>
@@ -29143,7 +29143,7 @@
           <a:p>
             <a:pPr lvl="1" algn="l">
               <a:spcAft>
-                <a:spcPts val="400"/>
+                <a:spcPts val="600"/>
               </a:spcAft>
             </a:pPr>
             <a:r>
@@ -29159,7 +29159,7 @@
           <a:p>
             <a:pPr algn="l">
               <a:spcAft>
-                <a:spcPts val="700"/>
+                <a:spcPts val="1000"/>
               </a:spcAft>
             </a:pPr>
             <a:r>
@@ -29175,7 +29175,7 @@
           <a:p>
             <a:pPr lvl="1" algn="l">
               <a:spcAft>
-                <a:spcPts val="400"/>
+                <a:spcPts val="600"/>
               </a:spcAft>
             </a:pPr>
             <a:r>
@@ -29191,7 +29191,7 @@
           <a:p>
             <a:pPr lvl="1" algn="l">
               <a:spcAft>
-                <a:spcPts val="400"/>
+                <a:spcPts val="600"/>
               </a:spcAft>
             </a:pPr>
             <a:r>
@@ -29207,7 +29207,7 @@
           <a:p>
             <a:pPr lvl="1" algn="l">
               <a:spcAft>
-                <a:spcPts val="400"/>
+                <a:spcPts val="600"/>
               </a:spcAft>
             </a:pPr>
             <a:r>
@@ -29223,7 +29223,7 @@
           <a:p>
             <a:pPr algn="l">
               <a:spcAft>
-                <a:spcPts val="700"/>
+                <a:spcPts val="1000"/>
               </a:spcAft>
             </a:pPr>
             <a:r>
@@ -29246,8 +29246,8 @@
         </p:nvSpPr>
         <p:spPr>
           <a:xfrm>
-            <a:off x="594360" y="6263640"/>
-            <a:ext cx="10972800" cy="457200"/>
+            <a:off x="594360" y="6217920"/>
+            <a:ext cx="10972800" cy="502920"/>
           </a:xfrm>
           <a:prstGeom prst="rect">
             <a:avLst/>

--- a/docs/ipoe-lab/slides/toranomaki.pptx
+++ b/docs/ipoe-lab/slides/toranomaki.pptx
@@ -8,72 +8,72 @@
     <p:sldId id="256" r:id="rId7"/>
     <p:sldId id="257" r:id="rId8"/>
     <p:sldId id="258" r:id="rId9"/>
-    <p:sldId id="259" r:id="rId10"/>
-    <p:sldId id="260" r:id="rId11"/>
-    <p:sldId id="261" r:id="rId12"/>
-    <p:sldId id="262" r:id="rId13"/>
-    <p:sldId id="263" r:id="rId14"/>
-    <p:sldId id="264" r:id="rId15"/>
-    <p:sldId id="265" r:id="rId16"/>
-    <p:sldId id="266" r:id="rId17"/>
-    <p:sldId id="267" r:id="rId18"/>
-    <p:sldId id="268" r:id="rId19"/>
-    <p:sldId id="269" r:id="rId20"/>
-    <p:sldId id="270" r:id="rId21"/>
-    <p:sldId id="271" r:id="rId22"/>
-    <p:sldId id="272" r:id="rId23"/>
-    <p:sldId id="273" r:id="rId24"/>
-    <p:sldId id="274" r:id="rId25"/>
-    <p:sldId id="275" r:id="rId26"/>
-    <p:sldId id="276" r:id="rId27"/>
-    <p:sldId id="277" r:id="rId28"/>
-    <p:sldId id="278" r:id="rId29"/>
-    <p:sldId id="279" r:id="rId30"/>
-    <p:sldId id="280" r:id="rId31"/>
-    <p:sldId id="281" r:id="rId32"/>
-    <p:sldId id="282" r:id="rId33"/>
-    <p:sldId id="283" r:id="rId34"/>
-    <p:sldId id="284" r:id="rId35"/>
-    <p:sldId id="285" r:id="rId36"/>
-    <p:sldId id="286" r:id="rId37"/>
-    <p:sldId id="287" r:id="rId38"/>
-    <p:sldId id="288" r:id="rId39"/>
-    <p:sldId id="289" r:id="rId40"/>
-    <p:sldId id="290" r:id="rId41"/>
-    <p:sldId id="291" r:id="rId42"/>
-    <p:sldId id="292" r:id="rId43"/>
-    <p:sldId id="293" r:id="rId44"/>
-    <p:sldId id="294" r:id="rId45"/>
-    <p:sldId id="295" r:id="rId46"/>
-    <p:sldId id="296" r:id="rId47"/>
-    <p:sldId id="297" r:id="rId48"/>
-    <p:sldId id="298" r:id="rId49"/>
-    <p:sldId id="299" r:id="rId50"/>
-    <p:sldId id="300" r:id="rId51"/>
-    <p:sldId id="301" r:id="rId52"/>
-    <p:sldId id="302" r:id="rId53"/>
-    <p:sldId id="303" r:id="rId54"/>
-    <p:sldId id="304" r:id="rId55"/>
-    <p:sldId id="305" r:id="rId56"/>
-    <p:sldId id="306" r:id="rId57"/>
-    <p:sldId id="307" r:id="rId58"/>
-    <p:sldId id="308" r:id="rId59"/>
-    <p:sldId id="309" r:id="rId60"/>
-    <p:sldId id="310" r:id="rId61"/>
-    <p:sldId id="311" r:id="rId62"/>
-    <p:sldId id="312" r:id="rId63"/>
-    <p:sldId id="313" r:id="rId64"/>
-    <p:sldId id="314" r:id="rId65"/>
-    <p:sldId id="315" r:id="rId66"/>
-    <p:sldId id="316" r:id="rId67"/>
-    <p:sldId id="317" r:id="rId68"/>
-    <p:sldId id="318" r:id="rId69"/>
-    <p:sldId id="319" r:id="rId70"/>
-    <p:sldId id="320" r:id="rId71"/>
-    <p:sldId id="321" r:id="rId72"/>
-    <p:sldId id="322" r:id="rId73"/>
-    <p:sldId id="323" r:id="rId74"/>
-    <p:sldId id="324" r:id="rId75"/>
+    <p:sldId id="259" r:id="rId11"/>
+    <p:sldId id="260" r:id="rId12"/>
+    <p:sldId id="261" r:id="rId13"/>
+    <p:sldId id="262" r:id="rId14"/>
+    <p:sldId id="263" r:id="rId15"/>
+    <p:sldId id="264" r:id="rId16"/>
+    <p:sldId id="265" r:id="rId17"/>
+    <p:sldId id="266" r:id="rId18"/>
+    <p:sldId id="267" r:id="rId19"/>
+    <p:sldId id="268" r:id="rId20"/>
+    <p:sldId id="269" r:id="rId21"/>
+    <p:sldId id="270" r:id="rId22"/>
+    <p:sldId id="271" r:id="rId23"/>
+    <p:sldId id="272" r:id="rId24"/>
+    <p:sldId id="273" r:id="rId25"/>
+    <p:sldId id="274" r:id="rId26"/>
+    <p:sldId id="275" r:id="rId27"/>
+    <p:sldId id="276" r:id="rId28"/>
+    <p:sldId id="277" r:id="rId29"/>
+    <p:sldId id="278" r:id="rId30"/>
+    <p:sldId id="279" r:id="rId31"/>
+    <p:sldId id="280" r:id="rId32"/>
+    <p:sldId id="281" r:id="rId33"/>
+    <p:sldId id="282" r:id="rId34"/>
+    <p:sldId id="283" r:id="rId35"/>
+    <p:sldId id="284" r:id="rId36"/>
+    <p:sldId id="285" r:id="rId37"/>
+    <p:sldId id="286" r:id="rId38"/>
+    <p:sldId id="287" r:id="rId39"/>
+    <p:sldId id="288" r:id="rId40"/>
+    <p:sldId id="289" r:id="rId41"/>
+    <p:sldId id="290" r:id="rId42"/>
+    <p:sldId id="291" r:id="rId43"/>
+    <p:sldId id="292" r:id="rId44"/>
+    <p:sldId id="293" r:id="rId45"/>
+    <p:sldId id="294" r:id="rId46"/>
+    <p:sldId id="295" r:id="rId47"/>
+    <p:sldId id="296" r:id="rId48"/>
+    <p:sldId id="297" r:id="rId49"/>
+    <p:sldId id="298" r:id="rId50"/>
+    <p:sldId id="299" r:id="rId51"/>
+    <p:sldId id="300" r:id="rId52"/>
+    <p:sldId id="301" r:id="rId53"/>
+    <p:sldId id="302" r:id="rId54"/>
+    <p:sldId id="303" r:id="rId55"/>
+    <p:sldId id="304" r:id="rId56"/>
+    <p:sldId id="305" r:id="rId57"/>
+    <p:sldId id="306" r:id="rId58"/>
+    <p:sldId id="307" r:id="rId59"/>
+    <p:sldId id="308" r:id="rId60"/>
+    <p:sldId id="309" r:id="rId61"/>
+    <p:sldId id="310" r:id="rId62"/>
+    <p:sldId id="311" r:id="rId63"/>
+    <p:sldId id="312" r:id="rId64"/>
+    <p:sldId id="313" r:id="rId65"/>
+    <p:sldId id="314" r:id="rId66"/>
+    <p:sldId id="315" r:id="rId67"/>
+    <p:sldId id="316" r:id="rId68"/>
+    <p:sldId id="317" r:id="rId69"/>
+    <p:sldId id="318" r:id="rId70"/>
+    <p:sldId id="319" r:id="rId71"/>
+    <p:sldId id="320" r:id="rId72"/>
+    <p:sldId id="321" r:id="rId73"/>
+    <p:sldId id="322" r:id="rId74"/>
+    <p:sldId id="323" r:id="rId75"/>
+    <p:sldId id="324" r:id="rId76"/>
   </p:sldIdLst>
   <p:sldSz cx="12191695" cy="6858000" type="screen4x3"/>
   <p:notesSz cx="6858000" cy="9144000"/>
@@ -173,6 +173,526 @@
     </a:lvl9pPr>
   </p:defaultTextStyle>
 </p:presentation>
+</file>
+
+<file path=ppt/notesMasters/notesMaster1.xml><?xml version="1.0" encoding="utf-8"?>
+<p:notesMaster xmlns:a="http://schemas.openxmlformats.org/drawingml/2006/main" xmlns:p="http://schemas.openxmlformats.org/presentationml/2006/main" xmlns:r="http://schemas.openxmlformats.org/officeDocument/2006/relationships">
+  <p:cSld>
+    <p:bg>
+      <p:bgRef idx="1001">
+        <a:schemeClr val="bg1"/>
+      </p:bgRef>
+    </p:bg>
+    <p:spTree>
+      <p:nvGrpSpPr>
+        <p:cNvPr id="1" name=""/>
+        <p:cNvGrpSpPr/>
+        <p:nvPr/>
+      </p:nvGrpSpPr>
+      <p:grpSpPr>
+        <a:xfrm>
+          <a:off x="0" y="0"/>
+          <a:ext cx="0" cy="0"/>
+          <a:chOff x="0" y="0"/>
+          <a:chExt cx="0" cy="0"/>
+        </a:xfrm>
+      </p:grpSpPr>
+      <p:sp>
+        <p:nvSpPr>
+          <p:cNvPr id="2" name="Header Placeholder 1"/>
+          <p:cNvSpPr>
+            <a:spLocks noGrp="1"/>
+          </p:cNvSpPr>
+          <p:nvPr>
+            <p:ph type="hdr" sz="quarter"/>
+          </p:nvPr>
+        </p:nvSpPr>
+        <p:spPr>
+          <a:xfrm>
+            <a:off x="0" y="0"/>
+            <a:ext cx="2971800" cy="457200"/>
+          </a:xfrm>
+          <a:prstGeom prst="rect">
+            <a:avLst/>
+          </a:prstGeom>
+        </p:spPr>
+        <p:txBody>
+          <a:bodyPr vert="horz" lIns="91440" tIns="45720" rIns="91440" bIns="45720" rtlCol="0"/>
+          <a:lstStyle>
+            <a:lvl1pPr algn="l">
+              <a:defRPr sz="1200"/>
+            </a:lvl1pPr>
+          </a:lstStyle>
+          <a:p>
+            <a:endParaRPr lang="en-US"/>
+          </a:p>
+        </p:txBody>
+      </p:sp>
+      <p:sp>
+        <p:nvSpPr>
+          <p:cNvPr id="3" name="Date Placeholder 2"/>
+          <p:cNvSpPr>
+            <a:spLocks noGrp="1"/>
+          </p:cNvSpPr>
+          <p:nvPr>
+            <p:ph type="dt" idx="1"/>
+          </p:nvPr>
+        </p:nvSpPr>
+        <p:spPr>
+          <a:xfrm>
+            <a:off x="3884613" y="0"/>
+            <a:ext cx="2971800" cy="457200"/>
+          </a:xfrm>
+          <a:prstGeom prst="rect">
+            <a:avLst/>
+          </a:prstGeom>
+        </p:spPr>
+        <p:txBody>
+          <a:bodyPr vert="horz" lIns="91440" tIns="45720" rIns="91440" bIns="45720" rtlCol="0"/>
+          <a:lstStyle>
+            <a:lvl1pPr algn="r">
+              <a:defRPr sz="1200"/>
+            </a:lvl1pPr>
+          </a:lstStyle>
+          <a:p>
+            <a:fld id="{0F89C1C7-3DCD-1040-A9CF-14679D8B5DDD}" type="datetimeFigureOut">
+              <a:rPr lang="en-US" smtClean="0"/>
+              <a:t>10/17/16</a:t>
+            </a:fld>
+            <a:endParaRPr lang="en-US"/>
+          </a:p>
+        </p:txBody>
+      </p:sp>
+      <p:sp>
+        <p:nvSpPr>
+          <p:cNvPr id="4" name="Slide Image Placeholder 3"/>
+          <p:cNvSpPr>
+            <a:spLocks noGrp="1" noRot="1" noChangeAspect="1"/>
+          </p:cNvSpPr>
+          <p:nvPr>
+            <p:ph type="sldImg" idx="2"/>
+          </p:nvPr>
+        </p:nvSpPr>
+        <p:spPr>
+          <a:xfrm>
+            <a:off x="1143000" y="685800"/>
+            <a:ext cx="4572000" cy="3429000"/>
+          </a:xfrm>
+          <a:prstGeom prst="rect">
+            <a:avLst/>
+          </a:prstGeom>
+          <a:noFill/>
+          <a:ln w="12700">
+            <a:solidFill>
+              <a:prstClr val="black"/>
+            </a:solidFill>
+          </a:ln>
+        </p:spPr>
+        <p:txBody>
+          <a:bodyPr vert="horz" lIns="91440" tIns="45720" rIns="91440" bIns="45720" rtlCol="0" anchor="ctr"/>
+          <a:lstStyle/>
+          <a:p>
+            <a:endParaRPr lang="en-US"/>
+          </a:p>
+        </p:txBody>
+      </p:sp>
+      <p:sp>
+        <p:nvSpPr>
+          <p:cNvPr id="5" name="Notes Placeholder 4"/>
+          <p:cNvSpPr>
+            <a:spLocks noGrp="1"/>
+          </p:cNvSpPr>
+          <p:nvPr>
+            <p:ph type="body" sz="quarter" idx="3"/>
+          </p:nvPr>
+        </p:nvSpPr>
+        <p:spPr>
+          <a:xfrm>
+            <a:off x="685800" y="4343400"/>
+            <a:ext cx="5486400" cy="4114800"/>
+          </a:xfrm>
+          <a:prstGeom prst="rect">
+            <a:avLst/>
+          </a:prstGeom>
+        </p:spPr>
+        <p:txBody>
+          <a:bodyPr vert="horz" lIns="91440" tIns="45720" rIns="91440" bIns="45720" rtlCol="0"/>
+          <a:lstStyle/>
+          <a:p>
+            <a:pPr lvl="0"/>
+            <a:r>
+              <a:rPr lang="en-US" smtClean="0"/>
+              <a:t>Click to edit Master text styles</a:t>
+            </a:r>
+          </a:p>
+          <a:p>
+            <a:pPr lvl="1"/>
+            <a:r>
+              <a:rPr lang="en-US" smtClean="0"/>
+              <a:t>Second level</a:t>
+            </a:r>
+          </a:p>
+          <a:p>
+            <a:pPr lvl="2"/>
+            <a:r>
+              <a:rPr lang="en-US" smtClean="0"/>
+              <a:t>Third level</a:t>
+            </a:r>
+          </a:p>
+          <a:p>
+            <a:pPr lvl="3"/>
+            <a:r>
+              <a:rPr lang="en-US" smtClean="0"/>
+              <a:t>Fourth level</a:t>
+            </a:r>
+          </a:p>
+          <a:p>
+            <a:pPr lvl="4"/>
+            <a:r>
+              <a:rPr lang="en-US" smtClean="0"/>
+              <a:t>Fifth level</a:t>
+            </a:r>
+            <a:endParaRPr lang="en-US"/>
+          </a:p>
+        </p:txBody>
+      </p:sp>
+      <p:sp>
+        <p:nvSpPr>
+          <p:cNvPr id="6" name="Footer Placeholder 5"/>
+          <p:cNvSpPr>
+            <a:spLocks noGrp="1"/>
+          </p:cNvSpPr>
+          <p:nvPr>
+            <p:ph type="ftr" sz="quarter" idx="4"/>
+          </p:nvPr>
+        </p:nvSpPr>
+        <p:spPr>
+          <a:xfrm>
+            <a:off x="0" y="8685213"/>
+            <a:ext cx="2971800" cy="457200"/>
+          </a:xfrm>
+          <a:prstGeom prst="rect">
+            <a:avLst/>
+          </a:prstGeom>
+        </p:spPr>
+        <p:txBody>
+          <a:bodyPr vert="horz" lIns="91440" tIns="45720" rIns="91440" bIns="45720" rtlCol="0" anchor="b"/>
+          <a:lstStyle>
+            <a:lvl1pPr algn="l">
+              <a:defRPr sz="1200"/>
+            </a:lvl1pPr>
+          </a:lstStyle>
+          <a:p>
+            <a:endParaRPr lang="en-US"/>
+          </a:p>
+        </p:txBody>
+      </p:sp>
+      <p:sp>
+        <p:nvSpPr>
+          <p:cNvPr id="7" name="Slide Number Placeholder 6"/>
+          <p:cNvSpPr>
+            <a:spLocks noGrp="1"/>
+          </p:cNvSpPr>
+          <p:nvPr>
+            <p:ph type="sldNum" sz="quarter" idx="5"/>
+          </p:nvPr>
+        </p:nvSpPr>
+        <p:spPr>
+          <a:xfrm>
+            <a:off x="3884613" y="8685213"/>
+            <a:ext cx="2971800" cy="457200"/>
+          </a:xfrm>
+          <a:prstGeom prst="rect">
+            <a:avLst/>
+          </a:prstGeom>
+        </p:spPr>
+        <p:txBody>
+          <a:bodyPr vert="horz" lIns="91440" tIns="45720" rIns="91440" bIns="45720" rtlCol="0" anchor="b"/>
+          <a:lstStyle>
+            <a:lvl1pPr algn="r">
+              <a:defRPr sz="1200"/>
+            </a:lvl1pPr>
+          </a:lstStyle>
+          <a:p>
+            <a:fld id="{BB5E49A5-4136-284D-997B-48E1D791AD67}" type="slidenum">
+              <a:rPr lang="en-US" smtClean="0"/>
+              <a:t>‹#›</a:t>
+            </a:fld>
+            <a:endParaRPr lang="en-US"/>
+          </a:p>
+        </p:txBody>
+      </p:sp>
+    </p:spTree>
+    <p:extLst>
+      <p:ext uri="{BB962C8B-B14F-4D97-AF65-F5344CB8AC3E}">
+        <p14:creationId xmlns:p14="http://schemas.microsoft.com/office/powerpoint/2010/main" val="2623252185"/>
+      </p:ext>
+    </p:extLst>
+  </p:cSld>
+  <p:clrMap bg1="lt1" tx1="dk1" bg2="lt2" tx2="dk2" accent1="accent1" accent2="accent2" accent3="accent3" accent4="accent4" accent5="accent5" accent6="accent6" hlink="hlink" folHlink="folHlink"/>
+  <p:notesStyle>
+    <a:lvl1pPr marL="0" algn="l" defTabSz="457200" rtl="0" eaLnBrk="1" latinLnBrk="0" hangingPunct="1">
+      <a:defRPr sz="1200" kern="1200">
+        <a:solidFill>
+          <a:schemeClr val="tx1"/>
+        </a:solidFill>
+        <a:latin typeface="+mn-lt"/>
+        <a:ea typeface="+mn-ea"/>
+        <a:cs typeface="+mn-cs"/>
+      </a:defRPr>
+    </a:lvl1pPr>
+    <a:lvl2pPr marL="457200" algn="l" defTabSz="457200" rtl="0" eaLnBrk="1" latinLnBrk="0" hangingPunct="1">
+      <a:defRPr sz="1200" kern="1200">
+        <a:solidFill>
+          <a:schemeClr val="tx1"/>
+        </a:solidFill>
+        <a:latin typeface="+mn-lt"/>
+        <a:ea typeface="+mn-ea"/>
+        <a:cs typeface="+mn-cs"/>
+      </a:defRPr>
+    </a:lvl2pPr>
+    <a:lvl3pPr marL="914400" algn="l" defTabSz="457200" rtl="0" eaLnBrk="1" latinLnBrk="0" hangingPunct="1">
+      <a:defRPr sz="1200" kern="1200">
+        <a:solidFill>
+          <a:schemeClr val="tx1"/>
+        </a:solidFill>
+        <a:latin typeface="+mn-lt"/>
+        <a:ea typeface="+mn-ea"/>
+        <a:cs typeface="+mn-cs"/>
+      </a:defRPr>
+    </a:lvl3pPr>
+    <a:lvl4pPr marL="1371600" algn="l" defTabSz="457200" rtl="0" eaLnBrk="1" latinLnBrk="0" hangingPunct="1">
+      <a:defRPr sz="1200" kern="1200">
+        <a:solidFill>
+          <a:schemeClr val="tx1"/>
+        </a:solidFill>
+        <a:latin typeface="+mn-lt"/>
+        <a:ea typeface="+mn-ea"/>
+        <a:cs typeface="+mn-cs"/>
+      </a:defRPr>
+    </a:lvl4pPr>
+    <a:lvl5pPr marL="1828800" algn="l" defTabSz="457200" rtl="0" eaLnBrk="1" latinLnBrk="0" hangingPunct="1">
+      <a:defRPr sz="1200" kern="1200">
+        <a:solidFill>
+          <a:schemeClr val="tx1"/>
+        </a:solidFill>
+        <a:latin typeface="+mn-lt"/>
+        <a:ea typeface="+mn-ea"/>
+        <a:cs typeface="+mn-cs"/>
+      </a:defRPr>
+    </a:lvl5pPr>
+    <a:lvl6pPr marL="2286000" algn="l" defTabSz="457200" rtl="0" eaLnBrk="1" latinLnBrk="0" hangingPunct="1">
+      <a:defRPr sz="1200" kern="1200">
+        <a:solidFill>
+          <a:schemeClr val="tx1"/>
+        </a:solidFill>
+        <a:latin typeface="+mn-lt"/>
+        <a:ea typeface="+mn-ea"/>
+        <a:cs typeface="+mn-cs"/>
+      </a:defRPr>
+    </a:lvl6pPr>
+    <a:lvl7pPr marL="2743200" algn="l" defTabSz="457200" rtl="0" eaLnBrk="1" latinLnBrk="0" hangingPunct="1">
+      <a:defRPr sz="1200" kern="1200">
+        <a:solidFill>
+          <a:schemeClr val="tx1"/>
+        </a:solidFill>
+        <a:latin typeface="+mn-lt"/>
+        <a:ea typeface="+mn-ea"/>
+        <a:cs typeface="+mn-cs"/>
+      </a:defRPr>
+    </a:lvl7pPr>
+    <a:lvl8pPr marL="3200400" algn="l" defTabSz="457200" rtl="0" eaLnBrk="1" latinLnBrk="0" hangingPunct="1">
+      <a:defRPr sz="1200" kern="1200">
+        <a:solidFill>
+          <a:schemeClr val="tx1"/>
+        </a:solidFill>
+        <a:latin typeface="+mn-lt"/>
+        <a:ea typeface="+mn-ea"/>
+        <a:cs typeface="+mn-cs"/>
+      </a:defRPr>
+    </a:lvl8pPr>
+    <a:lvl9pPr marL="3657600" algn="l" defTabSz="457200" rtl="0" eaLnBrk="1" latinLnBrk="0" hangingPunct="1">
+      <a:defRPr sz="1200" kern="1200">
+        <a:solidFill>
+          <a:schemeClr val="tx1"/>
+        </a:solidFill>
+        <a:latin typeface="+mn-lt"/>
+        <a:ea typeface="+mn-ea"/>
+        <a:cs typeface="+mn-cs"/>
+      </a:defRPr>
+    </a:lvl9pPr>
+  </p:notesStyle>
+</p:notesMaster>
+</file>
+
+<file path=ppt/notesSlides/notesSlide1.xml><?xml version="1.0" encoding="utf-8"?>
+<p:notes xmlns:a="http://schemas.openxmlformats.org/drawingml/2006/main" xmlns:p="http://schemas.openxmlformats.org/presentationml/2006/main" xmlns:r="http://schemas.openxmlformats.org/officeDocument/2006/relationships">
+  <p:cSld>
+    <p:spTree>
+      <p:nvGrpSpPr>
+        <p:cNvPr id="1" name=""/>
+        <p:cNvGrpSpPr/>
+        <p:nvPr/>
+      </p:nvGrpSpPr>
+      <p:grpSpPr>
+        <a:xfrm>
+          <a:off x="0" y="0"/>
+          <a:ext cx="0" cy="0"/>
+          <a:chOff x="0" y="0"/>
+          <a:chExt cx="0" cy="0"/>
+        </a:xfrm>
+      </p:grpSpPr>
+      <p:sp>
+        <p:nvSpPr>
+          <p:cNvPr id="2" name="Slide Image Placeholder 1"/>
+          <p:cNvSpPr>
+            <a:spLocks noGrp="1"/>
+          </p:cNvSpPr>
+          <p:nvPr>
+            <p:ph type="sldImg" idx="2"/>
+          </p:nvPr>
+        </p:nvSpPr>
+        <p:spPr/>
+      </p:sp>
+      <p:sp>
+        <p:nvSpPr>
+          <p:cNvPr id="3" name="Notes Placeholder 2"/>
+          <p:cNvSpPr>
+            <a:spLocks noGrp="1"/>
+          </p:cNvSpPr>
+          <p:nvPr>
+            <p:ph type="body" idx="3" sz="quarter"/>
+          </p:nvPr>
+        </p:nvSpPr>
+        <p:spPr/>
+        <p:txBody>
+          <a:bodyPr/>
+          <a:lstStyle/>
+          <a:p>
+            <a:r>
+              <a:t>【講師へ】このページは必読。**受講者には投影しなくてよい。**</a:t>
+            </a:r>
+          </a:p>
+          <a:p>
+            <a:r>
+              <a:t>・時間配分は実測していない仮案。休憩と質疑の余白が無いので、そのままだと溢れる。</a:t>
+            </a:r>
+          </a:p>
+          <a:p>
+            <a:r>
+              <a:t>・実施前に test-matrix §4 の「⚠ 実測」注記を必ず読むこと。5 件が想定と違った。</a:t>
+            </a:r>
+          </a:p>
+          <a:p>
+            <a:r>
+              <a:t>・第1回はパイロットとして回し、実測が取れるまで第2回以降の日程を確定しないこと。</a:t>
+            </a:r>
+          </a:p>
+        </p:txBody>
+      </p:sp>
+      <p:sp>
+        <p:nvSpPr>
+          <p:cNvPr id="4" name="Slide Number Placeholder 3"/>
+          <p:cNvSpPr>
+            <a:spLocks noGrp="1"/>
+          </p:cNvSpPr>
+          <p:nvPr>
+            <p:ph type="sldNum" idx="5" sz="quarter"/>
+          </p:nvPr>
+        </p:nvSpPr>
+        <p:spPr/>
+      </p:sp>
+    </p:spTree>
+  </p:cSld>
+  <p:clrMapOvr>
+    <a:masterClrMapping/>
+  </p:clrMapOvr>
+</p:notes>
+</file>
+
+<file path=ppt/notesSlides/notesSlide2.xml><?xml version="1.0" encoding="utf-8"?>
+<p:notes xmlns:a="http://schemas.openxmlformats.org/drawingml/2006/main" xmlns:p="http://schemas.openxmlformats.org/presentationml/2006/main" xmlns:r="http://schemas.openxmlformats.org/officeDocument/2006/relationships">
+  <p:cSld>
+    <p:spTree>
+      <p:nvGrpSpPr>
+        <p:cNvPr id="1" name=""/>
+        <p:cNvGrpSpPr/>
+        <p:nvPr/>
+      </p:nvGrpSpPr>
+      <p:grpSpPr>
+        <a:xfrm>
+          <a:off x="0" y="0"/>
+          <a:ext cx="0" cy="0"/>
+          <a:chOff x="0" y="0"/>
+          <a:chExt cx="0" cy="0"/>
+        </a:xfrm>
+      </p:grpSpPr>
+      <p:sp>
+        <p:nvSpPr>
+          <p:cNvPr id="2" name="Slide Image Placeholder 1"/>
+          <p:cNvSpPr>
+            <a:spLocks noGrp="1"/>
+          </p:cNvSpPr>
+          <p:nvPr>
+            <p:ph type="sldImg" idx="2"/>
+          </p:nvPr>
+        </p:nvSpPr>
+        <p:spPr/>
+      </p:sp>
+      <p:sp>
+        <p:nvSpPr>
+          <p:cNvPr id="3" name="Notes Placeholder 2"/>
+          <p:cNvSpPr>
+            <a:spLocks noGrp="1"/>
+          </p:cNvSpPr>
+          <p:nvPr>
+            <p:ph type="body" idx="3" sz="quarter"/>
+          </p:nvPr>
+        </p:nvSpPr>
+        <p:spPr/>
+        <p:txBody>
+          <a:bodyPr/>
+          <a:lstStyle/>
+          <a:p>
+            <a:r>
+              <a:t>【講師へ】</a:t>
+            </a:r>
+          </a:p>
+          <a:p>
+            <a:r>
+              <a:t>・**生徒役は若手にやらせること。**講師が両方やると聞き流される。</a:t>
+            </a:r>
+          </a:p>
+          <a:p>
+            <a:r>
+              <a:t>・時間割の外。各回の後ろに +15〜20 分で回す。</a:t>
+            </a:r>
+          </a:p>
+          <a:p>
+            <a:r>
+              <a:t>・全部やらない。その回で出た質問に近いものを 2〜3 個選ぶ。</a:t>
+            </a:r>
+          </a:p>
+        </p:txBody>
+      </p:sp>
+      <p:sp>
+        <p:nvSpPr>
+          <p:cNvPr id="4" name="Slide Number Placeholder 3"/>
+          <p:cNvSpPr>
+            <a:spLocks noGrp="1"/>
+          </p:cNvSpPr>
+          <p:nvPr>
+            <p:ph type="sldNum" idx="5" sz="quarter"/>
+          </p:nvPr>
+        </p:nvSpPr>
+        <p:spPr/>
+      </p:sp>
+    </p:spTree>
+  </p:cSld>
+  <p:clrMapOvr>
+    <a:masterClrMapping/>
+  </p:clrMapOvr>
+</p:notes>
 </file>
 
 <file path=ppt/slideLayouts/slideLayout1.xml><?xml version="1.0" encoding="utf-8"?>
@@ -12115,7 +12635,7 @@
                 </a:solidFill>
                 <a:latin typeface="Meiryo UI"/>
               </a:rPr>
-              <a:t>この教材の現在のステータス(講師は必読)</a:t>
+              <a:t>この教材の現在のステータス</a:t>
             </a:r>
           </a:p>
         </p:txBody>
@@ -14419,7 +14939,7 @@
                 </a:solidFill>
                 <a:latin typeface="Meiryo UI"/>
               </a:rPr>
-              <a:t>2-7. 演習 2-B: DUID の罠(講師が仕掛ける)</a:t>
+              <a:t>2-7. 演習 2-B: DUID の罠</a:t>
             </a:r>
           </a:p>
         </p:txBody>
@@ -22341,7 +22861,7 @@
                 </a:solidFill>
                 <a:latin typeface="Meiryo UI"/>
               </a:rPr>
-              <a:t>ゴール: 生徒役は若手にやらせる。時間割の外で各回 +15〜20 分</a:t>
+              <a:t>ゴール: 現場で実際に出る質問と、その答え方</a:t>
             </a:r>
           </a:p>
         </p:txBody>
@@ -30010,4 +30530,324 @@
   </a:objectDefaults>
   <a:extraClrSchemeLst/>
 </a:theme>
+</file>
+
+<file path=ppt/theme/theme2.xml><?xml version="1.0" encoding="utf-8"?>
+<a:theme xmlns:a="http://schemas.openxmlformats.org/drawingml/2006/main" name="Office Theme">
+  <a:themeElements>
+    <a:clrScheme name="Office">
+      <a:dk1>
+        <a:sysClr val="windowText" lastClr="000000"/>
+      </a:dk1>
+      <a:lt1>
+        <a:sysClr val="window" lastClr="FFFFFF"/>
+      </a:lt1>
+      <a:dk2>
+        <a:srgbClr val="1F497D"/>
+      </a:dk2>
+      <a:lt2>
+        <a:srgbClr val="EEECE1"/>
+      </a:lt2>
+      <a:accent1>
+        <a:srgbClr val="4F81BD"/>
+      </a:accent1>
+      <a:accent2>
+        <a:srgbClr val="C0504D"/>
+      </a:accent2>
+      <a:accent3>
+        <a:srgbClr val="9BBB59"/>
+      </a:accent3>
+      <a:accent4>
+        <a:srgbClr val="8064A2"/>
+      </a:accent4>
+      <a:accent5>
+        <a:srgbClr val="4BACC6"/>
+      </a:accent5>
+      <a:accent6>
+        <a:srgbClr val="F79646"/>
+      </a:accent6>
+      <a:hlink>
+        <a:srgbClr val="0000FF"/>
+      </a:hlink>
+      <a:folHlink>
+        <a:srgbClr val="800080"/>
+      </a:folHlink>
+    </a:clrScheme>
+    <a:fontScheme name="Office">
+      <a:majorFont>
+        <a:latin typeface="Calibri"/>
+        <a:ea typeface=""/>
+        <a:cs typeface=""/>
+        <a:font script="Jpan" typeface="ＭＳ Ｐゴシック"/>
+        <a:font script="Hang" typeface="맑은 고딕"/>
+        <a:font script="Hans" typeface="宋体"/>
+        <a:font script="Hant" typeface="新細明體"/>
+        <a:font script="Arab" typeface="Times New Roman"/>
+        <a:font script="Hebr" typeface="Times New Roman"/>
+        <a:font script="Thai" typeface="Angsana New"/>
+        <a:font script="Ethi" typeface="Nyala"/>
+        <a:font script="Beng" typeface="Vrinda"/>
+        <a:font script="Gujr" typeface="Shruti"/>
+        <a:font script="Khmr" typeface="MoolBoran"/>
+        <a:font script="Knda" typeface="Tunga"/>
+        <a:font script="Guru" typeface="Raavi"/>
+        <a:font script="Cans" typeface="Euphemia"/>
+        <a:font script="Cher" typeface="Plantagenet Cherokee"/>
+        <a:font script="Yiii" typeface="Microsoft Yi Baiti"/>
+        <a:font script="Tibt" typeface="Microsoft Himalaya"/>
+        <a:font script="Thaa" typeface="MV Boli"/>
+        <a:font script="Deva" typeface="Mangal"/>
+        <a:font script="Telu" typeface="Gautami"/>
+        <a:font script="Taml" typeface="Latha"/>
+        <a:font script="Syrc" typeface="Estrangelo Edessa"/>
+        <a:font script="Orya" typeface="Kalinga"/>
+        <a:font script="Mlym" typeface="Kartika"/>
+        <a:font script="Laoo" typeface="DokChampa"/>
+        <a:font script="Sinh" typeface="Iskoola Pota"/>
+        <a:font script="Mong" typeface="Mongolian Baiti"/>
+        <a:font script="Viet" typeface="Times New Roman"/>
+        <a:font script="Uigh" typeface="Microsoft Uighur"/>
+        <a:font script="Geor" typeface="Sylfaen"/>
+      </a:majorFont>
+      <a:minorFont>
+        <a:latin typeface="Calibri"/>
+        <a:ea typeface=""/>
+        <a:cs typeface=""/>
+        <a:font script="Jpan" typeface="ＭＳ Ｐゴシック"/>
+        <a:font script="Hang" typeface="맑은 고딕"/>
+        <a:font script="Hans" typeface="宋体"/>
+        <a:font script="Hant" typeface="新細明體"/>
+        <a:font script="Arab" typeface="Arial"/>
+        <a:font script="Hebr" typeface="Arial"/>
+        <a:font script="Thai" typeface="Cordia New"/>
+        <a:font script="Ethi" typeface="Nyala"/>
+        <a:font script="Beng" typeface="Vrinda"/>
+        <a:font script="Gujr" typeface="Shruti"/>
+        <a:font script="Khmr" typeface="DaunPenh"/>
+        <a:font script="Knda" typeface="Tunga"/>
+        <a:font script="Guru" typeface="Raavi"/>
+        <a:font script="Cans" typeface="Euphemia"/>
+        <a:font script="Cher" typeface="Plantagenet Cherokee"/>
+        <a:font script="Yiii" typeface="Microsoft Yi Baiti"/>
+        <a:font script="Tibt" typeface="Microsoft Himalaya"/>
+        <a:font script="Thaa" typeface="MV Boli"/>
+        <a:font script="Deva" typeface="Mangal"/>
+        <a:font script="Telu" typeface="Gautami"/>
+        <a:font script="Taml" typeface="Latha"/>
+        <a:font script="Syrc" typeface="Estrangelo Edessa"/>
+        <a:font script="Orya" typeface="Kalinga"/>
+        <a:font script="Mlym" typeface="Kartika"/>
+        <a:font script="Laoo" typeface="DokChampa"/>
+        <a:font script="Sinh" typeface="Iskoola Pota"/>
+        <a:font script="Mong" typeface="Mongolian Baiti"/>
+        <a:font script="Viet" typeface="Arial"/>
+        <a:font script="Uigh" typeface="Microsoft Uighur"/>
+        <a:font script="Geor" typeface="Sylfaen"/>
+      </a:minorFont>
+    </a:fontScheme>
+    <a:fmtScheme name="Office">
+      <a:fillStyleLst>
+        <a:solidFill>
+          <a:schemeClr val="phClr"/>
+        </a:solidFill>
+        <a:gradFill rotWithShape="1">
+          <a:gsLst>
+            <a:gs pos="0">
+              <a:schemeClr val="phClr">
+                <a:tint val="50000"/>
+                <a:satMod val="300000"/>
+              </a:schemeClr>
+            </a:gs>
+            <a:gs pos="35000">
+              <a:schemeClr val="phClr">
+                <a:tint val="37000"/>
+                <a:satMod val="300000"/>
+              </a:schemeClr>
+            </a:gs>
+            <a:gs pos="100000">
+              <a:schemeClr val="phClr">
+                <a:tint val="15000"/>
+                <a:satMod val="350000"/>
+              </a:schemeClr>
+            </a:gs>
+          </a:gsLst>
+          <a:lin ang="16200000" scaled="1"/>
+        </a:gradFill>
+        <a:gradFill rotWithShape="1">
+          <a:gsLst>
+            <a:gs pos="0">
+              <a:schemeClr val="phClr">
+                <a:tint val="100000"/>
+                <a:shade val="100000"/>
+                <a:satMod val="130000"/>
+              </a:schemeClr>
+            </a:gs>
+            <a:gs pos="100000">
+              <a:schemeClr val="phClr">
+                <a:tint val="50000"/>
+                <a:shade val="100000"/>
+                <a:satMod val="350000"/>
+              </a:schemeClr>
+            </a:gs>
+          </a:gsLst>
+          <a:lin ang="16200000" scaled="0"/>
+        </a:gradFill>
+      </a:fillStyleLst>
+      <a:lnStyleLst>
+        <a:ln w="9525" cap="flat" cmpd="sng" algn="ctr">
+          <a:solidFill>
+            <a:schemeClr val="phClr">
+              <a:shade val="95000"/>
+              <a:satMod val="105000"/>
+            </a:schemeClr>
+          </a:solidFill>
+          <a:prstDash val="solid"/>
+        </a:ln>
+        <a:ln w="25400" cap="flat" cmpd="sng" algn="ctr">
+          <a:solidFill>
+            <a:schemeClr val="phClr"/>
+          </a:solidFill>
+          <a:prstDash val="solid"/>
+        </a:ln>
+        <a:ln w="38100" cap="flat" cmpd="sng" algn="ctr">
+          <a:solidFill>
+            <a:schemeClr val="phClr"/>
+          </a:solidFill>
+          <a:prstDash val="solid"/>
+        </a:ln>
+      </a:lnStyleLst>
+      <a:effectStyleLst>
+        <a:effectStyle>
+          <a:effectLst>
+            <a:outerShdw blurRad="40000" dist="20000" dir="5400000" rotWithShape="0">
+              <a:srgbClr val="000000">
+                <a:alpha val="38000"/>
+              </a:srgbClr>
+            </a:outerShdw>
+          </a:effectLst>
+        </a:effectStyle>
+        <a:effectStyle>
+          <a:effectLst>
+            <a:outerShdw blurRad="40000" dist="23000" dir="5400000" rotWithShape="0">
+              <a:srgbClr val="000000">
+                <a:alpha val="35000"/>
+              </a:srgbClr>
+            </a:outerShdw>
+          </a:effectLst>
+        </a:effectStyle>
+        <a:effectStyle>
+          <a:effectLst>
+            <a:outerShdw blurRad="40000" dist="23000" dir="5400000" rotWithShape="0">
+              <a:srgbClr val="000000">
+                <a:alpha val="35000"/>
+              </a:srgbClr>
+            </a:outerShdw>
+          </a:effectLst>
+          <a:scene3d>
+            <a:camera prst="orthographicFront">
+              <a:rot lat="0" lon="0" rev="0"/>
+            </a:camera>
+            <a:lightRig rig="threePt" dir="t">
+              <a:rot lat="0" lon="0" rev="1200000"/>
+            </a:lightRig>
+          </a:scene3d>
+          <a:sp3d>
+            <a:bevelT w="63500" h="25400"/>
+          </a:sp3d>
+        </a:effectStyle>
+      </a:effectStyleLst>
+      <a:bgFillStyleLst>
+        <a:solidFill>
+          <a:schemeClr val="phClr"/>
+        </a:solidFill>
+        <a:gradFill rotWithShape="1">
+          <a:gsLst>
+            <a:gs pos="0">
+              <a:schemeClr val="phClr">
+                <a:tint val="40000"/>
+                <a:satMod val="350000"/>
+              </a:schemeClr>
+            </a:gs>
+            <a:gs pos="40000">
+              <a:schemeClr val="phClr">
+                <a:tint val="45000"/>
+                <a:shade val="99000"/>
+                <a:satMod val="350000"/>
+              </a:schemeClr>
+            </a:gs>
+            <a:gs pos="100000">
+              <a:schemeClr val="phClr">
+                <a:shade val="20000"/>
+                <a:satMod val="255000"/>
+              </a:schemeClr>
+            </a:gs>
+          </a:gsLst>
+          <a:path path="circle">
+            <a:fillToRect l="50000" t="-80000" r="50000" b="180000"/>
+          </a:path>
+        </a:gradFill>
+        <a:gradFill rotWithShape="1">
+          <a:gsLst>
+            <a:gs pos="0">
+              <a:schemeClr val="phClr">
+                <a:tint val="80000"/>
+                <a:satMod val="300000"/>
+              </a:schemeClr>
+            </a:gs>
+            <a:gs pos="100000">
+              <a:schemeClr val="phClr">
+                <a:shade val="30000"/>
+                <a:satMod val="200000"/>
+              </a:schemeClr>
+            </a:gs>
+          </a:gsLst>
+          <a:path path="circle">
+            <a:fillToRect l="50000" t="50000" r="50000" b="50000"/>
+          </a:path>
+        </a:gradFill>
+      </a:bgFillStyleLst>
+    </a:fmtScheme>
+  </a:themeElements>
+  <a:objectDefaults>
+    <a:spDef>
+      <a:spPr/>
+      <a:bodyPr/>
+      <a:lstStyle/>
+      <a:style>
+        <a:lnRef idx="1">
+          <a:schemeClr val="accent1"/>
+        </a:lnRef>
+        <a:fillRef idx="3">
+          <a:schemeClr val="accent1"/>
+        </a:fillRef>
+        <a:effectRef idx="2">
+          <a:schemeClr val="accent1"/>
+        </a:effectRef>
+        <a:fontRef idx="minor">
+          <a:schemeClr val="lt1"/>
+        </a:fontRef>
+      </a:style>
+    </a:spDef>
+    <a:lnDef>
+      <a:spPr/>
+      <a:bodyPr/>
+      <a:lstStyle/>
+      <a:style>
+        <a:lnRef idx="2">
+          <a:schemeClr val="accent1"/>
+        </a:lnRef>
+        <a:fillRef idx="0">
+          <a:schemeClr val="accent1"/>
+        </a:fillRef>
+        <a:effectRef idx="1">
+          <a:schemeClr val="accent1"/>
+        </a:effectRef>
+        <a:fontRef idx="minor">
+          <a:schemeClr val="tx1"/>
+        </a:fontRef>
+      </a:style>
+    </a:lnDef>
+  </a:objectDefaults>
+  <a:extraClrSchemeLst/>
+</a:theme>
 </file>
--- a/docs/ipoe-lab/slides/toranomaki.pptx
+++ b/docs/ipoe-lab/slides/toranomaki.pptx
@@ -15041,7 +15041,7 @@
                 </a:solidFill>
                 <a:latin typeface="Meiryo UI"/>
               </a:rPr>
-              <a:t>ra に切り替えたら → sudo CE_MAP_ADDR=2001:db8:1014:300:0:c633:6414:3 CE_SHARED_V4=198.51.100.20 ./setup-map-br.sh
+              <a:t>ra に切り替えたら → sudo CE_MAP_ADDR=2001:db8:1014:300:0:c633:6414:3 CE_SHARED_V4=198.51.100.20 CE_PSID=3 ./setup-map-br.sh
 ※ NGN 側だけ切り替えて BR を再実行しないと IPv4 が全断する (build.md §3)</a:t>
             </a:r>
           </a:p>
